--- a/docs/content/05-teaching-resources/slides/core/07-searching-and-sorting-algorithms.pptx
+++ b/docs/content/05-teaching-resources/slides/core/07-searching-and-sorting-algorithms.pptx
@@ -14,6 +14,12 @@
     <p:sldId id="262" r:id="rId14"/>
     <p:sldId id="263" r:id="rId15"/>
     <p:sldId id="264" r:id="rId16"/>
+    <p:sldId id="265" r:id="rId17"/>
+    <p:sldId id="266" r:id="rId18"/>
+    <p:sldId id="267" r:id="rId19"/>
+    <p:sldId id="268" r:id="rId20"/>
+    <p:sldId id="269" r:id="rId21"/>
+    <p:sldId id="270" r:id="rId22"/>
   </p:sldIdLst>
   <p:sldSz cx="12191695" cy="6858000" type="screen4x3"/>
   <p:notesSz cx="6858000" cy="9144000"/>
@@ -510,7 +516,22 @@
           <a:lstStyle/>
           <a:p>
             <a:r>
-              <a:t>Big O notation is not required, but students must reason about best, worst and average cases.</a:t>
+              <a:t>Answers:</a:t>
+            </a:r>
+          </a:p>
+          <a:p>
+            <a:r>
+              <a:t>1. The data must be sorted.</a:t>
+            </a:r>
+          </a:p>
+          <a:p>
+            <a:r>
+              <a:t>2. Checking every item.</a:t>
+            </a:r>
+          </a:p>
+          <a:p>
+            <a:r>
+              <a:t>3. Half of the remaining items.</a:t>
             </a:r>
           </a:p>
         </p:txBody>
@@ -580,7 +601,22 @@
           <a:lstStyle/>
           <a:p>
             <a:r>
-              <a:t>Give students a few minutes to answer on mini whiteboards or paper, then reveal the answers on the next slide.</a:t>
+              <a:t>Answers:</a:t>
+            </a:r>
+          </a:p>
+          <a:p>
+            <a:r>
+              <a:t>1. A pass makes no swaps.</a:t>
+            </a:r>
+          </a:p>
+          <a:p>
+            <a:r>
+              <a:t>2. Insertion sort.</a:t>
+            </a:r>
+          </a:p>
+          <a:p>
+            <a:r>
+              <a:t>3. It needs extra memory.</a:t>
             </a:r>
           </a:p>
         </p:txBody>
@@ -650,7 +686,7 @@
           <a:lstStyle/>
           <a:p>
             <a:r>
-              <a:t>Talk through any answers the class found difficult.</a:t>
+              <a:t>Big O notation is not required, but students must reason about best, worst and average cases.</a:t>
             </a:r>
           </a:p>
         </p:txBody>
@@ -676,6 +712,231 @@
 </file>
 
 <file path=ppt/notesSlides/notesSlide4.xml><?xml version="1.0" encoding="utf-8"?>
+<p:notes xmlns:a="http://schemas.openxmlformats.org/drawingml/2006/main" xmlns:p="http://schemas.openxmlformats.org/presentationml/2006/main" xmlns:r="http://schemas.openxmlformats.org/officeDocument/2006/relationships">
+  <p:cSld>
+    <p:spTree>
+      <p:nvGrpSpPr>
+        <p:cNvPr id="1" name=""/>
+        <p:cNvGrpSpPr/>
+        <p:nvPr/>
+      </p:nvGrpSpPr>
+      <p:grpSpPr>
+        <a:xfrm>
+          <a:off x="0" y="0"/>
+          <a:ext cx="0" cy="0"/>
+          <a:chOff x="0" y="0"/>
+          <a:chExt cx="0" cy="0"/>
+        </a:xfrm>
+      </p:grpSpPr>
+      <p:sp>
+        <p:nvSpPr>
+          <p:cNvPr id="2" name="Slide Image Placeholder 1"/>
+          <p:cNvSpPr>
+            <a:spLocks noGrp="1"/>
+          </p:cNvSpPr>
+          <p:nvPr>
+            <p:ph type="sldImg" idx="2"/>
+          </p:nvPr>
+        </p:nvSpPr>
+        <p:spPr/>
+      </p:sp>
+      <p:sp>
+        <p:nvSpPr>
+          <p:cNvPr id="3" name="Notes Placeholder 2"/>
+          <p:cNvSpPr>
+            <a:spLocks noGrp="1"/>
+          </p:cNvSpPr>
+          <p:nvPr>
+            <p:ph type="body" idx="3" sz="quarter"/>
+          </p:nvPr>
+        </p:nvSpPr>
+        <p:spPr/>
+        <p:txBody>
+          <a:bodyPr/>
+          <a:lstStyle/>
+          <a:p>
+            <a:r>
+              <a:t>Answers:</a:t>
+            </a:r>
+          </a:p>
+          <a:p>
+            <a:r>
+              <a:t>1. Execution time, memory use, number of comparisons.</a:t>
+            </a:r>
+          </a:p>
+          <a:p>
+            <a:r>
+              <a:t>2. Data already sorted: one pass.</a:t>
+            </a:r>
+          </a:p>
+          <a:p>
+            <a:r>
+              <a:t>3. Merge sort.</a:t>
+            </a:r>
+          </a:p>
+        </p:txBody>
+      </p:sp>
+      <p:sp>
+        <p:nvSpPr>
+          <p:cNvPr id="4" name="Slide Number Placeholder 3"/>
+          <p:cNvSpPr>
+            <a:spLocks noGrp="1"/>
+          </p:cNvSpPr>
+          <p:nvPr>
+            <p:ph type="sldNum" idx="5" sz="quarter"/>
+          </p:nvPr>
+        </p:nvSpPr>
+        <p:spPr/>
+      </p:sp>
+    </p:spTree>
+  </p:cSld>
+  <p:clrMapOvr>
+    <a:masterClrMapping/>
+  </p:clrMapOvr>
+</p:notes>
+</file>
+
+<file path=ppt/notesSlides/notesSlide5.xml><?xml version="1.0" encoding="utf-8"?>
+<p:notes xmlns:a="http://schemas.openxmlformats.org/drawingml/2006/main" xmlns:p="http://schemas.openxmlformats.org/presentationml/2006/main" xmlns:r="http://schemas.openxmlformats.org/officeDocument/2006/relationships">
+  <p:cSld>
+    <p:spTree>
+      <p:nvGrpSpPr>
+        <p:cNvPr id="1" name=""/>
+        <p:cNvGrpSpPr/>
+        <p:nvPr/>
+      </p:nvGrpSpPr>
+      <p:grpSpPr>
+        <a:xfrm>
+          <a:off x="0" y="0"/>
+          <a:ext cx="0" cy="0"/>
+          <a:chOff x="0" y="0"/>
+          <a:chExt cx="0" cy="0"/>
+        </a:xfrm>
+      </p:grpSpPr>
+      <p:sp>
+        <p:nvSpPr>
+          <p:cNvPr id="2" name="Slide Image Placeholder 1"/>
+          <p:cNvSpPr>
+            <a:spLocks noGrp="1"/>
+          </p:cNvSpPr>
+          <p:nvPr>
+            <p:ph type="sldImg" idx="2"/>
+          </p:nvPr>
+        </p:nvSpPr>
+        <p:spPr/>
+      </p:sp>
+      <p:sp>
+        <p:nvSpPr>
+          <p:cNvPr id="3" name="Notes Placeholder 2"/>
+          <p:cNvSpPr>
+            <a:spLocks noGrp="1"/>
+          </p:cNvSpPr>
+          <p:nvPr>
+            <p:ph type="body" idx="3" sz="quarter"/>
+          </p:nvPr>
+        </p:nvSpPr>
+        <p:spPr/>
+        <p:txBody>
+          <a:bodyPr/>
+          <a:lstStyle/>
+          <a:p>
+            <a:r>
+              <a:t>Give students a few minutes to answer on mini whiteboards or paper, then reveal the answers on the next slide.</a:t>
+            </a:r>
+          </a:p>
+        </p:txBody>
+      </p:sp>
+      <p:sp>
+        <p:nvSpPr>
+          <p:cNvPr id="4" name="Slide Number Placeholder 3"/>
+          <p:cNvSpPr>
+            <a:spLocks noGrp="1"/>
+          </p:cNvSpPr>
+          <p:nvPr>
+            <p:ph type="sldNum" idx="5" sz="quarter"/>
+          </p:nvPr>
+        </p:nvSpPr>
+        <p:spPr/>
+      </p:sp>
+    </p:spTree>
+  </p:cSld>
+  <p:clrMapOvr>
+    <a:masterClrMapping/>
+  </p:clrMapOvr>
+</p:notes>
+</file>
+
+<file path=ppt/notesSlides/notesSlide6.xml><?xml version="1.0" encoding="utf-8"?>
+<p:notes xmlns:a="http://schemas.openxmlformats.org/drawingml/2006/main" xmlns:p="http://schemas.openxmlformats.org/presentationml/2006/main" xmlns:r="http://schemas.openxmlformats.org/officeDocument/2006/relationships">
+  <p:cSld>
+    <p:spTree>
+      <p:nvGrpSpPr>
+        <p:cNvPr id="1" name=""/>
+        <p:cNvGrpSpPr/>
+        <p:nvPr/>
+      </p:nvGrpSpPr>
+      <p:grpSpPr>
+        <a:xfrm>
+          <a:off x="0" y="0"/>
+          <a:ext cx="0" cy="0"/>
+          <a:chOff x="0" y="0"/>
+          <a:chExt cx="0" cy="0"/>
+        </a:xfrm>
+      </p:grpSpPr>
+      <p:sp>
+        <p:nvSpPr>
+          <p:cNvPr id="2" name="Slide Image Placeholder 1"/>
+          <p:cNvSpPr>
+            <a:spLocks noGrp="1"/>
+          </p:cNvSpPr>
+          <p:nvPr>
+            <p:ph type="sldImg" idx="2"/>
+          </p:nvPr>
+        </p:nvSpPr>
+        <p:spPr/>
+      </p:sp>
+      <p:sp>
+        <p:nvSpPr>
+          <p:cNvPr id="3" name="Notes Placeholder 2"/>
+          <p:cNvSpPr>
+            <a:spLocks noGrp="1"/>
+          </p:cNvSpPr>
+          <p:nvPr>
+            <p:ph type="body" idx="3" sz="quarter"/>
+          </p:nvPr>
+        </p:nvSpPr>
+        <p:spPr/>
+        <p:txBody>
+          <a:bodyPr/>
+          <a:lstStyle/>
+          <a:p>
+            <a:r>
+              <a:t>Talk through any answers the class found difficult.</a:t>
+            </a:r>
+          </a:p>
+        </p:txBody>
+      </p:sp>
+      <p:sp>
+        <p:nvSpPr>
+          <p:cNvPr id="4" name="Slide Number Placeholder 3"/>
+          <p:cNvSpPr>
+            <a:spLocks noGrp="1"/>
+          </p:cNvSpPr>
+          <p:nvPr>
+            <p:ph type="sldNum" idx="5" sz="quarter"/>
+          </p:nvPr>
+        </p:nvSpPr>
+        <p:spPr/>
+      </p:sp>
+    </p:spTree>
+  </p:cSld>
+  <p:clrMapOvr>
+    <a:masterClrMapping/>
+  </p:clrMapOvr>
+</p:notes>
+</file>
+
+<file path=ppt/notesSlides/notesSlide7.xml><?xml version="1.0" encoding="utf-8"?>
 <p:notes xmlns:a="http://schemas.openxmlformats.org/drawingml/2006/main" xmlns:p="http://schemas.openxmlformats.org/presentationml/2006/main" xmlns:r="http://schemas.openxmlformats.org/officeDocument/2006/relationships">
   <p:cSld>
     <p:spTree>
@@ -4045,6 +4306,3797 @@
 </p:sld>
 </file>
 
+<file path=ppt/slides/slide10.xml><?xml version="1.0" encoding="utf-8"?>
+<p:sld xmlns:a="http://schemas.openxmlformats.org/drawingml/2006/main" xmlns:p="http://schemas.openxmlformats.org/presentationml/2006/main" xmlns:r="http://schemas.openxmlformats.org/officeDocument/2006/relationships">
+  <p:cSld>
+    <p:bg>
+      <p:bgPr>
+        <a:solidFill>
+          <a:srgbClr val="FFFFFF"/>
+        </a:solidFill>
+        <a:effectLst/>
+      </p:bgPr>
+    </p:bg>
+    <p:spTree>
+      <p:nvGrpSpPr>
+        <p:cNvPr id="1" name=""/>
+        <p:cNvGrpSpPr/>
+        <p:nvPr/>
+      </p:nvGrpSpPr>
+      <p:grpSpPr/>
+      <p:sp>
+        <p:nvSpPr>
+          <p:cNvPr id="2" name="TextBox 1"/>
+          <p:cNvSpPr txBox="1"/>
+          <p:nvPr/>
+        </p:nvSpPr>
+        <p:spPr>
+          <a:xfrm>
+            <a:off x="548640" y="320040"/>
+            <a:ext cx="11094415" cy="274320"/>
+          </a:xfrm>
+          <a:prstGeom prst="rect">
+            <a:avLst/>
+          </a:prstGeom>
+          <a:noFill/>
+        </p:spPr>
+        <p:txBody>
+          <a:bodyPr wrap="square" anchor="t" lIns="0" rIns="0" tIns="0" bIns="0"/>
+          <a:lstStyle/>
+          <a:p>
+            <a:pPr algn="l"/>
+            <a:r>
+              <a:rPr sz="1100" b="1" i="0">
+                <a:solidFill>
+                  <a:srgbClr val="54595D"/>
+                </a:solidFill>
+                <a:latin typeface="Calibri"/>
+              </a:rPr>
+              <a:t>CORE COMPONENT  ·  Core Paper 1</a:t>
+            </a:r>
+          </a:p>
+        </p:txBody>
+      </p:sp>
+      <p:sp>
+        <p:nvSpPr>
+          <p:cNvPr id="3" name="TextBox 2"/>
+          <p:cNvSpPr txBox="1"/>
+          <p:nvPr/>
+        </p:nvSpPr>
+        <p:spPr>
+          <a:xfrm>
+            <a:off x="548640" y="566928"/>
+            <a:ext cx="11094415" cy="822960"/>
+          </a:xfrm>
+          <a:prstGeom prst="rect">
+            <a:avLst/>
+          </a:prstGeom>
+          <a:noFill/>
+        </p:spPr>
+        <p:txBody>
+          <a:bodyPr wrap="square" anchor="ctr" lIns="0" rIns="0" tIns="0" bIns="0"/>
+          <a:lstStyle/>
+          <a:p>
+            <a:pPr algn="l"/>
+            <a:r>
+              <a:rPr sz="3200" b="1" i="0">
+                <a:solidFill>
+                  <a:srgbClr val="03306E"/>
+                </a:solidFill>
+                <a:latin typeface="Cambria"/>
+              </a:rPr>
+              <a:t>Comparing algorithms</a:t>
+            </a:r>
+          </a:p>
+        </p:txBody>
+      </p:sp>
+      <p:sp>
+        <p:nvSpPr>
+          <p:cNvPr id="4" name="TextBox 3"/>
+          <p:cNvSpPr txBox="1"/>
+          <p:nvPr/>
+        </p:nvSpPr>
+        <p:spPr>
+          <a:xfrm>
+            <a:off x="548640" y="6446520"/>
+            <a:ext cx="8229600" cy="274320"/>
+          </a:xfrm>
+          <a:prstGeom prst="rect">
+            <a:avLst/>
+          </a:prstGeom>
+          <a:noFill/>
+        </p:spPr>
+        <p:txBody>
+          <a:bodyPr wrap="square" anchor="t" lIns="0" rIns="0" tIns="0" bIns="0"/>
+          <a:lstStyle/>
+          <a:p>
+            <a:pPr algn="l"/>
+            <a:r>
+              <a:rPr sz="1000" b="0" i="0">
+                <a:solidFill>
+                  <a:srgbClr val="54595D"/>
+                </a:solidFill>
+                <a:latin typeface="Calibri"/>
+              </a:rPr>
+              <a:t>Digital Software Development T Level  ·  Searching and Sorting Algorithms</a:t>
+            </a:r>
+          </a:p>
+        </p:txBody>
+      </p:sp>
+      <p:sp>
+        <p:nvSpPr>
+          <p:cNvPr id="5" name="TextBox 4"/>
+          <p:cNvSpPr txBox="1"/>
+          <p:nvPr/>
+        </p:nvSpPr>
+        <p:spPr>
+          <a:xfrm>
+            <a:off x="10728655" y="6446520"/>
+            <a:ext cx="914400" cy="274320"/>
+          </a:xfrm>
+          <a:prstGeom prst="rect">
+            <a:avLst/>
+          </a:prstGeom>
+          <a:noFill/>
+        </p:spPr>
+        <p:txBody>
+          <a:bodyPr wrap="square" anchor="t" lIns="0" rIns="0" tIns="0" bIns="0"/>
+          <a:lstStyle/>
+          <a:p>
+            <a:pPr algn="r"/>
+            <a:r>
+              <a:rPr sz="1000" b="0" i="0">
+                <a:solidFill>
+                  <a:srgbClr val="54595D"/>
+                </a:solidFill>
+                <a:latin typeface="Calibri"/>
+              </a:rPr>
+              <a:t>10</a:t>
+            </a:r>
+          </a:p>
+        </p:txBody>
+      </p:sp>
+      <p:sp>
+        <p:nvSpPr>
+          <p:cNvPr id="6" name="Rounded Rectangle 5"/>
+          <p:cNvSpPr/>
+          <p:nvPr/>
+        </p:nvSpPr>
+        <p:spPr>
+          <a:xfrm>
+            <a:off x="548640" y="1600200"/>
+            <a:ext cx="5410047" cy="2148840"/>
+          </a:xfrm>
+          <a:prstGeom prst="roundRect">
+            <a:avLst>
+              <a:gd name="adj" fmla="val 6000"/>
+            </a:avLst>
+          </a:prstGeom>
+          <a:solidFill>
+            <a:srgbClr val="EAF3FF"/>
+          </a:solidFill>
+          <a:ln>
+            <a:noFill/>
+          </a:ln>
+          <a:effectLst/>
+        </p:spPr>
+        <p:style>
+          <a:lnRef idx="1">
+            <a:schemeClr val="accent1"/>
+          </a:lnRef>
+          <a:fillRef idx="3">
+            <a:schemeClr val="accent1"/>
+          </a:fillRef>
+          <a:effectRef idx="2">
+            <a:schemeClr val="accent1"/>
+          </a:effectRef>
+          <a:fontRef idx="minor">
+            <a:schemeClr val="lt1"/>
+          </a:fontRef>
+        </p:style>
+        <p:txBody>
+          <a:bodyPr rtlCol="0" anchor="ctr"/>
+          <a:lstStyle/>
+          <a:p/>
+        </p:txBody>
+      </p:sp>
+      <p:sp>
+        <p:nvSpPr>
+          <p:cNvPr id="7" name="Oval 6"/>
+          <p:cNvSpPr/>
+          <p:nvPr/>
+        </p:nvSpPr>
+        <p:spPr>
+          <a:xfrm>
+            <a:off x="777240" y="1828800"/>
+            <a:ext cx="457200" cy="457200"/>
+          </a:xfrm>
+          <a:prstGeom prst="ellipse">
+            <a:avLst/>
+          </a:prstGeom>
+          <a:solidFill>
+            <a:srgbClr val="F2B705"/>
+          </a:solidFill>
+          <a:ln>
+            <a:noFill/>
+          </a:ln>
+          <a:effectLst/>
+        </p:spPr>
+        <p:style>
+          <a:lnRef idx="1">
+            <a:schemeClr val="accent1"/>
+          </a:lnRef>
+          <a:fillRef idx="3">
+            <a:schemeClr val="accent1"/>
+          </a:fillRef>
+          <a:effectRef idx="2">
+            <a:schemeClr val="accent1"/>
+          </a:effectRef>
+          <a:fontRef idx="minor">
+            <a:schemeClr val="lt1"/>
+          </a:fontRef>
+        </p:style>
+        <p:txBody>
+          <a:bodyPr rtlCol="0" anchor="ctr" lIns="0" rIns="0" tIns="0" bIns="0"/>
+          <a:lstStyle/>
+          <a:p>
+            <a:pPr algn="ctr"/>
+            <a:r>
+              <a:rPr sz="1500" b="1">
+                <a:solidFill>
+                  <a:srgbClr val="202122"/>
+                </a:solidFill>
+                <a:latin typeface="Calibri"/>
+              </a:rPr>
+              <a:t>1</a:t>
+            </a:r>
+          </a:p>
+        </p:txBody>
+      </p:sp>
+      <p:sp>
+        <p:nvSpPr>
+          <p:cNvPr id="8" name="TextBox 7"/>
+          <p:cNvSpPr txBox="1"/>
+          <p:nvPr/>
+        </p:nvSpPr>
+        <p:spPr>
+          <a:xfrm>
+            <a:off x="1371600" y="1801368"/>
+            <a:ext cx="4404207" cy="512064"/>
+          </a:xfrm>
+          <a:prstGeom prst="rect">
+            <a:avLst/>
+          </a:prstGeom>
+          <a:noFill/>
+        </p:spPr>
+        <p:txBody>
+          <a:bodyPr wrap="square" anchor="ctr" lIns="0" rIns="0" tIns="0" bIns="0"/>
+          <a:lstStyle/>
+          <a:p>
+            <a:pPr algn="l"/>
+            <a:r>
+              <a:rPr sz="1900" b="1" i="0">
+                <a:solidFill>
+                  <a:srgbClr val="03306E"/>
+                </a:solidFill>
+                <a:latin typeface="Calibri"/>
+              </a:rPr>
+              <a:t>Execution time</a:t>
+            </a:r>
+          </a:p>
+        </p:txBody>
+      </p:sp>
+      <p:sp>
+        <p:nvSpPr>
+          <p:cNvPr id="9" name="TextBox 8"/>
+          <p:cNvSpPr txBox="1"/>
+          <p:nvPr/>
+        </p:nvSpPr>
+        <p:spPr>
+          <a:xfrm>
+            <a:off x="777240" y="2468880"/>
+            <a:ext cx="4952847" cy="1143000"/>
+          </a:xfrm>
+          <a:prstGeom prst="rect">
+            <a:avLst/>
+          </a:prstGeom>
+          <a:noFill/>
+        </p:spPr>
+        <p:txBody>
+          <a:bodyPr wrap="square" anchor="t" lIns="0" rIns="0" tIns="0" bIns="0"/>
+          <a:lstStyle/>
+          <a:p>
+            <a:pPr algn="l"/>
+            <a:r>
+              <a:rPr sz="2000" b="0" i="0">
+                <a:solidFill>
+                  <a:srgbClr val="202122"/>
+                </a:solidFill>
+                <a:latin typeface="Calibri"/>
+              </a:rPr>
+              <a:t>How long it takes as the data grows.</a:t>
+            </a:r>
+          </a:p>
+        </p:txBody>
+      </p:sp>
+      <p:sp>
+        <p:nvSpPr>
+          <p:cNvPr id="10" name="Rounded Rectangle 9"/>
+          <p:cNvSpPr/>
+          <p:nvPr/>
+        </p:nvSpPr>
+        <p:spPr>
+          <a:xfrm>
+            <a:off x="6233007" y="1600200"/>
+            <a:ext cx="5410047" cy="2148840"/>
+          </a:xfrm>
+          <a:prstGeom prst="roundRect">
+            <a:avLst>
+              <a:gd name="adj" fmla="val 6000"/>
+            </a:avLst>
+          </a:prstGeom>
+          <a:solidFill>
+            <a:srgbClr val="EAF3FF"/>
+          </a:solidFill>
+          <a:ln>
+            <a:noFill/>
+          </a:ln>
+          <a:effectLst/>
+        </p:spPr>
+        <p:style>
+          <a:lnRef idx="1">
+            <a:schemeClr val="accent1"/>
+          </a:lnRef>
+          <a:fillRef idx="3">
+            <a:schemeClr val="accent1"/>
+          </a:fillRef>
+          <a:effectRef idx="2">
+            <a:schemeClr val="accent1"/>
+          </a:effectRef>
+          <a:fontRef idx="minor">
+            <a:schemeClr val="lt1"/>
+          </a:fontRef>
+        </p:style>
+        <p:txBody>
+          <a:bodyPr rtlCol="0" anchor="ctr"/>
+          <a:lstStyle/>
+          <a:p/>
+        </p:txBody>
+      </p:sp>
+      <p:sp>
+        <p:nvSpPr>
+          <p:cNvPr id="11" name="Oval 10"/>
+          <p:cNvSpPr/>
+          <p:nvPr/>
+        </p:nvSpPr>
+        <p:spPr>
+          <a:xfrm>
+            <a:off x="6461607" y="1828800"/>
+            <a:ext cx="457200" cy="457200"/>
+          </a:xfrm>
+          <a:prstGeom prst="ellipse">
+            <a:avLst/>
+          </a:prstGeom>
+          <a:solidFill>
+            <a:srgbClr val="F2B705"/>
+          </a:solidFill>
+          <a:ln>
+            <a:noFill/>
+          </a:ln>
+          <a:effectLst/>
+        </p:spPr>
+        <p:style>
+          <a:lnRef idx="1">
+            <a:schemeClr val="accent1"/>
+          </a:lnRef>
+          <a:fillRef idx="3">
+            <a:schemeClr val="accent1"/>
+          </a:fillRef>
+          <a:effectRef idx="2">
+            <a:schemeClr val="accent1"/>
+          </a:effectRef>
+          <a:fontRef idx="minor">
+            <a:schemeClr val="lt1"/>
+          </a:fontRef>
+        </p:style>
+        <p:txBody>
+          <a:bodyPr rtlCol="0" anchor="ctr" lIns="0" rIns="0" tIns="0" bIns="0"/>
+          <a:lstStyle/>
+          <a:p>
+            <a:pPr algn="ctr"/>
+            <a:r>
+              <a:rPr sz="1500" b="1">
+                <a:solidFill>
+                  <a:srgbClr val="202122"/>
+                </a:solidFill>
+                <a:latin typeface="Calibri"/>
+              </a:rPr>
+              <a:t>2</a:t>
+            </a:r>
+          </a:p>
+        </p:txBody>
+      </p:sp>
+      <p:sp>
+        <p:nvSpPr>
+          <p:cNvPr id="12" name="TextBox 11"/>
+          <p:cNvSpPr txBox="1"/>
+          <p:nvPr/>
+        </p:nvSpPr>
+        <p:spPr>
+          <a:xfrm>
+            <a:off x="7055967" y="1801368"/>
+            <a:ext cx="4404207" cy="512064"/>
+          </a:xfrm>
+          <a:prstGeom prst="rect">
+            <a:avLst/>
+          </a:prstGeom>
+          <a:noFill/>
+        </p:spPr>
+        <p:txBody>
+          <a:bodyPr wrap="square" anchor="ctr" lIns="0" rIns="0" tIns="0" bIns="0"/>
+          <a:lstStyle/>
+          <a:p>
+            <a:pPr algn="l"/>
+            <a:r>
+              <a:rPr sz="1900" b="1" i="0">
+                <a:solidFill>
+                  <a:srgbClr val="03306E"/>
+                </a:solidFill>
+                <a:latin typeface="Calibri"/>
+              </a:rPr>
+              <a:t>Memory use</a:t>
+            </a:r>
+          </a:p>
+        </p:txBody>
+      </p:sp>
+      <p:sp>
+        <p:nvSpPr>
+          <p:cNvPr id="13" name="TextBox 12"/>
+          <p:cNvSpPr txBox="1"/>
+          <p:nvPr/>
+        </p:nvSpPr>
+        <p:spPr>
+          <a:xfrm>
+            <a:off x="6461607" y="2468880"/>
+            <a:ext cx="4952847" cy="1143000"/>
+          </a:xfrm>
+          <a:prstGeom prst="rect">
+            <a:avLst/>
+          </a:prstGeom>
+          <a:noFill/>
+        </p:spPr>
+        <p:txBody>
+          <a:bodyPr wrap="square" anchor="t" lIns="0" rIns="0" tIns="0" bIns="0"/>
+          <a:lstStyle/>
+          <a:p>
+            <a:pPr algn="l"/>
+            <a:r>
+              <a:rPr sz="2000" b="0" i="0">
+                <a:solidFill>
+                  <a:srgbClr val="202122"/>
+                </a:solidFill>
+                <a:latin typeface="Calibri"/>
+              </a:rPr>
+              <a:t>Merge sort needs extra memory to merge; bubble and insertion sort in place.</a:t>
+            </a:r>
+          </a:p>
+        </p:txBody>
+      </p:sp>
+      <p:sp>
+        <p:nvSpPr>
+          <p:cNvPr id="14" name="Rounded Rectangle 13"/>
+          <p:cNvSpPr/>
+          <p:nvPr/>
+        </p:nvSpPr>
+        <p:spPr>
+          <a:xfrm>
+            <a:off x="548640" y="4023360"/>
+            <a:ext cx="5410047" cy="2148840"/>
+          </a:xfrm>
+          <a:prstGeom prst="roundRect">
+            <a:avLst>
+              <a:gd name="adj" fmla="val 6000"/>
+            </a:avLst>
+          </a:prstGeom>
+          <a:solidFill>
+            <a:srgbClr val="EAF3FF"/>
+          </a:solidFill>
+          <a:ln>
+            <a:noFill/>
+          </a:ln>
+          <a:effectLst/>
+        </p:spPr>
+        <p:style>
+          <a:lnRef idx="1">
+            <a:schemeClr val="accent1"/>
+          </a:lnRef>
+          <a:fillRef idx="3">
+            <a:schemeClr val="accent1"/>
+          </a:fillRef>
+          <a:effectRef idx="2">
+            <a:schemeClr val="accent1"/>
+          </a:effectRef>
+          <a:fontRef idx="minor">
+            <a:schemeClr val="lt1"/>
+          </a:fontRef>
+        </p:style>
+        <p:txBody>
+          <a:bodyPr rtlCol="0" anchor="ctr"/>
+          <a:lstStyle/>
+          <a:p/>
+        </p:txBody>
+      </p:sp>
+      <p:sp>
+        <p:nvSpPr>
+          <p:cNvPr id="15" name="Oval 14"/>
+          <p:cNvSpPr/>
+          <p:nvPr/>
+        </p:nvSpPr>
+        <p:spPr>
+          <a:xfrm>
+            <a:off x="777240" y="4251960"/>
+            <a:ext cx="457200" cy="457200"/>
+          </a:xfrm>
+          <a:prstGeom prst="ellipse">
+            <a:avLst/>
+          </a:prstGeom>
+          <a:solidFill>
+            <a:srgbClr val="F2B705"/>
+          </a:solidFill>
+          <a:ln>
+            <a:noFill/>
+          </a:ln>
+          <a:effectLst/>
+        </p:spPr>
+        <p:style>
+          <a:lnRef idx="1">
+            <a:schemeClr val="accent1"/>
+          </a:lnRef>
+          <a:fillRef idx="3">
+            <a:schemeClr val="accent1"/>
+          </a:fillRef>
+          <a:effectRef idx="2">
+            <a:schemeClr val="accent1"/>
+          </a:effectRef>
+          <a:fontRef idx="minor">
+            <a:schemeClr val="lt1"/>
+          </a:fontRef>
+        </p:style>
+        <p:txBody>
+          <a:bodyPr rtlCol="0" anchor="ctr" lIns="0" rIns="0" tIns="0" bIns="0"/>
+          <a:lstStyle/>
+          <a:p>
+            <a:pPr algn="ctr"/>
+            <a:r>
+              <a:rPr sz="1500" b="1">
+                <a:solidFill>
+                  <a:srgbClr val="202122"/>
+                </a:solidFill>
+                <a:latin typeface="Calibri"/>
+              </a:rPr>
+              <a:t>3</a:t>
+            </a:r>
+          </a:p>
+        </p:txBody>
+      </p:sp>
+      <p:sp>
+        <p:nvSpPr>
+          <p:cNvPr id="16" name="TextBox 15"/>
+          <p:cNvSpPr txBox="1"/>
+          <p:nvPr/>
+        </p:nvSpPr>
+        <p:spPr>
+          <a:xfrm>
+            <a:off x="1371600" y="4224528"/>
+            <a:ext cx="4404207" cy="512064"/>
+          </a:xfrm>
+          <a:prstGeom prst="rect">
+            <a:avLst/>
+          </a:prstGeom>
+          <a:noFill/>
+        </p:spPr>
+        <p:txBody>
+          <a:bodyPr wrap="square" anchor="ctr" lIns="0" rIns="0" tIns="0" bIns="0"/>
+          <a:lstStyle/>
+          <a:p>
+            <a:pPr algn="l"/>
+            <a:r>
+              <a:rPr sz="1900" b="1" i="0">
+                <a:solidFill>
+                  <a:srgbClr val="03306E"/>
+                </a:solidFill>
+                <a:latin typeface="Calibri"/>
+              </a:rPr>
+              <a:t>Comparisons</a:t>
+            </a:r>
+          </a:p>
+        </p:txBody>
+      </p:sp>
+      <p:sp>
+        <p:nvSpPr>
+          <p:cNvPr id="17" name="TextBox 16"/>
+          <p:cNvSpPr txBox="1"/>
+          <p:nvPr/>
+        </p:nvSpPr>
+        <p:spPr>
+          <a:xfrm>
+            <a:off x="777240" y="4892040"/>
+            <a:ext cx="4952847" cy="1143000"/>
+          </a:xfrm>
+          <a:prstGeom prst="rect">
+            <a:avLst/>
+          </a:prstGeom>
+          <a:noFill/>
+        </p:spPr>
+        <p:txBody>
+          <a:bodyPr wrap="square" anchor="t" lIns="0" rIns="0" tIns="0" bIns="0"/>
+          <a:lstStyle/>
+          <a:p>
+            <a:pPr algn="l"/>
+            <a:r>
+              <a:rPr sz="2000" b="0" i="0">
+                <a:solidFill>
+                  <a:srgbClr val="202122"/>
+                </a:solidFill>
+                <a:latin typeface="Calibri"/>
+              </a:rPr>
+              <a:t>Count how many times items are compared.</a:t>
+            </a:r>
+          </a:p>
+        </p:txBody>
+      </p:sp>
+      <p:sp>
+        <p:nvSpPr>
+          <p:cNvPr id="18" name="Rounded Rectangle 17"/>
+          <p:cNvSpPr/>
+          <p:nvPr/>
+        </p:nvSpPr>
+        <p:spPr>
+          <a:xfrm>
+            <a:off x="6233007" y="4023360"/>
+            <a:ext cx="5410047" cy="2148840"/>
+          </a:xfrm>
+          <a:prstGeom prst="roundRect">
+            <a:avLst>
+              <a:gd name="adj" fmla="val 6000"/>
+            </a:avLst>
+          </a:prstGeom>
+          <a:solidFill>
+            <a:srgbClr val="EAF3FF"/>
+          </a:solidFill>
+          <a:ln>
+            <a:noFill/>
+          </a:ln>
+          <a:effectLst/>
+        </p:spPr>
+        <p:style>
+          <a:lnRef idx="1">
+            <a:schemeClr val="accent1"/>
+          </a:lnRef>
+          <a:fillRef idx="3">
+            <a:schemeClr val="accent1"/>
+          </a:fillRef>
+          <a:effectRef idx="2">
+            <a:schemeClr val="accent1"/>
+          </a:effectRef>
+          <a:fontRef idx="minor">
+            <a:schemeClr val="lt1"/>
+          </a:fontRef>
+        </p:style>
+        <p:txBody>
+          <a:bodyPr rtlCol="0" anchor="ctr"/>
+          <a:lstStyle/>
+          <a:p/>
+        </p:txBody>
+      </p:sp>
+      <p:sp>
+        <p:nvSpPr>
+          <p:cNvPr id="19" name="Oval 18"/>
+          <p:cNvSpPr/>
+          <p:nvPr/>
+        </p:nvSpPr>
+        <p:spPr>
+          <a:xfrm>
+            <a:off x="6461607" y="4251960"/>
+            <a:ext cx="457200" cy="457200"/>
+          </a:xfrm>
+          <a:prstGeom prst="ellipse">
+            <a:avLst/>
+          </a:prstGeom>
+          <a:solidFill>
+            <a:srgbClr val="F2B705"/>
+          </a:solidFill>
+          <a:ln>
+            <a:noFill/>
+          </a:ln>
+          <a:effectLst/>
+        </p:spPr>
+        <p:style>
+          <a:lnRef idx="1">
+            <a:schemeClr val="accent1"/>
+          </a:lnRef>
+          <a:fillRef idx="3">
+            <a:schemeClr val="accent1"/>
+          </a:fillRef>
+          <a:effectRef idx="2">
+            <a:schemeClr val="accent1"/>
+          </a:effectRef>
+          <a:fontRef idx="minor">
+            <a:schemeClr val="lt1"/>
+          </a:fontRef>
+        </p:style>
+        <p:txBody>
+          <a:bodyPr rtlCol="0" anchor="ctr" lIns="0" rIns="0" tIns="0" bIns="0"/>
+          <a:lstStyle/>
+          <a:p>
+            <a:pPr algn="ctr"/>
+            <a:r>
+              <a:rPr sz="1500" b="1">
+                <a:solidFill>
+                  <a:srgbClr val="202122"/>
+                </a:solidFill>
+                <a:latin typeface="Calibri"/>
+              </a:rPr>
+              <a:t>4</a:t>
+            </a:r>
+          </a:p>
+        </p:txBody>
+      </p:sp>
+      <p:sp>
+        <p:nvSpPr>
+          <p:cNvPr id="20" name="TextBox 19"/>
+          <p:cNvSpPr txBox="1"/>
+          <p:nvPr/>
+        </p:nvSpPr>
+        <p:spPr>
+          <a:xfrm>
+            <a:off x="7055967" y="4224528"/>
+            <a:ext cx="4404207" cy="512064"/>
+          </a:xfrm>
+          <a:prstGeom prst="rect">
+            <a:avLst/>
+          </a:prstGeom>
+          <a:noFill/>
+        </p:spPr>
+        <p:txBody>
+          <a:bodyPr wrap="square" anchor="ctr" lIns="0" rIns="0" tIns="0" bIns="0"/>
+          <a:lstStyle/>
+          <a:p>
+            <a:pPr algn="l"/>
+            <a:r>
+              <a:rPr sz="1900" b="1" i="0">
+                <a:solidFill>
+                  <a:srgbClr val="03306E"/>
+                </a:solidFill>
+                <a:latin typeface="Calibri"/>
+              </a:rPr>
+              <a:t>Best, worst, average</a:t>
+            </a:r>
+          </a:p>
+        </p:txBody>
+      </p:sp>
+      <p:sp>
+        <p:nvSpPr>
+          <p:cNvPr id="21" name="TextBox 20"/>
+          <p:cNvSpPr txBox="1"/>
+          <p:nvPr/>
+        </p:nvSpPr>
+        <p:spPr>
+          <a:xfrm>
+            <a:off x="6461607" y="4892040"/>
+            <a:ext cx="4952847" cy="1143000"/>
+          </a:xfrm>
+          <a:prstGeom prst="rect">
+            <a:avLst/>
+          </a:prstGeom>
+          <a:noFill/>
+        </p:spPr>
+        <p:txBody>
+          <a:bodyPr wrap="square" anchor="t" lIns="0" rIns="0" tIns="0" bIns="0"/>
+          <a:lstStyle/>
+          <a:p>
+            <a:pPr algn="l"/>
+            <a:r>
+              <a:rPr sz="2000" b="0" i="0">
+                <a:solidFill>
+                  <a:srgbClr val="202122"/>
+                </a:solidFill>
+                <a:latin typeface="Calibri"/>
+              </a:rPr>
+              <a:t>Bubble sort on sorted data can finish in one pass; reversed data is its worst case.</a:t>
+            </a:r>
+          </a:p>
+        </p:txBody>
+      </p:sp>
+    </p:spTree>
+  </p:cSld>
+  <p:clrMapOvr>
+    <a:masterClrMapping/>
+  </p:clrMapOvr>
+</p:sld>
+</file>
+
+<file path=ppt/slides/slide11.xml><?xml version="1.0" encoding="utf-8"?>
+<p:sld xmlns:a="http://schemas.openxmlformats.org/drawingml/2006/main" xmlns:p="http://schemas.openxmlformats.org/presentationml/2006/main" xmlns:r="http://schemas.openxmlformats.org/officeDocument/2006/relationships">
+  <p:cSld>
+    <p:bg>
+      <p:bgPr>
+        <a:solidFill>
+          <a:srgbClr val="FFFFFF"/>
+        </a:solidFill>
+        <a:effectLst/>
+      </p:bgPr>
+    </p:bg>
+    <p:spTree>
+      <p:nvGrpSpPr>
+        <p:cNvPr id="1" name=""/>
+        <p:cNvGrpSpPr/>
+        <p:nvPr/>
+      </p:nvGrpSpPr>
+      <p:grpSpPr/>
+      <p:sp>
+        <p:nvSpPr>
+          <p:cNvPr id="2" name="TextBox 1"/>
+          <p:cNvSpPr txBox="1"/>
+          <p:nvPr/>
+        </p:nvSpPr>
+        <p:spPr>
+          <a:xfrm>
+            <a:off x="548640" y="320040"/>
+            <a:ext cx="11094415" cy="274320"/>
+          </a:xfrm>
+          <a:prstGeom prst="rect">
+            <a:avLst/>
+          </a:prstGeom>
+          <a:noFill/>
+        </p:spPr>
+        <p:txBody>
+          <a:bodyPr wrap="square" anchor="t" lIns="0" rIns="0" tIns="0" bIns="0"/>
+          <a:lstStyle/>
+          <a:p>
+            <a:pPr algn="l"/>
+            <a:r>
+              <a:rPr sz="1100" b="1" i="0">
+                <a:solidFill>
+                  <a:srgbClr val="54595D"/>
+                </a:solidFill>
+                <a:latin typeface="Calibri"/>
+              </a:rPr>
+              <a:t>CORE COMPONENT  ·  Core Paper 1</a:t>
+            </a:r>
+          </a:p>
+        </p:txBody>
+      </p:sp>
+      <p:sp>
+        <p:nvSpPr>
+          <p:cNvPr id="3" name="TextBox 2"/>
+          <p:cNvSpPr txBox="1"/>
+          <p:nvPr/>
+        </p:nvSpPr>
+        <p:spPr>
+          <a:xfrm>
+            <a:off x="548640" y="566928"/>
+            <a:ext cx="11094415" cy="822960"/>
+          </a:xfrm>
+          <a:prstGeom prst="rect">
+            <a:avLst/>
+          </a:prstGeom>
+          <a:noFill/>
+        </p:spPr>
+        <p:txBody>
+          <a:bodyPr wrap="square" anchor="ctr" lIns="0" rIns="0" tIns="0" bIns="0"/>
+          <a:lstStyle/>
+          <a:p>
+            <a:pPr algn="l"/>
+            <a:r>
+              <a:rPr sz="3200" b="1" i="0">
+                <a:solidFill>
+                  <a:srgbClr val="03306E"/>
+                </a:solidFill>
+                <a:latin typeface="Cambria"/>
+              </a:rPr>
+              <a:t>Quick check: Comparing algorithms</a:t>
+            </a:r>
+          </a:p>
+        </p:txBody>
+      </p:sp>
+      <p:sp>
+        <p:nvSpPr>
+          <p:cNvPr id="4" name="TextBox 3"/>
+          <p:cNvSpPr txBox="1"/>
+          <p:nvPr/>
+        </p:nvSpPr>
+        <p:spPr>
+          <a:xfrm>
+            <a:off x="548640" y="6446520"/>
+            <a:ext cx="8229600" cy="274320"/>
+          </a:xfrm>
+          <a:prstGeom prst="rect">
+            <a:avLst/>
+          </a:prstGeom>
+          <a:noFill/>
+        </p:spPr>
+        <p:txBody>
+          <a:bodyPr wrap="square" anchor="t" lIns="0" rIns="0" tIns="0" bIns="0"/>
+          <a:lstStyle/>
+          <a:p>
+            <a:pPr algn="l"/>
+            <a:r>
+              <a:rPr sz="1000" b="0" i="0">
+                <a:solidFill>
+                  <a:srgbClr val="54595D"/>
+                </a:solidFill>
+                <a:latin typeface="Calibri"/>
+              </a:rPr>
+              <a:t>Digital Software Development T Level  ·  Searching and Sorting Algorithms</a:t>
+            </a:r>
+          </a:p>
+        </p:txBody>
+      </p:sp>
+      <p:sp>
+        <p:nvSpPr>
+          <p:cNvPr id="5" name="TextBox 4"/>
+          <p:cNvSpPr txBox="1"/>
+          <p:nvPr/>
+        </p:nvSpPr>
+        <p:spPr>
+          <a:xfrm>
+            <a:off x="10728655" y="6446520"/>
+            <a:ext cx="914400" cy="274320"/>
+          </a:xfrm>
+          <a:prstGeom prst="rect">
+            <a:avLst/>
+          </a:prstGeom>
+          <a:noFill/>
+        </p:spPr>
+        <p:txBody>
+          <a:bodyPr wrap="square" anchor="t" lIns="0" rIns="0" tIns="0" bIns="0"/>
+          <a:lstStyle/>
+          <a:p>
+            <a:pPr algn="r"/>
+            <a:r>
+              <a:rPr sz="1000" b="0" i="0">
+                <a:solidFill>
+                  <a:srgbClr val="54595D"/>
+                </a:solidFill>
+                <a:latin typeface="Calibri"/>
+              </a:rPr>
+              <a:t>11</a:t>
+            </a:r>
+          </a:p>
+        </p:txBody>
+      </p:sp>
+      <p:sp>
+        <p:nvSpPr>
+          <p:cNvPr id="6" name="Oval 5"/>
+          <p:cNvSpPr/>
+          <p:nvPr/>
+        </p:nvSpPr>
+        <p:spPr>
+          <a:xfrm>
+            <a:off x="548640" y="1691640"/>
+            <a:ext cx="502920" cy="502920"/>
+          </a:xfrm>
+          <a:prstGeom prst="ellipse">
+            <a:avLst/>
+          </a:prstGeom>
+          <a:solidFill>
+            <a:srgbClr val="F2B705"/>
+          </a:solidFill>
+          <a:ln>
+            <a:noFill/>
+          </a:ln>
+          <a:effectLst/>
+        </p:spPr>
+        <p:style>
+          <a:lnRef idx="1">
+            <a:schemeClr val="accent1"/>
+          </a:lnRef>
+          <a:fillRef idx="3">
+            <a:schemeClr val="accent1"/>
+          </a:fillRef>
+          <a:effectRef idx="2">
+            <a:schemeClr val="accent1"/>
+          </a:effectRef>
+          <a:fontRef idx="minor">
+            <a:schemeClr val="lt1"/>
+          </a:fontRef>
+        </p:style>
+        <p:txBody>
+          <a:bodyPr rtlCol="0" anchor="ctr" lIns="0" rIns="0" tIns="0" bIns="0"/>
+          <a:lstStyle/>
+          <a:p>
+            <a:pPr algn="ctr"/>
+            <a:r>
+              <a:rPr sz="1600" b="1">
+                <a:solidFill>
+                  <a:srgbClr val="202122"/>
+                </a:solidFill>
+                <a:latin typeface="Calibri"/>
+              </a:rPr>
+              <a:t>1</a:t>
+            </a:r>
+          </a:p>
+        </p:txBody>
+      </p:sp>
+      <p:sp>
+        <p:nvSpPr>
+          <p:cNvPr id="7" name="TextBox 6"/>
+          <p:cNvSpPr txBox="1"/>
+          <p:nvPr/>
+        </p:nvSpPr>
+        <p:spPr>
+          <a:xfrm>
+            <a:off x="1371600" y="1645920"/>
+            <a:ext cx="10271455" cy="1188720"/>
+          </a:xfrm>
+          <a:prstGeom prst="rect">
+            <a:avLst/>
+          </a:prstGeom>
+          <a:noFill/>
+        </p:spPr>
+        <p:txBody>
+          <a:bodyPr wrap="square" anchor="t" lIns="0" rIns="0" tIns="0" bIns="0"/>
+          <a:lstStyle/>
+          <a:p>
+            <a:pPr algn="l"/>
+            <a:r>
+              <a:rPr sz="2400" b="0" i="0">
+                <a:solidFill>
+                  <a:srgbClr val="202122"/>
+                </a:solidFill>
+                <a:latin typeface="Calibri"/>
+              </a:rPr>
+              <a:t>Name three ways to compare algorithms.</a:t>
+            </a:r>
+          </a:p>
+        </p:txBody>
+      </p:sp>
+      <p:sp>
+        <p:nvSpPr>
+          <p:cNvPr id="8" name="Oval 7"/>
+          <p:cNvSpPr/>
+          <p:nvPr/>
+        </p:nvSpPr>
+        <p:spPr>
+          <a:xfrm>
+            <a:off x="548640" y="3108960"/>
+            <a:ext cx="502920" cy="502920"/>
+          </a:xfrm>
+          <a:prstGeom prst="ellipse">
+            <a:avLst/>
+          </a:prstGeom>
+          <a:solidFill>
+            <a:srgbClr val="F2B705"/>
+          </a:solidFill>
+          <a:ln>
+            <a:noFill/>
+          </a:ln>
+          <a:effectLst/>
+        </p:spPr>
+        <p:style>
+          <a:lnRef idx="1">
+            <a:schemeClr val="accent1"/>
+          </a:lnRef>
+          <a:fillRef idx="3">
+            <a:schemeClr val="accent1"/>
+          </a:fillRef>
+          <a:effectRef idx="2">
+            <a:schemeClr val="accent1"/>
+          </a:effectRef>
+          <a:fontRef idx="minor">
+            <a:schemeClr val="lt1"/>
+          </a:fontRef>
+        </p:style>
+        <p:txBody>
+          <a:bodyPr rtlCol="0" anchor="ctr" lIns="0" rIns="0" tIns="0" bIns="0"/>
+          <a:lstStyle/>
+          <a:p>
+            <a:pPr algn="ctr"/>
+            <a:r>
+              <a:rPr sz="1600" b="1">
+                <a:solidFill>
+                  <a:srgbClr val="202122"/>
+                </a:solidFill>
+                <a:latin typeface="Calibri"/>
+              </a:rPr>
+              <a:t>2</a:t>
+            </a:r>
+          </a:p>
+        </p:txBody>
+      </p:sp>
+      <p:sp>
+        <p:nvSpPr>
+          <p:cNvPr id="9" name="TextBox 8"/>
+          <p:cNvSpPr txBox="1"/>
+          <p:nvPr/>
+        </p:nvSpPr>
+        <p:spPr>
+          <a:xfrm>
+            <a:off x="1371600" y="3063240"/>
+            <a:ext cx="10271455" cy="1188720"/>
+          </a:xfrm>
+          <a:prstGeom prst="rect">
+            <a:avLst/>
+          </a:prstGeom>
+          <a:noFill/>
+        </p:spPr>
+        <p:txBody>
+          <a:bodyPr wrap="square" anchor="t" lIns="0" rIns="0" tIns="0" bIns="0"/>
+          <a:lstStyle/>
+          <a:p>
+            <a:pPr algn="l"/>
+            <a:r>
+              <a:rPr sz="2400" b="0" i="0">
+                <a:solidFill>
+                  <a:srgbClr val="202122"/>
+                </a:solidFill>
+                <a:latin typeface="Calibri"/>
+              </a:rPr>
+              <a:t>What is bubble sort's best case?</a:t>
+            </a:r>
+          </a:p>
+        </p:txBody>
+      </p:sp>
+      <p:sp>
+        <p:nvSpPr>
+          <p:cNvPr id="10" name="Oval 9"/>
+          <p:cNvSpPr/>
+          <p:nvPr/>
+        </p:nvSpPr>
+        <p:spPr>
+          <a:xfrm>
+            <a:off x="548640" y="4526280"/>
+            <a:ext cx="502920" cy="502920"/>
+          </a:xfrm>
+          <a:prstGeom prst="ellipse">
+            <a:avLst/>
+          </a:prstGeom>
+          <a:solidFill>
+            <a:srgbClr val="F2B705"/>
+          </a:solidFill>
+          <a:ln>
+            <a:noFill/>
+          </a:ln>
+          <a:effectLst/>
+        </p:spPr>
+        <p:style>
+          <a:lnRef idx="1">
+            <a:schemeClr val="accent1"/>
+          </a:lnRef>
+          <a:fillRef idx="3">
+            <a:schemeClr val="accent1"/>
+          </a:fillRef>
+          <a:effectRef idx="2">
+            <a:schemeClr val="accent1"/>
+          </a:effectRef>
+          <a:fontRef idx="minor">
+            <a:schemeClr val="lt1"/>
+          </a:fontRef>
+        </p:style>
+        <p:txBody>
+          <a:bodyPr rtlCol="0" anchor="ctr" lIns="0" rIns="0" tIns="0" bIns="0"/>
+          <a:lstStyle/>
+          <a:p>
+            <a:pPr algn="ctr"/>
+            <a:r>
+              <a:rPr sz="1600" b="1">
+                <a:solidFill>
+                  <a:srgbClr val="202122"/>
+                </a:solidFill>
+                <a:latin typeface="Calibri"/>
+              </a:rPr>
+              <a:t>3</a:t>
+            </a:r>
+          </a:p>
+        </p:txBody>
+      </p:sp>
+      <p:sp>
+        <p:nvSpPr>
+          <p:cNvPr id="11" name="TextBox 10"/>
+          <p:cNvSpPr txBox="1"/>
+          <p:nvPr/>
+        </p:nvSpPr>
+        <p:spPr>
+          <a:xfrm>
+            <a:off x="1371600" y="4480560"/>
+            <a:ext cx="10271455" cy="1188720"/>
+          </a:xfrm>
+          <a:prstGeom prst="rect">
+            <a:avLst/>
+          </a:prstGeom>
+          <a:noFill/>
+        </p:spPr>
+        <p:txBody>
+          <a:bodyPr wrap="square" anchor="t" lIns="0" rIns="0" tIns="0" bIns="0"/>
+          <a:lstStyle/>
+          <a:p>
+            <a:pPr algn="l"/>
+            <a:r>
+              <a:rPr sz="2400" b="0" i="0">
+                <a:solidFill>
+                  <a:srgbClr val="202122"/>
+                </a:solidFill>
+                <a:latin typeface="Calibri"/>
+              </a:rPr>
+              <a:t>Which sort would you use for millions of records?</a:t>
+            </a:r>
+          </a:p>
+        </p:txBody>
+      </p:sp>
+      <p:sp>
+        <p:nvSpPr>
+          <p:cNvPr id="12" name="TextBox 11"/>
+          <p:cNvSpPr txBox="1"/>
+          <p:nvPr/>
+        </p:nvSpPr>
+        <p:spPr>
+          <a:xfrm>
+            <a:off x="548640" y="5852160"/>
+            <a:ext cx="11094415" cy="365760"/>
+          </a:xfrm>
+          <a:prstGeom prst="rect">
+            <a:avLst/>
+          </a:prstGeom>
+          <a:noFill/>
+        </p:spPr>
+        <p:txBody>
+          <a:bodyPr wrap="square" anchor="t" lIns="0" rIns="0" tIns="0" bIns="0"/>
+          <a:lstStyle/>
+          <a:p>
+            <a:pPr algn="l"/>
+            <a:r>
+              <a:rPr sz="1300" b="0" i="1">
+                <a:solidFill>
+                  <a:srgbClr val="54595D"/>
+                </a:solidFill>
+                <a:latin typeface="Calibri"/>
+              </a:rPr>
+              <a:t>Answer on mini whiteboards or in your book. Answers are in the speaker notes.</a:t>
+            </a:r>
+          </a:p>
+        </p:txBody>
+      </p:sp>
+    </p:spTree>
+  </p:cSld>
+  <p:clrMapOvr>
+    <a:masterClrMapping/>
+  </p:clrMapOvr>
+</p:sld>
+</file>
+
+<file path=ppt/slides/slide12.xml><?xml version="1.0" encoding="utf-8"?>
+<p:sld xmlns:a="http://schemas.openxmlformats.org/drawingml/2006/main" xmlns:p="http://schemas.openxmlformats.org/presentationml/2006/main" xmlns:r="http://schemas.openxmlformats.org/officeDocument/2006/relationships">
+  <p:cSld>
+    <p:bg>
+      <p:bgPr>
+        <a:solidFill>
+          <a:srgbClr val="FFFFFF"/>
+        </a:solidFill>
+        <a:effectLst/>
+      </p:bgPr>
+    </p:bg>
+    <p:spTree>
+      <p:nvGrpSpPr>
+        <p:cNvPr id="1" name=""/>
+        <p:cNvGrpSpPr/>
+        <p:nvPr/>
+      </p:nvGrpSpPr>
+      <p:grpSpPr/>
+      <p:sp>
+        <p:nvSpPr>
+          <p:cNvPr id="2" name="TextBox 1"/>
+          <p:cNvSpPr txBox="1"/>
+          <p:nvPr/>
+        </p:nvSpPr>
+        <p:spPr>
+          <a:xfrm>
+            <a:off x="548640" y="320040"/>
+            <a:ext cx="11094415" cy="274320"/>
+          </a:xfrm>
+          <a:prstGeom prst="rect">
+            <a:avLst/>
+          </a:prstGeom>
+          <a:noFill/>
+        </p:spPr>
+        <p:txBody>
+          <a:bodyPr wrap="square" anchor="t" lIns="0" rIns="0" tIns="0" bIns="0"/>
+          <a:lstStyle/>
+          <a:p>
+            <a:pPr algn="l"/>
+            <a:r>
+              <a:rPr sz="1100" b="1" i="0">
+                <a:solidFill>
+                  <a:srgbClr val="54595D"/>
+                </a:solidFill>
+                <a:latin typeface="Calibri"/>
+              </a:rPr>
+              <a:t>CORE COMPONENT  ·  Core Paper 1</a:t>
+            </a:r>
+          </a:p>
+        </p:txBody>
+      </p:sp>
+      <p:sp>
+        <p:nvSpPr>
+          <p:cNvPr id="3" name="TextBox 2"/>
+          <p:cNvSpPr txBox="1"/>
+          <p:nvPr/>
+        </p:nvSpPr>
+        <p:spPr>
+          <a:xfrm>
+            <a:off x="548640" y="566928"/>
+            <a:ext cx="11094415" cy="822960"/>
+          </a:xfrm>
+          <a:prstGeom prst="rect">
+            <a:avLst/>
+          </a:prstGeom>
+          <a:noFill/>
+        </p:spPr>
+        <p:txBody>
+          <a:bodyPr wrap="square" anchor="ctr" lIns="0" rIns="0" tIns="0" bIns="0"/>
+          <a:lstStyle/>
+          <a:p>
+            <a:pPr algn="l"/>
+            <a:r>
+              <a:rPr sz="3200" b="1" i="0">
+                <a:solidFill>
+                  <a:srgbClr val="03306E"/>
+                </a:solidFill>
+                <a:latin typeface="Cambria"/>
+              </a:rPr>
+              <a:t>Check your understanding</a:t>
+            </a:r>
+          </a:p>
+        </p:txBody>
+      </p:sp>
+      <p:sp>
+        <p:nvSpPr>
+          <p:cNvPr id="4" name="TextBox 3"/>
+          <p:cNvSpPr txBox="1"/>
+          <p:nvPr/>
+        </p:nvSpPr>
+        <p:spPr>
+          <a:xfrm>
+            <a:off x="548640" y="6446520"/>
+            <a:ext cx="8229600" cy="274320"/>
+          </a:xfrm>
+          <a:prstGeom prst="rect">
+            <a:avLst/>
+          </a:prstGeom>
+          <a:noFill/>
+        </p:spPr>
+        <p:txBody>
+          <a:bodyPr wrap="square" anchor="t" lIns="0" rIns="0" tIns="0" bIns="0"/>
+          <a:lstStyle/>
+          <a:p>
+            <a:pPr algn="l"/>
+            <a:r>
+              <a:rPr sz="1000" b="0" i="0">
+                <a:solidFill>
+                  <a:srgbClr val="54595D"/>
+                </a:solidFill>
+                <a:latin typeface="Calibri"/>
+              </a:rPr>
+              <a:t>Digital Software Development T Level  ·  Searching and Sorting Algorithms</a:t>
+            </a:r>
+          </a:p>
+        </p:txBody>
+      </p:sp>
+      <p:sp>
+        <p:nvSpPr>
+          <p:cNvPr id="5" name="TextBox 4"/>
+          <p:cNvSpPr txBox="1"/>
+          <p:nvPr/>
+        </p:nvSpPr>
+        <p:spPr>
+          <a:xfrm>
+            <a:off x="10728655" y="6446520"/>
+            <a:ext cx="914400" cy="274320"/>
+          </a:xfrm>
+          <a:prstGeom prst="rect">
+            <a:avLst/>
+          </a:prstGeom>
+          <a:noFill/>
+        </p:spPr>
+        <p:txBody>
+          <a:bodyPr wrap="square" anchor="t" lIns="0" rIns="0" tIns="0" bIns="0"/>
+          <a:lstStyle/>
+          <a:p>
+            <a:pPr algn="r"/>
+            <a:r>
+              <a:rPr sz="1000" b="0" i="0">
+                <a:solidFill>
+                  <a:srgbClr val="54595D"/>
+                </a:solidFill>
+                <a:latin typeface="Calibri"/>
+              </a:rPr>
+              <a:t>12</a:t>
+            </a:r>
+          </a:p>
+        </p:txBody>
+      </p:sp>
+      <p:sp>
+        <p:nvSpPr>
+          <p:cNvPr id="6" name="Oval 5"/>
+          <p:cNvSpPr/>
+          <p:nvPr/>
+        </p:nvSpPr>
+        <p:spPr>
+          <a:xfrm>
+            <a:off x="548640" y="1618488"/>
+            <a:ext cx="411480" cy="411480"/>
+          </a:xfrm>
+          <a:prstGeom prst="ellipse">
+            <a:avLst/>
+          </a:prstGeom>
+          <a:solidFill>
+            <a:srgbClr val="F2B705"/>
+          </a:solidFill>
+          <a:ln>
+            <a:noFill/>
+          </a:ln>
+          <a:effectLst/>
+        </p:spPr>
+        <p:style>
+          <a:lnRef idx="1">
+            <a:schemeClr val="accent1"/>
+          </a:lnRef>
+          <a:fillRef idx="3">
+            <a:schemeClr val="accent1"/>
+          </a:fillRef>
+          <a:effectRef idx="2">
+            <a:schemeClr val="accent1"/>
+          </a:effectRef>
+          <a:fontRef idx="minor">
+            <a:schemeClr val="lt1"/>
+          </a:fontRef>
+        </p:style>
+        <p:txBody>
+          <a:bodyPr rtlCol="0" anchor="ctr" lIns="0" rIns="0" tIns="0" bIns="0"/>
+          <a:lstStyle/>
+          <a:p>
+            <a:pPr algn="ctr"/>
+            <a:r>
+              <a:rPr sz="1400" b="1">
+                <a:solidFill>
+                  <a:srgbClr val="202122"/>
+                </a:solidFill>
+                <a:latin typeface="Calibri"/>
+              </a:rPr>
+              <a:t>1</a:t>
+            </a:r>
+          </a:p>
+        </p:txBody>
+      </p:sp>
+      <p:sp>
+        <p:nvSpPr>
+          <p:cNvPr id="7" name="TextBox 6"/>
+          <p:cNvSpPr txBox="1"/>
+          <p:nvPr/>
+        </p:nvSpPr>
+        <p:spPr>
+          <a:xfrm>
+            <a:off x="1234440" y="1600200"/>
+            <a:ext cx="10408615" cy="791870"/>
+          </a:xfrm>
+          <a:prstGeom prst="rect">
+            <a:avLst/>
+          </a:prstGeom>
+          <a:noFill/>
+        </p:spPr>
+        <p:txBody>
+          <a:bodyPr wrap="square" anchor="t" lIns="0" rIns="0" tIns="0" bIns="0"/>
+          <a:lstStyle/>
+          <a:p>
+            <a:pPr algn="l"/>
+            <a:r>
+              <a:rPr sz="2200" b="0" i="0">
+                <a:solidFill>
+                  <a:srgbClr val="202122"/>
+                </a:solidFill>
+                <a:latin typeface="Calibri"/>
+              </a:rPr>
+              <a:t>What must be true before a binary search?</a:t>
+            </a:r>
+          </a:p>
+        </p:txBody>
+      </p:sp>
+      <p:sp>
+        <p:nvSpPr>
+          <p:cNvPr id="8" name="Oval 7"/>
+          <p:cNvSpPr/>
+          <p:nvPr/>
+        </p:nvSpPr>
+        <p:spPr>
+          <a:xfrm>
+            <a:off x="548640" y="2574950"/>
+            <a:ext cx="411480" cy="411480"/>
+          </a:xfrm>
+          <a:prstGeom prst="ellipse">
+            <a:avLst/>
+          </a:prstGeom>
+          <a:solidFill>
+            <a:srgbClr val="F2B705"/>
+          </a:solidFill>
+          <a:ln>
+            <a:noFill/>
+          </a:ln>
+          <a:effectLst/>
+        </p:spPr>
+        <p:style>
+          <a:lnRef idx="1">
+            <a:schemeClr val="accent1"/>
+          </a:lnRef>
+          <a:fillRef idx="3">
+            <a:schemeClr val="accent1"/>
+          </a:fillRef>
+          <a:effectRef idx="2">
+            <a:schemeClr val="accent1"/>
+          </a:effectRef>
+          <a:fontRef idx="minor">
+            <a:schemeClr val="lt1"/>
+          </a:fontRef>
+        </p:style>
+        <p:txBody>
+          <a:bodyPr rtlCol="0" anchor="ctr" lIns="0" rIns="0" tIns="0" bIns="0"/>
+          <a:lstStyle/>
+          <a:p>
+            <a:pPr algn="ctr"/>
+            <a:r>
+              <a:rPr sz="1400" b="1">
+                <a:solidFill>
+                  <a:srgbClr val="202122"/>
+                </a:solidFill>
+                <a:latin typeface="Calibri"/>
+              </a:rPr>
+              <a:t>2</a:t>
+            </a:r>
+          </a:p>
+        </p:txBody>
+      </p:sp>
+      <p:sp>
+        <p:nvSpPr>
+          <p:cNvPr id="9" name="TextBox 8"/>
+          <p:cNvSpPr txBox="1"/>
+          <p:nvPr/>
+        </p:nvSpPr>
+        <p:spPr>
+          <a:xfrm>
+            <a:off x="1234440" y="2556662"/>
+            <a:ext cx="10408615" cy="791870"/>
+          </a:xfrm>
+          <a:prstGeom prst="rect">
+            <a:avLst/>
+          </a:prstGeom>
+          <a:noFill/>
+        </p:spPr>
+        <p:txBody>
+          <a:bodyPr wrap="square" anchor="t" lIns="0" rIns="0" tIns="0" bIns="0"/>
+          <a:lstStyle/>
+          <a:p>
+            <a:pPr algn="l"/>
+            <a:r>
+              <a:rPr sz="2200" b="0" i="0">
+                <a:solidFill>
+                  <a:srgbClr val="202122"/>
+                </a:solidFill>
+                <a:latin typeface="Calibri"/>
+              </a:rPr>
+              <a:t>How many items might a linear search check in a list of 1,000?</a:t>
+            </a:r>
+          </a:p>
+        </p:txBody>
+      </p:sp>
+      <p:sp>
+        <p:nvSpPr>
+          <p:cNvPr id="10" name="Oval 9"/>
+          <p:cNvSpPr/>
+          <p:nvPr/>
+        </p:nvSpPr>
+        <p:spPr>
+          <a:xfrm>
+            <a:off x="548640" y="3531412"/>
+            <a:ext cx="411480" cy="411480"/>
+          </a:xfrm>
+          <a:prstGeom prst="ellipse">
+            <a:avLst/>
+          </a:prstGeom>
+          <a:solidFill>
+            <a:srgbClr val="F2B705"/>
+          </a:solidFill>
+          <a:ln>
+            <a:noFill/>
+          </a:ln>
+          <a:effectLst/>
+        </p:spPr>
+        <p:style>
+          <a:lnRef idx="1">
+            <a:schemeClr val="accent1"/>
+          </a:lnRef>
+          <a:fillRef idx="3">
+            <a:schemeClr val="accent1"/>
+          </a:fillRef>
+          <a:effectRef idx="2">
+            <a:schemeClr val="accent1"/>
+          </a:effectRef>
+          <a:fontRef idx="minor">
+            <a:schemeClr val="lt1"/>
+          </a:fontRef>
+        </p:style>
+        <p:txBody>
+          <a:bodyPr rtlCol="0" anchor="ctr" lIns="0" rIns="0" tIns="0" bIns="0"/>
+          <a:lstStyle/>
+          <a:p>
+            <a:pPr algn="ctr"/>
+            <a:r>
+              <a:rPr sz="1400" b="1">
+                <a:solidFill>
+                  <a:srgbClr val="202122"/>
+                </a:solidFill>
+                <a:latin typeface="Calibri"/>
+              </a:rPr>
+              <a:t>3</a:t>
+            </a:r>
+          </a:p>
+        </p:txBody>
+      </p:sp>
+      <p:sp>
+        <p:nvSpPr>
+          <p:cNvPr id="11" name="TextBox 10"/>
+          <p:cNvSpPr txBox="1"/>
+          <p:nvPr/>
+        </p:nvSpPr>
+        <p:spPr>
+          <a:xfrm>
+            <a:off x="1234440" y="3513124"/>
+            <a:ext cx="10408615" cy="791870"/>
+          </a:xfrm>
+          <a:prstGeom prst="rect">
+            <a:avLst/>
+          </a:prstGeom>
+          <a:noFill/>
+        </p:spPr>
+        <p:txBody>
+          <a:bodyPr wrap="square" anchor="t" lIns="0" rIns="0" tIns="0" bIns="0"/>
+          <a:lstStyle/>
+          <a:p>
+            <a:pPr algn="l"/>
+            <a:r>
+              <a:rPr sz="2200" b="0" i="0">
+                <a:solidFill>
+                  <a:srgbClr val="202122"/>
+                </a:solidFill>
+                <a:latin typeface="Calibri"/>
+              </a:rPr>
+              <a:t>Which sort splits a list and merges it back together?</a:t>
+            </a:r>
+          </a:p>
+        </p:txBody>
+      </p:sp>
+      <p:sp>
+        <p:nvSpPr>
+          <p:cNvPr id="12" name="Oval 11"/>
+          <p:cNvSpPr/>
+          <p:nvPr/>
+        </p:nvSpPr>
+        <p:spPr>
+          <a:xfrm>
+            <a:off x="548640" y="4487875"/>
+            <a:ext cx="411480" cy="411480"/>
+          </a:xfrm>
+          <a:prstGeom prst="ellipse">
+            <a:avLst/>
+          </a:prstGeom>
+          <a:solidFill>
+            <a:srgbClr val="F2B705"/>
+          </a:solidFill>
+          <a:ln>
+            <a:noFill/>
+          </a:ln>
+          <a:effectLst/>
+        </p:spPr>
+        <p:style>
+          <a:lnRef idx="1">
+            <a:schemeClr val="accent1"/>
+          </a:lnRef>
+          <a:fillRef idx="3">
+            <a:schemeClr val="accent1"/>
+          </a:fillRef>
+          <a:effectRef idx="2">
+            <a:schemeClr val="accent1"/>
+          </a:effectRef>
+          <a:fontRef idx="minor">
+            <a:schemeClr val="lt1"/>
+          </a:fontRef>
+        </p:style>
+        <p:txBody>
+          <a:bodyPr rtlCol="0" anchor="ctr" lIns="0" rIns="0" tIns="0" bIns="0"/>
+          <a:lstStyle/>
+          <a:p>
+            <a:pPr algn="ctr"/>
+            <a:r>
+              <a:rPr sz="1400" b="1">
+                <a:solidFill>
+                  <a:srgbClr val="202122"/>
+                </a:solidFill>
+                <a:latin typeface="Calibri"/>
+              </a:rPr>
+              <a:t>4</a:t>
+            </a:r>
+          </a:p>
+        </p:txBody>
+      </p:sp>
+      <p:sp>
+        <p:nvSpPr>
+          <p:cNvPr id="13" name="TextBox 12"/>
+          <p:cNvSpPr txBox="1"/>
+          <p:nvPr/>
+        </p:nvSpPr>
+        <p:spPr>
+          <a:xfrm>
+            <a:off x="1234440" y="4469587"/>
+            <a:ext cx="10408615" cy="791870"/>
+          </a:xfrm>
+          <a:prstGeom prst="rect">
+            <a:avLst/>
+          </a:prstGeom>
+          <a:noFill/>
+        </p:spPr>
+        <p:txBody>
+          <a:bodyPr wrap="square" anchor="t" lIns="0" rIns="0" tIns="0" bIns="0"/>
+          <a:lstStyle/>
+          <a:p>
+            <a:pPr algn="l"/>
+            <a:r>
+              <a:rPr sz="2200" b="0" i="0">
+                <a:solidFill>
+                  <a:srgbClr val="202122"/>
+                </a:solidFill>
+                <a:latin typeface="Calibri"/>
+              </a:rPr>
+              <a:t>Which sort is efficient on nearly sorted data?</a:t>
+            </a:r>
+          </a:p>
+        </p:txBody>
+      </p:sp>
+      <p:sp>
+        <p:nvSpPr>
+          <p:cNvPr id="14" name="Oval 13"/>
+          <p:cNvSpPr/>
+          <p:nvPr/>
+        </p:nvSpPr>
+        <p:spPr>
+          <a:xfrm>
+            <a:off x="548640" y="5444337"/>
+            <a:ext cx="411480" cy="411480"/>
+          </a:xfrm>
+          <a:prstGeom prst="ellipse">
+            <a:avLst/>
+          </a:prstGeom>
+          <a:solidFill>
+            <a:srgbClr val="F2B705"/>
+          </a:solidFill>
+          <a:ln>
+            <a:noFill/>
+          </a:ln>
+          <a:effectLst/>
+        </p:spPr>
+        <p:style>
+          <a:lnRef idx="1">
+            <a:schemeClr val="accent1"/>
+          </a:lnRef>
+          <a:fillRef idx="3">
+            <a:schemeClr val="accent1"/>
+          </a:fillRef>
+          <a:effectRef idx="2">
+            <a:schemeClr val="accent1"/>
+          </a:effectRef>
+          <a:fontRef idx="minor">
+            <a:schemeClr val="lt1"/>
+          </a:fontRef>
+        </p:style>
+        <p:txBody>
+          <a:bodyPr rtlCol="0" anchor="ctr" lIns="0" rIns="0" tIns="0" bIns="0"/>
+          <a:lstStyle/>
+          <a:p>
+            <a:pPr algn="ctr"/>
+            <a:r>
+              <a:rPr sz="1400" b="1">
+                <a:solidFill>
+                  <a:srgbClr val="202122"/>
+                </a:solidFill>
+                <a:latin typeface="Calibri"/>
+              </a:rPr>
+              <a:t>5</a:t>
+            </a:r>
+          </a:p>
+        </p:txBody>
+      </p:sp>
+      <p:sp>
+        <p:nvSpPr>
+          <p:cNvPr id="15" name="TextBox 14"/>
+          <p:cNvSpPr txBox="1"/>
+          <p:nvPr/>
+        </p:nvSpPr>
+        <p:spPr>
+          <a:xfrm>
+            <a:off x="1234440" y="5426049"/>
+            <a:ext cx="10408615" cy="791870"/>
+          </a:xfrm>
+          <a:prstGeom prst="rect">
+            <a:avLst/>
+          </a:prstGeom>
+          <a:noFill/>
+        </p:spPr>
+        <p:txBody>
+          <a:bodyPr wrap="square" anchor="t" lIns="0" rIns="0" tIns="0" bIns="0"/>
+          <a:lstStyle/>
+          <a:p>
+            <a:pPr algn="l"/>
+            <a:r>
+              <a:rPr sz="2200" b="0" i="0">
+                <a:solidFill>
+                  <a:srgbClr val="202122"/>
+                </a:solidFill>
+                <a:latin typeface="Calibri"/>
+              </a:rPr>
+              <a:t>Give one drawback of merge sort.</a:t>
+            </a:r>
+          </a:p>
+        </p:txBody>
+      </p:sp>
+    </p:spTree>
+  </p:cSld>
+  <p:clrMapOvr>
+    <a:masterClrMapping/>
+  </p:clrMapOvr>
+</p:sld>
+</file>
+
+<file path=ppt/slides/slide13.xml><?xml version="1.0" encoding="utf-8"?>
+<p:sld xmlns:a="http://schemas.openxmlformats.org/drawingml/2006/main" xmlns:p="http://schemas.openxmlformats.org/presentationml/2006/main" xmlns:r="http://schemas.openxmlformats.org/officeDocument/2006/relationships">
+  <p:cSld>
+    <p:bg>
+      <p:bgPr>
+        <a:solidFill>
+          <a:srgbClr val="FFFFFF"/>
+        </a:solidFill>
+        <a:effectLst/>
+      </p:bgPr>
+    </p:bg>
+    <p:spTree>
+      <p:nvGrpSpPr>
+        <p:cNvPr id="1" name=""/>
+        <p:cNvGrpSpPr/>
+        <p:nvPr/>
+      </p:nvGrpSpPr>
+      <p:grpSpPr/>
+      <p:sp>
+        <p:nvSpPr>
+          <p:cNvPr id="2" name="TextBox 1"/>
+          <p:cNvSpPr txBox="1"/>
+          <p:nvPr/>
+        </p:nvSpPr>
+        <p:spPr>
+          <a:xfrm>
+            <a:off x="548640" y="320040"/>
+            <a:ext cx="11094415" cy="274320"/>
+          </a:xfrm>
+          <a:prstGeom prst="rect">
+            <a:avLst/>
+          </a:prstGeom>
+          <a:noFill/>
+        </p:spPr>
+        <p:txBody>
+          <a:bodyPr wrap="square" anchor="t" lIns="0" rIns="0" tIns="0" bIns="0"/>
+          <a:lstStyle/>
+          <a:p>
+            <a:pPr algn="l"/>
+            <a:r>
+              <a:rPr sz="1100" b="1" i="0">
+                <a:solidFill>
+                  <a:srgbClr val="54595D"/>
+                </a:solidFill>
+                <a:latin typeface="Calibri"/>
+              </a:rPr>
+              <a:t>CORE COMPONENT  ·  Core Paper 1</a:t>
+            </a:r>
+          </a:p>
+        </p:txBody>
+      </p:sp>
+      <p:sp>
+        <p:nvSpPr>
+          <p:cNvPr id="3" name="TextBox 2"/>
+          <p:cNvSpPr txBox="1"/>
+          <p:nvPr/>
+        </p:nvSpPr>
+        <p:spPr>
+          <a:xfrm>
+            <a:off x="548640" y="566928"/>
+            <a:ext cx="11094415" cy="822960"/>
+          </a:xfrm>
+          <a:prstGeom prst="rect">
+            <a:avLst/>
+          </a:prstGeom>
+          <a:noFill/>
+        </p:spPr>
+        <p:txBody>
+          <a:bodyPr wrap="square" anchor="ctr" lIns="0" rIns="0" tIns="0" bIns="0"/>
+          <a:lstStyle/>
+          <a:p>
+            <a:pPr algn="l"/>
+            <a:r>
+              <a:rPr sz="3200" b="1" i="0">
+                <a:solidFill>
+                  <a:srgbClr val="03306E"/>
+                </a:solidFill>
+                <a:latin typeface="Cambria"/>
+              </a:rPr>
+              <a:t>Answers</a:t>
+            </a:r>
+          </a:p>
+        </p:txBody>
+      </p:sp>
+      <p:sp>
+        <p:nvSpPr>
+          <p:cNvPr id="4" name="TextBox 3"/>
+          <p:cNvSpPr txBox="1"/>
+          <p:nvPr/>
+        </p:nvSpPr>
+        <p:spPr>
+          <a:xfrm>
+            <a:off x="548640" y="6446520"/>
+            <a:ext cx="8229600" cy="274320"/>
+          </a:xfrm>
+          <a:prstGeom prst="rect">
+            <a:avLst/>
+          </a:prstGeom>
+          <a:noFill/>
+        </p:spPr>
+        <p:txBody>
+          <a:bodyPr wrap="square" anchor="t" lIns="0" rIns="0" tIns="0" bIns="0"/>
+          <a:lstStyle/>
+          <a:p>
+            <a:pPr algn="l"/>
+            <a:r>
+              <a:rPr sz="1000" b="0" i="0">
+                <a:solidFill>
+                  <a:srgbClr val="54595D"/>
+                </a:solidFill>
+                <a:latin typeface="Calibri"/>
+              </a:rPr>
+              <a:t>Digital Software Development T Level  ·  Searching and Sorting Algorithms</a:t>
+            </a:r>
+          </a:p>
+        </p:txBody>
+      </p:sp>
+      <p:sp>
+        <p:nvSpPr>
+          <p:cNvPr id="5" name="TextBox 4"/>
+          <p:cNvSpPr txBox="1"/>
+          <p:nvPr/>
+        </p:nvSpPr>
+        <p:spPr>
+          <a:xfrm>
+            <a:off x="10728655" y="6446520"/>
+            <a:ext cx="914400" cy="274320"/>
+          </a:xfrm>
+          <a:prstGeom prst="rect">
+            <a:avLst/>
+          </a:prstGeom>
+          <a:noFill/>
+        </p:spPr>
+        <p:txBody>
+          <a:bodyPr wrap="square" anchor="t" lIns="0" rIns="0" tIns="0" bIns="0"/>
+          <a:lstStyle/>
+          <a:p>
+            <a:pPr algn="r"/>
+            <a:r>
+              <a:rPr sz="1000" b="0" i="0">
+                <a:solidFill>
+                  <a:srgbClr val="54595D"/>
+                </a:solidFill>
+                <a:latin typeface="Calibri"/>
+              </a:rPr>
+              <a:t>13</a:t>
+            </a:r>
+          </a:p>
+        </p:txBody>
+      </p:sp>
+      <p:sp>
+        <p:nvSpPr>
+          <p:cNvPr id="6" name="Oval 5"/>
+          <p:cNvSpPr/>
+          <p:nvPr/>
+        </p:nvSpPr>
+        <p:spPr>
+          <a:xfrm>
+            <a:off x="548640" y="1618488"/>
+            <a:ext cx="411480" cy="411480"/>
+          </a:xfrm>
+          <a:prstGeom prst="ellipse">
+            <a:avLst/>
+          </a:prstGeom>
+          <a:solidFill>
+            <a:srgbClr val="F2B705"/>
+          </a:solidFill>
+          <a:ln>
+            <a:noFill/>
+          </a:ln>
+          <a:effectLst/>
+        </p:spPr>
+        <p:style>
+          <a:lnRef idx="1">
+            <a:schemeClr val="accent1"/>
+          </a:lnRef>
+          <a:fillRef idx="3">
+            <a:schemeClr val="accent1"/>
+          </a:fillRef>
+          <a:effectRef idx="2">
+            <a:schemeClr val="accent1"/>
+          </a:effectRef>
+          <a:fontRef idx="minor">
+            <a:schemeClr val="lt1"/>
+          </a:fontRef>
+        </p:style>
+        <p:txBody>
+          <a:bodyPr rtlCol="0" anchor="ctr" lIns="0" rIns="0" tIns="0" bIns="0"/>
+          <a:lstStyle/>
+          <a:p>
+            <a:pPr algn="ctr"/>
+            <a:r>
+              <a:rPr sz="1400" b="1">
+                <a:solidFill>
+                  <a:srgbClr val="202122"/>
+                </a:solidFill>
+                <a:latin typeface="Calibri"/>
+              </a:rPr>
+              <a:t>1</a:t>
+            </a:r>
+          </a:p>
+        </p:txBody>
+      </p:sp>
+      <p:sp>
+        <p:nvSpPr>
+          <p:cNvPr id="7" name="TextBox 6"/>
+          <p:cNvSpPr txBox="1"/>
+          <p:nvPr/>
+        </p:nvSpPr>
+        <p:spPr>
+          <a:xfrm>
+            <a:off x="1234440" y="1600200"/>
+            <a:ext cx="10408615" cy="791870"/>
+          </a:xfrm>
+          <a:prstGeom prst="rect">
+            <a:avLst/>
+          </a:prstGeom>
+          <a:noFill/>
+        </p:spPr>
+        <p:txBody>
+          <a:bodyPr wrap="square" anchor="t" lIns="0" rIns="0" tIns="0" bIns="0"/>
+          <a:lstStyle/>
+          <a:p>
+            <a:pPr algn="l"/>
+            <a:r>
+              <a:rPr sz="1800" b="0" i="0">
+                <a:solidFill>
+                  <a:srgbClr val="54595D"/>
+                </a:solidFill>
+                <a:latin typeface="Calibri"/>
+              </a:rPr>
+              <a:t>What must be true before a binary search?</a:t>
+            </a:r>
+          </a:p>
+          <a:p>
+            <a:r>
+              <a:rPr sz="1800" b="1">
+                <a:solidFill>
+                  <a:srgbClr val="03306E"/>
+                </a:solidFill>
+                <a:latin typeface="Calibri"/>
+              </a:rPr>
+              <a:t>The data must be sorted.</a:t>
+            </a:r>
+          </a:p>
+        </p:txBody>
+      </p:sp>
+      <p:sp>
+        <p:nvSpPr>
+          <p:cNvPr id="8" name="Oval 7"/>
+          <p:cNvSpPr/>
+          <p:nvPr/>
+        </p:nvSpPr>
+        <p:spPr>
+          <a:xfrm>
+            <a:off x="548640" y="2574950"/>
+            <a:ext cx="411480" cy="411480"/>
+          </a:xfrm>
+          <a:prstGeom prst="ellipse">
+            <a:avLst/>
+          </a:prstGeom>
+          <a:solidFill>
+            <a:srgbClr val="F2B705"/>
+          </a:solidFill>
+          <a:ln>
+            <a:noFill/>
+          </a:ln>
+          <a:effectLst/>
+        </p:spPr>
+        <p:style>
+          <a:lnRef idx="1">
+            <a:schemeClr val="accent1"/>
+          </a:lnRef>
+          <a:fillRef idx="3">
+            <a:schemeClr val="accent1"/>
+          </a:fillRef>
+          <a:effectRef idx="2">
+            <a:schemeClr val="accent1"/>
+          </a:effectRef>
+          <a:fontRef idx="minor">
+            <a:schemeClr val="lt1"/>
+          </a:fontRef>
+        </p:style>
+        <p:txBody>
+          <a:bodyPr rtlCol="0" anchor="ctr" lIns="0" rIns="0" tIns="0" bIns="0"/>
+          <a:lstStyle/>
+          <a:p>
+            <a:pPr algn="ctr"/>
+            <a:r>
+              <a:rPr sz="1400" b="1">
+                <a:solidFill>
+                  <a:srgbClr val="202122"/>
+                </a:solidFill>
+                <a:latin typeface="Calibri"/>
+              </a:rPr>
+              <a:t>2</a:t>
+            </a:r>
+          </a:p>
+        </p:txBody>
+      </p:sp>
+      <p:sp>
+        <p:nvSpPr>
+          <p:cNvPr id="9" name="TextBox 8"/>
+          <p:cNvSpPr txBox="1"/>
+          <p:nvPr/>
+        </p:nvSpPr>
+        <p:spPr>
+          <a:xfrm>
+            <a:off x="1234440" y="2556662"/>
+            <a:ext cx="10408615" cy="791870"/>
+          </a:xfrm>
+          <a:prstGeom prst="rect">
+            <a:avLst/>
+          </a:prstGeom>
+          <a:noFill/>
+        </p:spPr>
+        <p:txBody>
+          <a:bodyPr wrap="square" anchor="t" lIns="0" rIns="0" tIns="0" bIns="0"/>
+          <a:lstStyle/>
+          <a:p>
+            <a:pPr algn="l"/>
+            <a:r>
+              <a:rPr sz="1800" b="0" i="0">
+                <a:solidFill>
+                  <a:srgbClr val="54595D"/>
+                </a:solidFill>
+                <a:latin typeface="Calibri"/>
+              </a:rPr>
+              <a:t>How many items might a linear search check in a list of 1,000?</a:t>
+            </a:r>
+          </a:p>
+          <a:p>
+            <a:r>
+              <a:rPr sz="1800" b="1">
+                <a:solidFill>
+                  <a:srgbClr val="03306E"/>
+                </a:solidFill>
+                <a:latin typeface="Calibri"/>
+              </a:rPr>
+              <a:t>Up to 1,000 (every item).</a:t>
+            </a:r>
+          </a:p>
+        </p:txBody>
+      </p:sp>
+      <p:sp>
+        <p:nvSpPr>
+          <p:cNvPr id="10" name="Oval 9"/>
+          <p:cNvSpPr/>
+          <p:nvPr/>
+        </p:nvSpPr>
+        <p:spPr>
+          <a:xfrm>
+            <a:off x="548640" y="3531412"/>
+            <a:ext cx="411480" cy="411480"/>
+          </a:xfrm>
+          <a:prstGeom prst="ellipse">
+            <a:avLst/>
+          </a:prstGeom>
+          <a:solidFill>
+            <a:srgbClr val="F2B705"/>
+          </a:solidFill>
+          <a:ln>
+            <a:noFill/>
+          </a:ln>
+          <a:effectLst/>
+        </p:spPr>
+        <p:style>
+          <a:lnRef idx="1">
+            <a:schemeClr val="accent1"/>
+          </a:lnRef>
+          <a:fillRef idx="3">
+            <a:schemeClr val="accent1"/>
+          </a:fillRef>
+          <a:effectRef idx="2">
+            <a:schemeClr val="accent1"/>
+          </a:effectRef>
+          <a:fontRef idx="minor">
+            <a:schemeClr val="lt1"/>
+          </a:fontRef>
+        </p:style>
+        <p:txBody>
+          <a:bodyPr rtlCol="0" anchor="ctr" lIns="0" rIns="0" tIns="0" bIns="0"/>
+          <a:lstStyle/>
+          <a:p>
+            <a:pPr algn="ctr"/>
+            <a:r>
+              <a:rPr sz="1400" b="1">
+                <a:solidFill>
+                  <a:srgbClr val="202122"/>
+                </a:solidFill>
+                <a:latin typeface="Calibri"/>
+              </a:rPr>
+              <a:t>3</a:t>
+            </a:r>
+          </a:p>
+        </p:txBody>
+      </p:sp>
+      <p:sp>
+        <p:nvSpPr>
+          <p:cNvPr id="11" name="TextBox 10"/>
+          <p:cNvSpPr txBox="1"/>
+          <p:nvPr/>
+        </p:nvSpPr>
+        <p:spPr>
+          <a:xfrm>
+            <a:off x="1234440" y="3513124"/>
+            <a:ext cx="10408615" cy="791870"/>
+          </a:xfrm>
+          <a:prstGeom prst="rect">
+            <a:avLst/>
+          </a:prstGeom>
+          <a:noFill/>
+        </p:spPr>
+        <p:txBody>
+          <a:bodyPr wrap="square" anchor="t" lIns="0" rIns="0" tIns="0" bIns="0"/>
+          <a:lstStyle/>
+          <a:p>
+            <a:pPr algn="l"/>
+            <a:r>
+              <a:rPr sz="1800" b="0" i="0">
+                <a:solidFill>
+                  <a:srgbClr val="54595D"/>
+                </a:solidFill>
+                <a:latin typeface="Calibri"/>
+              </a:rPr>
+              <a:t>Which sort splits a list and merges it back together?</a:t>
+            </a:r>
+          </a:p>
+          <a:p>
+            <a:r>
+              <a:rPr sz="1800" b="1">
+                <a:solidFill>
+                  <a:srgbClr val="03306E"/>
+                </a:solidFill>
+                <a:latin typeface="Calibri"/>
+              </a:rPr>
+              <a:t>Merge sort.</a:t>
+            </a:r>
+          </a:p>
+        </p:txBody>
+      </p:sp>
+      <p:sp>
+        <p:nvSpPr>
+          <p:cNvPr id="12" name="Oval 11"/>
+          <p:cNvSpPr/>
+          <p:nvPr/>
+        </p:nvSpPr>
+        <p:spPr>
+          <a:xfrm>
+            <a:off x="548640" y="4487875"/>
+            <a:ext cx="411480" cy="411480"/>
+          </a:xfrm>
+          <a:prstGeom prst="ellipse">
+            <a:avLst/>
+          </a:prstGeom>
+          <a:solidFill>
+            <a:srgbClr val="F2B705"/>
+          </a:solidFill>
+          <a:ln>
+            <a:noFill/>
+          </a:ln>
+          <a:effectLst/>
+        </p:spPr>
+        <p:style>
+          <a:lnRef idx="1">
+            <a:schemeClr val="accent1"/>
+          </a:lnRef>
+          <a:fillRef idx="3">
+            <a:schemeClr val="accent1"/>
+          </a:fillRef>
+          <a:effectRef idx="2">
+            <a:schemeClr val="accent1"/>
+          </a:effectRef>
+          <a:fontRef idx="minor">
+            <a:schemeClr val="lt1"/>
+          </a:fontRef>
+        </p:style>
+        <p:txBody>
+          <a:bodyPr rtlCol="0" anchor="ctr" lIns="0" rIns="0" tIns="0" bIns="0"/>
+          <a:lstStyle/>
+          <a:p>
+            <a:pPr algn="ctr"/>
+            <a:r>
+              <a:rPr sz="1400" b="1">
+                <a:solidFill>
+                  <a:srgbClr val="202122"/>
+                </a:solidFill>
+                <a:latin typeface="Calibri"/>
+              </a:rPr>
+              <a:t>4</a:t>
+            </a:r>
+          </a:p>
+        </p:txBody>
+      </p:sp>
+      <p:sp>
+        <p:nvSpPr>
+          <p:cNvPr id="13" name="TextBox 12"/>
+          <p:cNvSpPr txBox="1"/>
+          <p:nvPr/>
+        </p:nvSpPr>
+        <p:spPr>
+          <a:xfrm>
+            <a:off x="1234440" y="4469587"/>
+            <a:ext cx="10408615" cy="791870"/>
+          </a:xfrm>
+          <a:prstGeom prst="rect">
+            <a:avLst/>
+          </a:prstGeom>
+          <a:noFill/>
+        </p:spPr>
+        <p:txBody>
+          <a:bodyPr wrap="square" anchor="t" lIns="0" rIns="0" tIns="0" bIns="0"/>
+          <a:lstStyle/>
+          <a:p>
+            <a:pPr algn="l"/>
+            <a:r>
+              <a:rPr sz="1800" b="0" i="0">
+                <a:solidFill>
+                  <a:srgbClr val="54595D"/>
+                </a:solidFill>
+                <a:latin typeface="Calibri"/>
+              </a:rPr>
+              <a:t>Which sort is efficient on nearly sorted data?</a:t>
+            </a:r>
+          </a:p>
+          <a:p>
+            <a:r>
+              <a:rPr sz="1800" b="1">
+                <a:solidFill>
+                  <a:srgbClr val="03306E"/>
+                </a:solidFill>
+                <a:latin typeface="Calibri"/>
+              </a:rPr>
+              <a:t>Insertion sort.</a:t>
+            </a:r>
+          </a:p>
+        </p:txBody>
+      </p:sp>
+      <p:sp>
+        <p:nvSpPr>
+          <p:cNvPr id="14" name="Oval 13"/>
+          <p:cNvSpPr/>
+          <p:nvPr/>
+        </p:nvSpPr>
+        <p:spPr>
+          <a:xfrm>
+            <a:off x="548640" y="5444337"/>
+            <a:ext cx="411480" cy="411480"/>
+          </a:xfrm>
+          <a:prstGeom prst="ellipse">
+            <a:avLst/>
+          </a:prstGeom>
+          <a:solidFill>
+            <a:srgbClr val="F2B705"/>
+          </a:solidFill>
+          <a:ln>
+            <a:noFill/>
+          </a:ln>
+          <a:effectLst/>
+        </p:spPr>
+        <p:style>
+          <a:lnRef idx="1">
+            <a:schemeClr val="accent1"/>
+          </a:lnRef>
+          <a:fillRef idx="3">
+            <a:schemeClr val="accent1"/>
+          </a:fillRef>
+          <a:effectRef idx="2">
+            <a:schemeClr val="accent1"/>
+          </a:effectRef>
+          <a:fontRef idx="minor">
+            <a:schemeClr val="lt1"/>
+          </a:fontRef>
+        </p:style>
+        <p:txBody>
+          <a:bodyPr rtlCol="0" anchor="ctr" lIns="0" rIns="0" tIns="0" bIns="0"/>
+          <a:lstStyle/>
+          <a:p>
+            <a:pPr algn="ctr"/>
+            <a:r>
+              <a:rPr sz="1400" b="1">
+                <a:solidFill>
+                  <a:srgbClr val="202122"/>
+                </a:solidFill>
+                <a:latin typeface="Calibri"/>
+              </a:rPr>
+              <a:t>5</a:t>
+            </a:r>
+          </a:p>
+        </p:txBody>
+      </p:sp>
+      <p:sp>
+        <p:nvSpPr>
+          <p:cNvPr id="15" name="TextBox 14"/>
+          <p:cNvSpPr txBox="1"/>
+          <p:nvPr/>
+        </p:nvSpPr>
+        <p:spPr>
+          <a:xfrm>
+            <a:off x="1234440" y="5426049"/>
+            <a:ext cx="10408615" cy="791870"/>
+          </a:xfrm>
+          <a:prstGeom prst="rect">
+            <a:avLst/>
+          </a:prstGeom>
+          <a:noFill/>
+        </p:spPr>
+        <p:txBody>
+          <a:bodyPr wrap="square" anchor="t" lIns="0" rIns="0" tIns="0" bIns="0"/>
+          <a:lstStyle/>
+          <a:p>
+            <a:pPr algn="l"/>
+            <a:r>
+              <a:rPr sz="1800" b="0" i="0">
+                <a:solidFill>
+                  <a:srgbClr val="54595D"/>
+                </a:solidFill>
+                <a:latin typeface="Calibri"/>
+              </a:rPr>
+              <a:t>Give one drawback of merge sort.</a:t>
+            </a:r>
+          </a:p>
+          <a:p>
+            <a:r>
+              <a:rPr sz="1800" b="1">
+                <a:solidFill>
+                  <a:srgbClr val="03306E"/>
+                </a:solidFill>
+                <a:latin typeface="Calibri"/>
+              </a:rPr>
+              <a:t>It uses extra memory.</a:t>
+            </a:r>
+          </a:p>
+        </p:txBody>
+      </p:sp>
+    </p:spTree>
+  </p:cSld>
+  <p:clrMapOvr>
+    <a:masterClrMapping/>
+  </p:clrMapOvr>
+</p:sld>
+</file>
+
+<file path=ppt/slides/slide14.xml><?xml version="1.0" encoding="utf-8"?>
+<p:sld xmlns:a="http://schemas.openxmlformats.org/drawingml/2006/main" xmlns:p="http://schemas.openxmlformats.org/presentationml/2006/main" xmlns:r="http://schemas.openxmlformats.org/officeDocument/2006/relationships">
+  <p:cSld>
+    <p:bg>
+      <p:bgPr>
+        <a:solidFill>
+          <a:srgbClr val="FFFFFF"/>
+        </a:solidFill>
+        <a:effectLst/>
+      </p:bgPr>
+    </p:bg>
+    <p:spTree>
+      <p:nvGrpSpPr>
+        <p:cNvPr id="1" name=""/>
+        <p:cNvGrpSpPr/>
+        <p:nvPr/>
+      </p:nvGrpSpPr>
+      <p:grpSpPr/>
+      <p:sp>
+        <p:nvSpPr>
+          <p:cNvPr id="2" name="TextBox 1"/>
+          <p:cNvSpPr txBox="1"/>
+          <p:nvPr/>
+        </p:nvSpPr>
+        <p:spPr>
+          <a:xfrm>
+            <a:off x="548640" y="320040"/>
+            <a:ext cx="11094415" cy="274320"/>
+          </a:xfrm>
+          <a:prstGeom prst="rect">
+            <a:avLst/>
+          </a:prstGeom>
+          <a:noFill/>
+        </p:spPr>
+        <p:txBody>
+          <a:bodyPr wrap="square" anchor="t" lIns="0" rIns="0" tIns="0" bIns="0"/>
+          <a:lstStyle/>
+          <a:p>
+            <a:pPr algn="l"/>
+            <a:r>
+              <a:rPr sz="1100" b="1" i="0">
+                <a:solidFill>
+                  <a:srgbClr val="54595D"/>
+                </a:solidFill>
+                <a:latin typeface="Calibri"/>
+              </a:rPr>
+              <a:t>CORE COMPONENT  ·  Core Paper 1</a:t>
+            </a:r>
+          </a:p>
+        </p:txBody>
+      </p:sp>
+      <p:sp>
+        <p:nvSpPr>
+          <p:cNvPr id="3" name="TextBox 2"/>
+          <p:cNvSpPr txBox="1"/>
+          <p:nvPr/>
+        </p:nvSpPr>
+        <p:spPr>
+          <a:xfrm>
+            <a:off x="548640" y="566928"/>
+            <a:ext cx="11094415" cy="822960"/>
+          </a:xfrm>
+          <a:prstGeom prst="rect">
+            <a:avLst/>
+          </a:prstGeom>
+          <a:noFill/>
+        </p:spPr>
+        <p:txBody>
+          <a:bodyPr wrap="square" anchor="ctr" lIns="0" rIns="0" tIns="0" bIns="0"/>
+          <a:lstStyle/>
+          <a:p>
+            <a:pPr algn="l"/>
+            <a:r>
+              <a:rPr sz="3200" b="1" i="0">
+                <a:solidFill>
+                  <a:srgbClr val="03306E"/>
+                </a:solidFill>
+                <a:latin typeface="Cambria"/>
+              </a:rPr>
+              <a:t>Activity: Human sorting race</a:t>
+            </a:r>
+          </a:p>
+        </p:txBody>
+      </p:sp>
+      <p:sp>
+        <p:nvSpPr>
+          <p:cNvPr id="4" name="TextBox 3"/>
+          <p:cNvSpPr txBox="1"/>
+          <p:nvPr/>
+        </p:nvSpPr>
+        <p:spPr>
+          <a:xfrm>
+            <a:off x="548640" y="6446520"/>
+            <a:ext cx="8229600" cy="274320"/>
+          </a:xfrm>
+          <a:prstGeom prst="rect">
+            <a:avLst/>
+          </a:prstGeom>
+          <a:noFill/>
+        </p:spPr>
+        <p:txBody>
+          <a:bodyPr wrap="square" anchor="t" lIns="0" rIns="0" tIns="0" bIns="0"/>
+          <a:lstStyle/>
+          <a:p>
+            <a:pPr algn="l"/>
+            <a:r>
+              <a:rPr sz="1000" b="0" i="0">
+                <a:solidFill>
+                  <a:srgbClr val="54595D"/>
+                </a:solidFill>
+                <a:latin typeface="Calibri"/>
+              </a:rPr>
+              <a:t>Digital Software Development T Level  ·  Searching and Sorting Algorithms</a:t>
+            </a:r>
+          </a:p>
+        </p:txBody>
+      </p:sp>
+      <p:sp>
+        <p:nvSpPr>
+          <p:cNvPr id="5" name="TextBox 4"/>
+          <p:cNvSpPr txBox="1"/>
+          <p:nvPr/>
+        </p:nvSpPr>
+        <p:spPr>
+          <a:xfrm>
+            <a:off x="10728655" y="6446520"/>
+            <a:ext cx="914400" cy="274320"/>
+          </a:xfrm>
+          <a:prstGeom prst="rect">
+            <a:avLst/>
+          </a:prstGeom>
+          <a:noFill/>
+        </p:spPr>
+        <p:txBody>
+          <a:bodyPr wrap="square" anchor="t" lIns="0" rIns="0" tIns="0" bIns="0"/>
+          <a:lstStyle/>
+          <a:p>
+            <a:pPr algn="r"/>
+            <a:r>
+              <a:rPr sz="1000" b="0" i="0">
+                <a:solidFill>
+                  <a:srgbClr val="54595D"/>
+                </a:solidFill>
+                <a:latin typeface="Calibri"/>
+              </a:rPr>
+              <a:t>14</a:t>
+            </a:r>
+          </a:p>
+        </p:txBody>
+      </p:sp>
+      <p:sp>
+        <p:nvSpPr>
+          <p:cNvPr id="6" name="Rounded Rectangle 5"/>
+          <p:cNvSpPr/>
+          <p:nvPr/>
+        </p:nvSpPr>
+        <p:spPr>
+          <a:xfrm>
+            <a:off x="548640" y="1508760"/>
+            <a:ext cx="2011680" cy="457200"/>
+          </a:xfrm>
+          <a:prstGeom prst="roundRect">
+            <a:avLst>
+              <a:gd name="adj" fmla="val 50000"/>
+            </a:avLst>
+          </a:prstGeom>
+          <a:solidFill>
+            <a:srgbClr val="F2B705"/>
+          </a:solidFill>
+          <a:ln>
+            <a:noFill/>
+          </a:ln>
+          <a:effectLst/>
+        </p:spPr>
+        <p:style>
+          <a:lnRef idx="1">
+            <a:schemeClr val="accent1"/>
+          </a:lnRef>
+          <a:fillRef idx="3">
+            <a:schemeClr val="accent1"/>
+          </a:fillRef>
+          <a:effectRef idx="2">
+            <a:schemeClr val="accent1"/>
+          </a:effectRef>
+          <a:fontRef idx="minor">
+            <a:schemeClr val="lt1"/>
+          </a:fontRef>
+        </p:style>
+        <p:txBody>
+          <a:bodyPr rtlCol="0" anchor="ctr"/>
+          <a:lstStyle/>
+          <a:p/>
+        </p:txBody>
+      </p:sp>
+      <p:sp>
+        <p:nvSpPr>
+          <p:cNvPr id="7" name="TextBox 6"/>
+          <p:cNvSpPr txBox="1"/>
+          <p:nvPr/>
+        </p:nvSpPr>
+        <p:spPr>
+          <a:xfrm>
+            <a:off x="548640" y="1508760"/>
+            <a:ext cx="2011680" cy="457200"/>
+          </a:xfrm>
+          <a:prstGeom prst="rect">
+            <a:avLst/>
+          </a:prstGeom>
+          <a:noFill/>
+        </p:spPr>
+        <p:txBody>
+          <a:bodyPr wrap="square" anchor="ctr" lIns="0" rIns="0" tIns="0" bIns="0"/>
+          <a:lstStyle/>
+          <a:p>
+            <a:pPr algn="ctr"/>
+            <a:r>
+              <a:rPr sz="1400" b="1" i="0">
+                <a:solidFill>
+                  <a:srgbClr val="202122"/>
+                </a:solidFill>
+                <a:latin typeface="Calibri"/>
+              </a:rPr>
+              <a:t>25 minutes</a:t>
+            </a:r>
+          </a:p>
+        </p:txBody>
+      </p:sp>
+      <p:sp>
+        <p:nvSpPr>
+          <p:cNvPr id="8" name="TextBox 7"/>
+          <p:cNvSpPr txBox="1"/>
+          <p:nvPr/>
+        </p:nvSpPr>
+        <p:spPr>
+          <a:xfrm>
+            <a:off x="2743200" y="1508760"/>
+            <a:ext cx="4754880" cy="457200"/>
+          </a:xfrm>
+          <a:prstGeom prst="rect">
+            <a:avLst/>
+          </a:prstGeom>
+          <a:noFill/>
+        </p:spPr>
+        <p:txBody>
+          <a:bodyPr wrap="square" anchor="ctr" lIns="0" rIns="0" tIns="0" bIns="0"/>
+          <a:lstStyle/>
+          <a:p>
+            <a:pPr algn="l"/>
+            <a:r>
+              <a:rPr sz="1400" b="0" i="1">
+                <a:solidFill>
+                  <a:srgbClr val="54595D"/>
+                </a:solidFill>
+                <a:latin typeface="Calibri"/>
+              </a:rPr>
+              <a:t>Groups of eight</a:t>
+            </a:r>
+          </a:p>
+        </p:txBody>
+      </p:sp>
+      <p:sp>
+        <p:nvSpPr>
+          <p:cNvPr id="9" name="Oval 8"/>
+          <p:cNvSpPr/>
+          <p:nvPr/>
+        </p:nvSpPr>
+        <p:spPr>
+          <a:xfrm>
+            <a:off x="548640" y="2482596"/>
+            <a:ext cx="384048" cy="384048"/>
+          </a:xfrm>
+          <a:prstGeom prst="ellipse">
+            <a:avLst/>
+          </a:prstGeom>
+          <a:solidFill>
+            <a:srgbClr val="0645AD"/>
+          </a:solidFill>
+          <a:ln>
+            <a:noFill/>
+          </a:ln>
+          <a:effectLst/>
+        </p:spPr>
+        <p:style>
+          <a:lnRef idx="1">
+            <a:schemeClr val="accent1"/>
+          </a:lnRef>
+          <a:fillRef idx="3">
+            <a:schemeClr val="accent1"/>
+          </a:fillRef>
+          <a:effectRef idx="2">
+            <a:schemeClr val="accent1"/>
+          </a:effectRef>
+          <a:fontRef idx="minor">
+            <a:schemeClr val="lt1"/>
+          </a:fontRef>
+        </p:style>
+        <p:txBody>
+          <a:bodyPr rtlCol="0" anchor="ctr" lIns="0" rIns="0" tIns="0" bIns="0"/>
+          <a:lstStyle/>
+          <a:p>
+            <a:pPr algn="ctr"/>
+            <a:r>
+              <a:rPr sz="1300" b="1">
+                <a:solidFill>
+                  <a:srgbClr val="FFFFFF"/>
+                </a:solidFill>
+                <a:latin typeface="Calibri"/>
+              </a:rPr>
+              <a:t>1</a:t>
+            </a:r>
+          </a:p>
+        </p:txBody>
+      </p:sp>
+      <p:sp>
+        <p:nvSpPr>
+          <p:cNvPr id="10" name="TextBox 9"/>
+          <p:cNvSpPr txBox="1"/>
+          <p:nvPr/>
+        </p:nvSpPr>
+        <p:spPr>
+          <a:xfrm>
+            <a:off x="1143000" y="2240280"/>
+            <a:ext cx="5943600" cy="868680"/>
+          </a:xfrm>
+          <a:prstGeom prst="rect">
+            <a:avLst/>
+          </a:prstGeom>
+          <a:noFill/>
+        </p:spPr>
+        <p:txBody>
+          <a:bodyPr wrap="square" anchor="ctr" lIns="0" rIns="0" tIns="0" bIns="0"/>
+          <a:lstStyle/>
+          <a:p>
+            <a:pPr algn="l"/>
+            <a:r>
+              <a:rPr sz="1700" b="0" i="0">
+                <a:solidFill>
+                  <a:srgbClr val="202122"/>
+                </a:solidFill>
+                <a:latin typeface="Calibri"/>
+              </a:rPr>
+              <a:t>Each person holds a number card.</a:t>
+            </a:r>
+          </a:p>
+        </p:txBody>
+      </p:sp>
+      <p:sp>
+        <p:nvSpPr>
+          <p:cNvPr id="11" name="Oval 10"/>
+          <p:cNvSpPr/>
+          <p:nvPr/>
+        </p:nvSpPr>
+        <p:spPr>
+          <a:xfrm>
+            <a:off x="548640" y="3461004"/>
+            <a:ext cx="384048" cy="384048"/>
+          </a:xfrm>
+          <a:prstGeom prst="ellipse">
+            <a:avLst/>
+          </a:prstGeom>
+          <a:solidFill>
+            <a:srgbClr val="0645AD"/>
+          </a:solidFill>
+          <a:ln>
+            <a:noFill/>
+          </a:ln>
+          <a:effectLst/>
+        </p:spPr>
+        <p:style>
+          <a:lnRef idx="1">
+            <a:schemeClr val="accent1"/>
+          </a:lnRef>
+          <a:fillRef idx="3">
+            <a:schemeClr val="accent1"/>
+          </a:fillRef>
+          <a:effectRef idx="2">
+            <a:schemeClr val="accent1"/>
+          </a:effectRef>
+          <a:fontRef idx="minor">
+            <a:schemeClr val="lt1"/>
+          </a:fontRef>
+        </p:style>
+        <p:txBody>
+          <a:bodyPr rtlCol="0" anchor="ctr" lIns="0" rIns="0" tIns="0" bIns="0"/>
+          <a:lstStyle/>
+          <a:p>
+            <a:pPr algn="ctr"/>
+            <a:r>
+              <a:rPr sz="1300" b="1">
+                <a:solidFill>
+                  <a:srgbClr val="FFFFFF"/>
+                </a:solidFill>
+                <a:latin typeface="Calibri"/>
+              </a:rPr>
+              <a:t>2</a:t>
+            </a:r>
+          </a:p>
+        </p:txBody>
+      </p:sp>
+      <p:sp>
+        <p:nvSpPr>
+          <p:cNvPr id="12" name="TextBox 11"/>
+          <p:cNvSpPr txBox="1"/>
+          <p:nvPr/>
+        </p:nvSpPr>
+        <p:spPr>
+          <a:xfrm>
+            <a:off x="1143000" y="3218688"/>
+            <a:ext cx="5943600" cy="868680"/>
+          </a:xfrm>
+          <a:prstGeom prst="rect">
+            <a:avLst/>
+          </a:prstGeom>
+          <a:noFill/>
+        </p:spPr>
+        <p:txBody>
+          <a:bodyPr wrap="square" anchor="ctr" lIns="0" rIns="0" tIns="0" bIns="0"/>
+          <a:lstStyle/>
+          <a:p>
+            <a:pPr algn="l"/>
+            <a:r>
+              <a:rPr sz="1700" b="0" i="0">
+                <a:solidFill>
+                  <a:srgbClr val="202122"/>
+                </a:solidFill>
+                <a:latin typeface="Calibri"/>
+              </a:rPr>
+              <a:t>Sort yourselves using bubble sort, counting comparisons.</a:t>
+            </a:r>
+          </a:p>
+        </p:txBody>
+      </p:sp>
+      <p:sp>
+        <p:nvSpPr>
+          <p:cNvPr id="13" name="Oval 12"/>
+          <p:cNvSpPr/>
+          <p:nvPr/>
+        </p:nvSpPr>
+        <p:spPr>
+          <a:xfrm>
+            <a:off x="548640" y="4439412"/>
+            <a:ext cx="384048" cy="384048"/>
+          </a:xfrm>
+          <a:prstGeom prst="ellipse">
+            <a:avLst/>
+          </a:prstGeom>
+          <a:solidFill>
+            <a:srgbClr val="0645AD"/>
+          </a:solidFill>
+          <a:ln>
+            <a:noFill/>
+          </a:ln>
+          <a:effectLst/>
+        </p:spPr>
+        <p:style>
+          <a:lnRef idx="1">
+            <a:schemeClr val="accent1"/>
+          </a:lnRef>
+          <a:fillRef idx="3">
+            <a:schemeClr val="accent1"/>
+          </a:fillRef>
+          <a:effectRef idx="2">
+            <a:schemeClr val="accent1"/>
+          </a:effectRef>
+          <a:fontRef idx="minor">
+            <a:schemeClr val="lt1"/>
+          </a:fontRef>
+        </p:style>
+        <p:txBody>
+          <a:bodyPr rtlCol="0" anchor="ctr" lIns="0" rIns="0" tIns="0" bIns="0"/>
+          <a:lstStyle/>
+          <a:p>
+            <a:pPr algn="ctr"/>
+            <a:r>
+              <a:rPr sz="1300" b="1">
+                <a:solidFill>
+                  <a:srgbClr val="FFFFFF"/>
+                </a:solidFill>
+                <a:latin typeface="Calibri"/>
+              </a:rPr>
+              <a:t>3</a:t>
+            </a:r>
+          </a:p>
+        </p:txBody>
+      </p:sp>
+      <p:sp>
+        <p:nvSpPr>
+          <p:cNvPr id="14" name="TextBox 13"/>
+          <p:cNvSpPr txBox="1"/>
+          <p:nvPr/>
+        </p:nvSpPr>
+        <p:spPr>
+          <a:xfrm>
+            <a:off x="1143000" y="4197096"/>
+            <a:ext cx="5943600" cy="868680"/>
+          </a:xfrm>
+          <a:prstGeom prst="rect">
+            <a:avLst/>
+          </a:prstGeom>
+          <a:noFill/>
+        </p:spPr>
+        <p:txBody>
+          <a:bodyPr wrap="square" anchor="ctr" lIns="0" rIns="0" tIns="0" bIns="0"/>
+          <a:lstStyle/>
+          <a:p>
+            <a:pPr algn="l"/>
+            <a:r>
+              <a:rPr sz="1700" b="0" i="0">
+                <a:solidFill>
+                  <a:srgbClr val="202122"/>
+                </a:solidFill>
+                <a:latin typeface="Calibri"/>
+              </a:rPr>
+              <a:t>Shuffle and repeat with insertion sort, then merge sort.</a:t>
+            </a:r>
+          </a:p>
+        </p:txBody>
+      </p:sp>
+      <p:sp>
+        <p:nvSpPr>
+          <p:cNvPr id="15" name="Oval 14"/>
+          <p:cNvSpPr/>
+          <p:nvPr/>
+        </p:nvSpPr>
+        <p:spPr>
+          <a:xfrm>
+            <a:off x="548640" y="5417820"/>
+            <a:ext cx="384048" cy="384048"/>
+          </a:xfrm>
+          <a:prstGeom prst="ellipse">
+            <a:avLst/>
+          </a:prstGeom>
+          <a:solidFill>
+            <a:srgbClr val="0645AD"/>
+          </a:solidFill>
+          <a:ln>
+            <a:noFill/>
+          </a:ln>
+          <a:effectLst/>
+        </p:spPr>
+        <p:style>
+          <a:lnRef idx="1">
+            <a:schemeClr val="accent1"/>
+          </a:lnRef>
+          <a:fillRef idx="3">
+            <a:schemeClr val="accent1"/>
+          </a:fillRef>
+          <a:effectRef idx="2">
+            <a:schemeClr val="accent1"/>
+          </a:effectRef>
+          <a:fontRef idx="minor">
+            <a:schemeClr val="lt1"/>
+          </a:fontRef>
+        </p:style>
+        <p:txBody>
+          <a:bodyPr rtlCol="0" anchor="ctr" lIns="0" rIns="0" tIns="0" bIns="0"/>
+          <a:lstStyle/>
+          <a:p>
+            <a:pPr algn="ctr"/>
+            <a:r>
+              <a:rPr sz="1300" b="1">
+                <a:solidFill>
+                  <a:srgbClr val="FFFFFF"/>
+                </a:solidFill>
+                <a:latin typeface="Calibri"/>
+              </a:rPr>
+              <a:t>4</a:t>
+            </a:r>
+          </a:p>
+        </p:txBody>
+      </p:sp>
+      <p:sp>
+        <p:nvSpPr>
+          <p:cNvPr id="16" name="TextBox 15"/>
+          <p:cNvSpPr txBox="1"/>
+          <p:nvPr/>
+        </p:nvSpPr>
+        <p:spPr>
+          <a:xfrm>
+            <a:off x="1143000" y="5175504"/>
+            <a:ext cx="5943600" cy="868680"/>
+          </a:xfrm>
+          <a:prstGeom prst="rect">
+            <a:avLst/>
+          </a:prstGeom>
+          <a:noFill/>
+        </p:spPr>
+        <p:txBody>
+          <a:bodyPr wrap="square" anchor="ctr" lIns="0" rIns="0" tIns="0" bIns="0"/>
+          <a:lstStyle/>
+          <a:p>
+            <a:pPr algn="l"/>
+            <a:r>
+              <a:rPr sz="1700" b="0" i="0">
+                <a:solidFill>
+                  <a:srgbClr val="202122"/>
+                </a:solidFill>
+                <a:latin typeface="Calibri"/>
+              </a:rPr>
+              <a:t>Compare the counts and write a rule for when to use each.</a:t>
+            </a:r>
+          </a:p>
+        </p:txBody>
+      </p:sp>
+      <p:sp>
+        <p:nvSpPr>
+          <p:cNvPr id="17" name="Rounded Rectangle 16"/>
+          <p:cNvSpPr/>
+          <p:nvPr/>
+        </p:nvSpPr>
+        <p:spPr>
+          <a:xfrm>
+            <a:off x="7772400" y="1508760"/>
+            <a:ext cx="3867912" cy="4572000"/>
+          </a:xfrm>
+          <a:prstGeom prst="roundRect">
+            <a:avLst>
+              <a:gd name="adj" fmla="val 8000"/>
+            </a:avLst>
+          </a:prstGeom>
+          <a:solidFill>
+            <a:srgbClr val="EAF3FF"/>
+          </a:solidFill>
+          <a:ln>
+            <a:noFill/>
+          </a:ln>
+          <a:effectLst/>
+        </p:spPr>
+        <p:style>
+          <a:lnRef idx="1">
+            <a:schemeClr val="accent1"/>
+          </a:lnRef>
+          <a:fillRef idx="3">
+            <a:schemeClr val="accent1"/>
+          </a:fillRef>
+          <a:effectRef idx="2">
+            <a:schemeClr val="accent1"/>
+          </a:effectRef>
+          <a:fontRef idx="minor">
+            <a:schemeClr val="lt1"/>
+          </a:fontRef>
+        </p:style>
+        <p:txBody>
+          <a:bodyPr rtlCol="0" anchor="ctr"/>
+          <a:lstStyle/>
+          <a:p/>
+        </p:txBody>
+      </p:sp>
+      <p:sp>
+        <p:nvSpPr>
+          <p:cNvPr id="18" name="TextBox 17"/>
+          <p:cNvSpPr txBox="1"/>
+          <p:nvPr/>
+        </p:nvSpPr>
+        <p:spPr>
+          <a:xfrm>
+            <a:off x="8046720" y="1737360"/>
+            <a:ext cx="3291840" cy="365760"/>
+          </a:xfrm>
+          <a:prstGeom prst="rect">
+            <a:avLst/>
+          </a:prstGeom>
+          <a:noFill/>
+        </p:spPr>
+        <p:txBody>
+          <a:bodyPr wrap="square" anchor="t" lIns="0" rIns="0" tIns="0" bIns="0"/>
+          <a:lstStyle/>
+          <a:p>
+            <a:pPr algn="l"/>
+            <a:r>
+              <a:rPr sz="1300" b="1" i="0">
+                <a:solidFill>
+                  <a:srgbClr val="0645AD"/>
+                </a:solidFill>
+                <a:latin typeface="Calibri"/>
+              </a:rPr>
+              <a:t>SUCCESS CRITERIA</a:t>
+            </a:r>
+          </a:p>
+        </p:txBody>
+      </p:sp>
+      <p:sp>
+        <p:nvSpPr>
+          <p:cNvPr id="19" name="TextBox 18"/>
+          <p:cNvSpPr txBox="1"/>
+          <p:nvPr/>
+        </p:nvSpPr>
+        <p:spPr>
+          <a:xfrm>
+            <a:off x="8046720" y="2240280"/>
+            <a:ext cx="3337560" cy="3657600"/>
+          </a:xfrm>
+          <a:prstGeom prst="rect">
+            <a:avLst/>
+          </a:prstGeom>
+          <a:noFill/>
+        </p:spPr>
+        <p:txBody>
+          <a:bodyPr wrap="square" lIns="0" rIns="0" tIns="0" bIns="0">
+            <a:spAutoFit/>
+          </a:bodyPr>
+          <a:lstStyle/>
+          <a:p>
+            <a:pPr marL="274320" indent="-274320">
+              <a:spcAft>
+                <a:spcPts val="810"/>
+              </a:spcAft>
+              <a:buClr>
+                <a:srgbClr val="0645AD"/>
+              </a:buClr>
+              <a:buFont typeface="Arial"/>
+              <a:buChar char="•"/>
+            </a:pPr>
+            <a:r>
+              <a:rPr sz="1800" b="0">
+                <a:solidFill>
+                  <a:srgbClr val="202122"/>
+                </a:solidFill>
+                <a:latin typeface="Calibri"/>
+              </a:rPr>
+              <a:t>Each algorithm followed correctly</a:t>
+            </a:r>
+          </a:p>
+          <a:p>
+            <a:pPr marL="274320" indent="-274320">
+              <a:spcAft>
+                <a:spcPts val="810"/>
+              </a:spcAft>
+              <a:buClr>
+                <a:srgbClr val="0645AD"/>
+              </a:buClr>
+              <a:buFont typeface="Arial"/>
+              <a:buChar char="•"/>
+            </a:pPr>
+            <a:r>
+              <a:rPr sz="1800" b="0">
+                <a:solidFill>
+                  <a:srgbClr val="202122"/>
+                </a:solidFill>
+                <a:latin typeface="Calibri"/>
+              </a:rPr>
+              <a:t>Comparisons counted</a:t>
+            </a:r>
+          </a:p>
+          <a:p>
+            <a:pPr marL="274320" indent="-274320">
+              <a:spcAft>
+                <a:spcPts val="810"/>
+              </a:spcAft>
+              <a:buClr>
+                <a:srgbClr val="0645AD"/>
+              </a:buClr>
+              <a:buFont typeface="Arial"/>
+              <a:buChar char="•"/>
+            </a:pPr>
+            <a:r>
+              <a:rPr sz="1800" b="0">
+                <a:solidFill>
+                  <a:srgbClr val="202122"/>
+                </a:solidFill>
+                <a:latin typeface="Calibri"/>
+              </a:rPr>
+              <a:t>Rule is justified with evidence</a:t>
+            </a:r>
+          </a:p>
+        </p:txBody>
+      </p:sp>
+    </p:spTree>
+  </p:cSld>
+  <p:clrMapOvr>
+    <a:masterClrMapping/>
+  </p:clrMapOvr>
+</p:sld>
+</file>
+
+<file path=ppt/slides/slide15.xml><?xml version="1.0" encoding="utf-8"?>
+<p:sld xmlns:a="http://schemas.openxmlformats.org/drawingml/2006/main" xmlns:p="http://schemas.openxmlformats.org/presentationml/2006/main" xmlns:r="http://schemas.openxmlformats.org/officeDocument/2006/relationships">
+  <p:cSld>
+    <p:bg>
+      <p:bgPr>
+        <a:solidFill>
+          <a:srgbClr val="03306E"/>
+        </a:solidFill>
+        <a:effectLst/>
+      </p:bgPr>
+    </p:bg>
+    <p:spTree>
+      <p:nvGrpSpPr>
+        <p:cNvPr id="1" name=""/>
+        <p:cNvGrpSpPr/>
+        <p:nvPr/>
+      </p:nvGrpSpPr>
+      <p:grpSpPr/>
+      <p:sp>
+        <p:nvSpPr>
+          <p:cNvPr id="2" name="TextBox 1"/>
+          <p:cNvSpPr txBox="1"/>
+          <p:nvPr/>
+        </p:nvSpPr>
+        <p:spPr>
+          <a:xfrm>
+            <a:off x="548640" y="320040"/>
+            <a:ext cx="11094415" cy="274320"/>
+          </a:xfrm>
+          <a:prstGeom prst="rect">
+            <a:avLst/>
+          </a:prstGeom>
+          <a:noFill/>
+        </p:spPr>
+        <p:txBody>
+          <a:bodyPr wrap="square" anchor="t" lIns="0" rIns="0" tIns="0" bIns="0"/>
+          <a:lstStyle/>
+          <a:p>
+            <a:pPr algn="l"/>
+            <a:r>
+              <a:rPr sz="1100" b="1" i="0">
+                <a:solidFill>
+                  <a:srgbClr val="A9C8F0"/>
+                </a:solidFill>
+                <a:latin typeface="Calibri"/>
+              </a:rPr>
+              <a:t>CORE COMPONENT  ·  Core Paper 1</a:t>
+            </a:r>
+          </a:p>
+        </p:txBody>
+      </p:sp>
+      <p:sp>
+        <p:nvSpPr>
+          <p:cNvPr id="3" name="TextBox 2"/>
+          <p:cNvSpPr txBox="1"/>
+          <p:nvPr/>
+        </p:nvSpPr>
+        <p:spPr>
+          <a:xfrm>
+            <a:off x="548640" y="566928"/>
+            <a:ext cx="11094415" cy="822960"/>
+          </a:xfrm>
+          <a:prstGeom prst="rect">
+            <a:avLst/>
+          </a:prstGeom>
+          <a:noFill/>
+        </p:spPr>
+        <p:txBody>
+          <a:bodyPr wrap="square" anchor="ctr" lIns="0" rIns="0" tIns="0" bIns="0"/>
+          <a:lstStyle/>
+          <a:p>
+            <a:pPr algn="l"/>
+            <a:r>
+              <a:rPr sz="3200" b="1" i="0">
+                <a:solidFill>
+                  <a:srgbClr val="FFFFFF"/>
+                </a:solidFill>
+                <a:latin typeface="Cambria"/>
+              </a:rPr>
+              <a:t>Exit ticket</a:t>
+            </a:r>
+          </a:p>
+        </p:txBody>
+      </p:sp>
+      <p:sp>
+        <p:nvSpPr>
+          <p:cNvPr id="4" name="Oval 3"/>
+          <p:cNvSpPr/>
+          <p:nvPr/>
+        </p:nvSpPr>
+        <p:spPr>
+          <a:xfrm>
+            <a:off x="548640" y="1737360"/>
+            <a:ext cx="502920" cy="502920"/>
+          </a:xfrm>
+          <a:prstGeom prst="ellipse">
+            <a:avLst/>
+          </a:prstGeom>
+          <a:solidFill>
+            <a:srgbClr val="F2B705"/>
+          </a:solidFill>
+          <a:ln>
+            <a:noFill/>
+          </a:ln>
+          <a:effectLst/>
+        </p:spPr>
+        <p:style>
+          <a:lnRef idx="1">
+            <a:schemeClr val="accent1"/>
+          </a:lnRef>
+          <a:fillRef idx="3">
+            <a:schemeClr val="accent1"/>
+          </a:fillRef>
+          <a:effectRef idx="2">
+            <a:schemeClr val="accent1"/>
+          </a:effectRef>
+          <a:fontRef idx="minor">
+            <a:schemeClr val="lt1"/>
+          </a:fontRef>
+        </p:style>
+        <p:txBody>
+          <a:bodyPr rtlCol="0" anchor="ctr" lIns="0" rIns="0" tIns="0" bIns="0"/>
+          <a:lstStyle/>
+          <a:p>
+            <a:pPr algn="ctr"/>
+            <a:r>
+              <a:rPr sz="1700" b="1">
+                <a:solidFill>
+                  <a:srgbClr val="202122"/>
+                </a:solidFill>
+                <a:latin typeface="Calibri"/>
+              </a:rPr>
+              <a:t>1</a:t>
+            </a:r>
+          </a:p>
+        </p:txBody>
+      </p:sp>
+      <p:sp>
+        <p:nvSpPr>
+          <p:cNvPr id="5" name="TextBox 4"/>
+          <p:cNvSpPr txBox="1"/>
+          <p:nvPr/>
+        </p:nvSpPr>
+        <p:spPr>
+          <a:xfrm>
+            <a:off x="1325880" y="1645920"/>
+            <a:ext cx="6583680" cy="822960"/>
+          </a:xfrm>
+          <a:prstGeom prst="rect">
+            <a:avLst/>
+          </a:prstGeom>
+          <a:noFill/>
+        </p:spPr>
+        <p:txBody>
+          <a:bodyPr wrap="square" anchor="ctr" lIns="0" rIns="0" tIns="0" bIns="0"/>
+          <a:lstStyle/>
+          <a:p>
+            <a:pPr algn="l"/>
+            <a:r>
+              <a:rPr sz="2000" b="0" i="0">
+                <a:solidFill>
+                  <a:srgbClr val="FFFFFF"/>
+                </a:solidFill>
+                <a:latin typeface="Calibri"/>
+              </a:rPr>
+              <a:t>Why can't binary search work on unsorted data?</a:t>
+            </a:r>
+          </a:p>
+        </p:txBody>
+      </p:sp>
+      <p:sp>
+        <p:nvSpPr>
+          <p:cNvPr id="6" name="Oval 5"/>
+          <p:cNvSpPr/>
+          <p:nvPr/>
+        </p:nvSpPr>
+        <p:spPr>
+          <a:xfrm>
+            <a:off x="548640" y="2697480"/>
+            <a:ext cx="502920" cy="502920"/>
+          </a:xfrm>
+          <a:prstGeom prst="ellipse">
+            <a:avLst/>
+          </a:prstGeom>
+          <a:solidFill>
+            <a:srgbClr val="F2B705"/>
+          </a:solidFill>
+          <a:ln>
+            <a:noFill/>
+          </a:ln>
+          <a:effectLst/>
+        </p:spPr>
+        <p:style>
+          <a:lnRef idx="1">
+            <a:schemeClr val="accent1"/>
+          </a:lnRef>
+          <a:fillRef idx="3">
+            <a:schemeClr val="accent1"/>
+          </a:fillRef>
+          <a:effectRef idx="2">
+            <a:schemeClr val="accent1"/>
+          </a:effectRef>
+          <a:fontRef idx="minor">
+            <a:schemeClr val="lt1"/>
+          </a:fontRef>
+        </p:style>
+        <p:txBody>
+          <a:bodyPr rtlCol="0" anchor="ctr" lIns="0" rIns="0" tIns="0" bIns="0"/>
+          <a:lstStyle/>
+          <a:p>
+            <a:pPr algn="ctr"/>
+            <a:r>
+              <a:rPr sz="1700" b="1">
+                <a:solidFill>
+                  <a:srgbClr val="202122"/>
+                </a:solidFill>
+                <a:latin typeface="Calibri"/>
+              </a:rPr>
+              <a:t>2</a:t>
+            </a:r>
+          </a:p>
+        </p:txBody>
+      </p:sp>
+      <p:sp>
+        <p:nvSpPr>
+          <p:cNvPr id="7" name="TextBox 6"/>
+          <p:cNvSpPr txBox="1"/>
+          <p:nvPr/>
+        </p:nvSpPr>
+        <p:spPr>
+          <a:xfrm>
+            <a:off x="1325880" y="2606040"/>
+            <a:ext cx="6583680" cy="822960"/>
+          </a:xfrm>
+          <a:prstGeom prst="rect">
+            <a:avLst/>
+          </a:prstGeom>
+          <a:noFill/>
+        </p:spPr>
+        <p:txBody>
+          <a:bodyPr wrap="square" anchor="ctr" lIns="0" rIns="0" tIns="0" bIns="0"/>
+          <a:lstStyle/>
+          <a:p>
+            <a:pPr algn="l"/>
+            <a:r>
+              <a:rPr sz="2000" b="0" i="0">
+                <a:solidFill>
+                  <a:srgbClr val="FFFFFF"/>
+                </a:solidFill>
+                <a:latin typeface="Calibri"/>
+              </a:rPr>
+              <a:t>What is the worst case for bubble sort?</a:t>
+            </a:r>
+          </a:p>
+        </p:txBody>
+      </p:sp>
+      <p:sp>
+        <p:nvSpPr>
+          <p:cNvPr id="8" name="Oval 7"/>
+          <p:cNvSpPr/>
+          <p:nvPr/>
+        </p:nvSpPr>
+        <p:spPr>
+          <a:xfrm>
+            <a:off x="548640" y="3657600"/>
+            <a:ext cx="502920" cy="502920"/>
+          </a:xfrm>
+          <a:prstGeom prst="ellipse">
+            <a:avLst/>
+          </a:prstGeom>
+          <a:solidFill>
+            <a:srgbClr val="F2B705"/>
+          </a:solidFill>
+          <a:ln>
+            <a:noFill/>
+          </a:ln>
+          <a:effectLst/>
+        </p:spPr>
+        <p:style>
+          <a:lnRef idx="1">
+            <a:schemeClr val="accent1"/>
+          </a:lnRef>
+          <a:fillRef idx="3">
+            <a:schemeClr val="accent1"/>
+          </a:fillRef>
+          <a:effectRef idx="2">
+            <a:schemeClr val="accent1"/>
+          </a:effectRef>
+          <a:fontRef idx="minor">
+            <a:schemeClr val="lt1"/>
+          </a:fontRef>
+        </p:style>
+        <p:txBody>
+          <a:bodyPr rtlCol="0" anchor="ctr" lIns="0" rIns="0" tIns="0" bIns="0"/>
+          <a:lstStyle/>
+          <a:p>
+            <a:pPr algn="ctr"/>
+            <a:r>
+              <a:rPr sz="1700" b="1">
+                <a:solidFill>
+                  <a:srgbClr val="202122"/>
+                </a:solidFill>
+                <a:latin typeface="Calibri"/>
+              </a:rPr>
+              <a:t>3</a:t>
+            </a:r>
+          </a:p>
+        </p:txBody>
+      </p:sp>
+      <p:sp>
+        <p:nvSpPr>
+          <p:cNvPr id="9" name="TextBox 8"/>
+          <p:cNvSpPr txBox="1"/>
+          <p:nvPr/>
+        </p:nvSpPr>
+        <p:spPr>
+          <a:xfrm>
+            <a:off x="1325880" y="3566160"/>
+            <a:ext cx="6583680" cy="822960"/>
+          </a:xfrm>
+          <a:prstGeom prst="rect">
+            <a:avLst/>
+          </a:prstGeom>
+          <a:noFill/>
+        </p:spPr>
+        <p:txBody>
+          <a:bodyPr wrap="square" anchor="ctr" lIns="0" rIns="0" tIns="0" bIns="0"/>
+          <a:lstStyle/>
+          <a:p>
+            <a:pPr algn="l"/>
+            <a:r>
+              <a:rPr sz="2000" b="0" i="0">
+                <a:solidFill>
+                  <a:srgbClr val="FFFFFF"/>
+                </a:solidFill>
+                <a:latin typeface="Calibri"/>
+              </a:rPr>
+              <a:t>Which algorithm would you use to sort 1 million records, and why?</a:t>
+            </a:r>
+          </a:p>
+        </p:txBody>
+      </p:sp>
+      <p:sp>
+        <p:nvSpPr>
+          <p:cNvPr id="10" name="Rounded Rectangle 9"/>
+          <p:cNvSpPr/>
+          <p:nvPr/>
+        </p:nvSpPr>
+        <p:spPr>
+          <a:xfrm>
+            <a:off x="8229600" y="1645920"/>
+            <a:ext cx="3410712" cy="2926080"/>
+          </a:xfrm>
+          <a:prstGeom prst="roundRect">
+            <a:avLst>
+              <a:gd name="adj" fmla="val 8000"/>
+            </a:avLst>
+          </a:prstGeom>
+          <a:solidFill>
+            <a:srgbClr val="0645AD"/>
+          </a:solidFill>
+          <a:ln>
+            <a:noFill/>
+          </a:ln>
+          <a:effectLst/>
+        </p:spPr>
+        <p:style>
+          <a:lnRef idx="1">
+            <a:schemeClr val="accent1"/>
+          </a:lnRef>
+          <a:fillRef idx="3">
+            <a:schemeClr val="accent1"/>
+          </a:fillRef>
+          <a:effectRef idx="2">
+            <a:schemeClr val="accent1"/>
+          </a:effectRef>
+          <a:fontRef idx="minor">
+            <a:schemeClr val="lt1"/>
+          </a:fontRef>
+        </p:style>
+        <p:txBody>
+          <a:bodyPr rtlCol="0" anchor="ctr"/>
+          <a:lstStyle/>
+          <a:p/>
+        </p:txBody>
+      </p:sp>
+      <p:sp>
+        <p:nvSpPr>
+          <p:cNvPr id="11" name="TextBox 10"/>
+          <p:cNvSpPr txBox="1"/>
+          <p:nvPr/>
+        </p:nvSpPr>
+        <p:spPr>
+          <a:xfrm>
+            <a:off x="8503920" y="1874519"/>
+            <a:ext cx="2926080" cy="365760"/>
+          </a:xfrm>
+          <a:prstGeom prst="rect">
+            <a:avLst/>
+          </a:prstGeom>
+          <a:noFill/>
+        </p:spPr>
+        <p:txBody>
+          <a:bodyPr wrap="square" anchor="t" lIns="0" rIns="0" tIns="0" bIns="0"/>
+          <a:lstStyle/>
+          <a:p>
+            <a:pPr algn="l"/>
+            <a:r>
+              <a:rPr sz="1300" b="1" i="0">
+                <a:solidFill>
+                  <a:srgbClr val="A9C8F0"/>
+                </a:solidFill>
+                <a:latin typeface="Calibri"/>
+              </a:rPr>
+              <a:t>REVISE THIS TOPIC</a:t>
+            </a:r>
+          </a:p>
+        </p:txBody>
+      </p:sp>
+      <p:sp>
+        <p:nvSpPr>
+          <p:cNvPr id="12" name="TextBox 11"/>
+          <p:cNvSpPr txBox="1"/>
+          <p:nvPr/>
+        </p:nvSpPr>
+        <p:spPr>
+          <a:xfrm>
+            <a:off x="8503920" y="2286000"/>
+            <a:ext cx="2926080" cy="548640"/>
+          </a:xfrm>
+          <a:prstGeom prst="rect">
+            <a:avLst/>
+          </a:prstGeom>
+          <a:noFill/>
+        </p:spPr>
+        <p:txBody>
+          <a:bodyPr wrap="square" anchor="t" lIns="0" rIns="0" tIns="0" bIns="0"/>
+          <a:lstStyle/>
+          <a:p>
+            <a:pPr algn="l"/>
+            <a:r>
+              <a:rPr sz="1400" b="0" i="0">
+                <a:solidFill>
+                  <a:srgbClr val="FFFFFF"/>
+                </a:solidFill>
+                <a:latin typeface="Calibri"/>
+              </a:rPr>
+              <a:t>Revision notes for this lesson are on the study wiki:</a:t>
+            </a:r>
+          </a:p>
+        </p:txBody>
+      </p:sp>
+      <p:sp>
+        <p:nvSpPr>
+          <p:cNvPr id="13" name="TextBox 12"/>
+          <p:cNvSpPr txBox="1"/>
+          <p:nvPr/>
+        </p:nvSpPr>
+        <p:spPr>
+          <a:xfrm>
+            <a:off x="8503920" y="2926080"/>
+            <a:ext cx="2926080" cy="1463040"/>
+          </a:xfrm>
+          <a:prstGeom prst="rect">
+            <a:avLst/>
+          </a:prstGeom>
+          <a:noFill/>
+        </p:spPr>
+        <p:txBody>
+          <a:bodyPr wrap="square" anchor="t" lIns="0" rIns="0" tIns="0" bIns="0"/>
+          <a:lstStyle/>
+          <a:p>
+            <a:pPr algn="l"/>
+            <a:r>
+              <a:rPr sz="2000" b="1" i="0">
+                <a:solidFill>
+                  <a:srgbClr val="FFFFFF"/>
+                </a:solidFill>
+                <a:latin typeface="Cambria"/>
+              </a:rPr>
+              <a:t>Core Paper 1: Problem Solving, Programming, Emerging Issues and Legislation</a:t>
+            </a:r>
+          </a:p>
+        </p:txBody>
+      </p:sp>
+      <p:sp>
+        <p:nvSpPr>
+          <p:cNvPr id="14" name="TextBox 13"/>
+          <p:cNvSpPr txBox="1"/>
+          <p:nvPr/>
+        </p:nvSpPr>
+        <p:spPr>
+          <a:xfrm>
+            <a:off x="548640" y="5669280"/>
+            <a:ext cx="11094415" cy="548640"/>
+          </a:xfrm>
+          <a:prstGeom prst="rect">
+            <a:avLst/>
+          </a:prstGeom>
+          <a:noFill/>
+        </p:spPr>
+        <p:txBody>
+          <a:bodyPr wrap="square" anchor="t" lIns="0" rIns="0" tIns="0" bIns="0"/>
+          <a:lstStyle/>
+          <a:p>
+            <a:pPr algn="l"/>
+            <a:r>
+              <a:rPr sz="1200" b="0" i="0">
+                <a:solidFill>
+                  <a:srgbClr val="A9C8F0"/>
+                </a:solidFill>
+                <a:latin typeface="Calibri"/>
+              </a:rPr>
+              <a:t>https://lana6478.github.io/T-level-Digital-Software-Development/#/01-core-component/01-core-paper-1.md</a:t>
+            </a:r>
+          </a:p>
+        </p:txBody>
+      </p:sp>
+    </p:spTree>
+  </p:cSld>
+  <p:clrMapOvr>
+    <a:masterClrMapping/>
+  </p:clrMapOvr>
+</p:sld>
+</file>
+
 <file path=ppt/slides/slide2.xml><?xml version="1.0" encoding="utf-8"?>
 <p:sld xmlns:a="http://schemas.openxmlformats.org/drawingml/2006/main" xmlns:p="http://schemas.openxmlformats.org/presentationml/2006/main" xmlns:r="http://schemas.openxmlformats.org/officeDocument/2006/relationships">
   <p:cSld>
@@ -4842,18 +8894,73 @@
       </p:sp>
       <p:sp>
         <p:nvSpPr>
-          <p:cNvPr id="6" name="Rounded Rectangle 5"/>
+          <p:cNvPr id="6" name="TextBox 5"/>
+          <p:cNvSpPr txBox="1"/>
+          <p:nvPr/>
+        </p:nvSpPr>
+        <p:spPr>
+          <a:xfrm>
+            <a:off x="548640" y="1554480"/>
+            <a:ext cx="6720840" cy="4617720"/>
+          </a:xfrm>
+          <a:prstGeom prst="rect">
+            <a:avLst/>
+          </a:prstGeom>
+          <a:noFill/>
+        </p:spPr>
+        <p:txBody>
+          <a:bodyPr wrap="square" lIns="0" rIns="0" tIns="0" bIns="0">
+            <a:spAutoFit/>
+          </a:bodyPr>
+          <a:lstStyle/>
+          <a:p>
+            <a:pPr>
+              <a:spcAft>
+                <a:spcPts val="1320"/>
+              </a:spcAft>
+            </a:pPr>
+            <a:r>
+              <a:rPr sz="2200" b="0">
+                <a:solidFill>
+                  <a:srgbClr val="202122"/>
+                </a:solidFill>
+                <a:latin typeface="Calibri"/>
+              </a:rPr>
+              <a:t>A linear search checks each item in turn from the start until it finds the target or reaches the end. It works on any list, sorted or not, and is simple, but it's slow on large lists: in the worst case it checks every item.</a:t>
+            </a:r>
+          </a:p>
+          <a:p>
+            <a:pPr>
+              <a:spcAft>
+                <a:spcPts val="1320"/>
+              </a:spcAft>
+            </a:pPr>
+            <a:r>
+              <a:rPr sz="2200" b="0">
+                <a:solidFill>
+                  <a:srgbClr val="202122"/>
+                </a:solidFill>
+                <a:latin typeface="Calibri"/>
+              </a:rPr>
+              <a:t>A binary search only works on sorted data. It checks the middle item; if that isn't the target, it throws away the half that can't contain it and repeats on the other half. Each step halves the search, so it's very fast on large lists.</a:t>
+            </a:r>
+          </a:p>
+        </p:txBody>
+      </p:sp>
+      <p:sp>
+        <p:nvSpPr>
+          <p:cNvPr id="7" name="Rounded Rectangle 6"/>
           <p:cNvSpPr/>
           <p:nvPr/>
         </p:nvSpPr>
         <p:spPr>
           <a:xfrm>
-            <a:off x="548640" y="1600200"/>
-            <a:ext cx="5364327" cy="640080"/>
+            <a:off x="7772400" y="1554480"/>
+            <a:ext cx="3867912" cy="4526280"/>
           </a:xfrm>
           <a:prstGeom prst="roundRect">
             <a:avLst>
-              <a:gd name="adj" fmla="val 15000"/>
+              <a:gd name="adj" fmla="val 8000"/>
             </a:avLst>
           </a:prstGeom>
           <a:solidFill>
@@ -4886,55 +8993,20 @@
       </p:sp>
       <p:sp>
         <p:nvSpPr>
-          <p:cNvPr id="7" name="TextBox 6"/>
-          <p:cNvSpPr txBox="1"/>
-          <p:nvPr/>
-        </p:nvSpPr>
-        <p:spPr>
-          <a:xfrm>
-            <a:off x="777240" y="1600200"/>
-            <a:ext cx="4907127" cy="640080"/>
-          </a:xfrm>
-          <a:prstGeom prst="rect">
-            <a:avLst/>
-          </a:prstGeom>
-          <a:noFill/>
-        </p:spPr>
-        <p:txBody>
-          <a:bodyPr wrap="square" anchor="ctr" lIns="0" rIns="0" tIns="0" bIns="0"/>
-          <a:lstStyle/>
-          <a:p>
-            <a:pPr algn="l"/>
-            <a:r>
-              <a:rPr sz="2000" b="1" i="0">
-                <a:solidFill>
-                  <a:srgbClr val="FFFFFF"/>
-                </a:solidFill>
-                <a:latin typeface="Calibri"/>
-              </a:rPr>
-              <a:t>Linear search</a:t>
-            </a:r>
-          </a:p>
-        </p:txBody>
-      </p:sp>
-      <p:sp>
-        <p:nvSpPr>
-          <p:cNvPr id="8" name="Rounded Rectangle 7"/>
+          <p:cNvPr id="8" name="Oval 7"/>
           <p:cNvSpPr/>
           <p:nvPr/>
         </p:nvSpPr>
         <p:spPr>
           <a:xfrm>
-            <a:off x="548640" y="2377440"/>
-            <a:ext cx="5364327" cy="3794760"/>
-          </a:xfrm>
-          <a:prstGeom prst="roundRect">
-            <a:avLst>
-              <a:gd name="adj" fmla="val 4000"/>
-            </a:avLst>
+            <a:off x="8046720" y="1828800"/>
+            <a:ext cx="548640" cy="548640"/>
+          </a:xfrm>
+          <a:prstGeom prst="ellipse">
+            <a:avLst/>
           </a:prstGeom>
           <a:solidFill>
-            <a:srgbClr val="EAF3FF"/>
+            <a:srgbClr val="F2B705"/>
           </a:solidFill>
           <a:ln>
             <a:noFill/>
@@ -4956,9 +9028,20 @@
           </a:fontRef>
         </p:style>
         <p:txBody>
-          <a:bodyPr rtlCol="0" anchor="ctr"/>
-          <a:lstStyle/>
-          <a:p/>
+          <a:bodyPr rtlCol="0" anchor="ctr" lIns="0" rIns="0" tIns="0" bIns="0"/>
+          <a:lstStyle/>
+          <a:p>
+            <a:pPr algn="ctr"/>
+            <a:r>
+              <a:rPr sz="1300" b="1">
+                <a:solidFill>
+                  <a:srgbClr val="202122"/>
+                </a:solidFill>
+                <a:latin typeface="Calibri"/>
+              </a:rPr>
+              <a:t>e.g.</a:t>
+            </a:r>
+          </a:p>
         </p:txBody>
       </p:sp>
       <p:sp>
@@ -4969,8 +9052,8 @@
         </p:nvSpPr>
         <p:spPr>
           <a:xfrm>
-            <a:off x="822959" y="2606040"/>
-            <a:ext cx="4815687" cy="3337560"/>
+            <a:off x="8046720" y="2560320"/>
+            <a:ext cx="3291840" cy="365760"/>
           </a:xfrm>
           <a:prstGeom prst="rect">
             <a:avLst/>
@@ -4978,159 +9061,32 @@
           <a:noFill/>
         </p:spPr>
         <p:txBody>
-          <a:bodyPr wrap="square" lIns="0" rIns="0" tIns="0" bIns="0">
-            <a:spAutoFit/>
-          </a:bodyPr>
-          <a:lstStyle/>
-          <a:p>
-            <a:pPr marL="274320" indent="-274320">
-              <a:spcAft>
-                <a:spcPts val="990"/>
-              </a:spcAft>
-              <a:buClr>
-                <a:srgbClr val="0645AD"/>
-              </a:buClr>
-              <a:buFont typeface="Arial"/>
-              <a:buChar char="•"/>
-            </a:pPr>
-            <a:r>
-              <a:rPr sz="2200" b="0">
-                <a:solidFill>
-                  <a:srgbClr val="202122"/>
-                </a:solidFill>
-                <a:latin typeface="Calibri"/>
-              </a:rPr>
-              <a:t>Check each item in turn from the start</a:t>
-            </a:r>
-          </a:p>
-          <a:p>
-            <a:pPr marL="274320" indent="-274320">
-              <a:spcAft>
-                <a:spcPts val="990"/>
-              </a:spcAft>
-              <a:buClr>
-                <a:srgbClr val="0645AD"/>
-              </a:buClr>
-              <a:buFont typeface="Arial"/>
-              <a:buChar char="•"/>
-            </a:pPr>
-            <a:r>
-              <a:rPr sz="2200" b="0">
-                <a:solidFill>
-                  <a:srgbClr val="202122"/>
-                </a:solidFill>
-                <a:latin typeface="Calibri"/>
-              </a:rPr>
-              <a:t>Works on unsorted data</a:t>
-            </a:r>
-          </a:p>
-          <a:p>
-            <a:pPr marL="274320" indent="-274320">
-              <a:spcAft>
-                <a:spcPts val="990"/>
-              </a:spcAft>
-              <a:buClr>
-                <a:srgbClr val="0645AD"/>
-              </a:buClr>
-              <a:buFont typeface="Arial"/>
-              <a:buChar char="•"/>
-            </a:pPr>
-            <a:r>
-              <a:rPr sz="2200" b="0">
-                <a:solidFill>
-                  <a:srgbClr val="202122"/>
-                </a:solidFill>
-                <a:latin typeface="Calibri"/>
-              </a:rPr>
-              <a:t>Simple to write</a:t>
-            </a:r>
-          </a:p>
-          <a:p>
-            <a:pPr marL="274320" indent="-274320">
-              <a:spcAft>
-                <a:spcPts val="990"/>
-              </a:spcAft>
-              <a:buClr>
-                <a:srgbClr val="0645AD"/>
-              </a:buClr>
-              <a:buFont typeface="Arial"/>
-              <a:buChar char="•"/>
-            </a:pPr>
-            <a:r>
-              <a:rPr sz="2200" b="1">
-                <a:solidFill>
-                  <a:srgbClr val="202122"/>
-                </a:solidFill>
-                <a:latin typeface="Calibri"/>
-              </a:rPr>
-              <a:t>Slow on large lists:</a:t>
-            </a:r>
-            <a:r>
-              <a:rPr sz="2200" b="0">
-                <a:solidFill>
-                  <a:srgbClr val="202122"/>
-                </a:solidFill>
-                <a:latin typeface="Calibri"/>
-              </a:rPr>
-              <a:t> may check every item</a:t>
-            </a:r>
-          </a:p>
-        </p:txBody>
-      </p:sp>
-      <p:sp>
-        <p:nvSpPr>
-          <p:cNvPr id="10" name="Rounded Rectangle 9"/>
-          <p:cNvSpPr/>
-          <p:nvPr/>
-        </p:nvSpPr>
-        <p:spPr>
-          <a:xfrm>
-            <a:off x="6278727" y="1600200"/>
-            <a:ext cx="5364327" cy="640080"/>
-          </a:xfrm>
-          <a:prstGeom prst="roundRect">
-            <a:avLst>
-              <a:gd name="adj" fmla="val 15000"/>
-            </a:avLst>
-          </a:prstGeom>
-          <a:solidFill>
-            <a:srgbClr val="0645AD"/>
-          </a:solidFill>
-          <a:ln>
-            <a:noFill/>
-          </a:ln>
-          <a:effectLst/>
-        </p:spPr>
-        <p:style>
-          <a:lnRef idx="1">
-            <a:schemeClr val="accent1"/>
-          </a:lnRef>
-          <a:fillRef idx="3">
-            <a:schemeClr val="accent1"/>
-          </a:fillRef>
-          <a:effectRef idx="2">
-            <a:schemeClr val="accent1"/>
-          </a:effectRef>
-          <a:fontRef idx="minor">
-            <a:schemeClr val="lt1"/>
-          </a:fontRef>
-        </p:style>
-        <p:txBody>
-          <a:bodyPr rtlCol="0" anchor="ctr"/>
-          <a:lstStyle/>
-          <a:p/>
-        </p:txBody>
-      </p:sp>
-      <p:sp>
-        <p:nvSpPr>
-          <p:cNvPr id="11" name="TextBox 10"/>
+          <a:bodyPr wrap="square" anchor="t" lIns="0" rIns="0" tIns="0" bIns="0"/>
+          <a:lstStyle/>
+          <a:p>
+            <a:pPr algn="l"/>
+            <a:r>
+              <a:rPr sz="1300" b="1" i="0">
+                <a:solidFill>
+                  <a:srgbClr val="A9C8F0"/>
+                </a:solidFill>
+                <a:latin typeface="Calibri"/>
+              </a:rPr>
+              <a:t>EXAMPLE</a:t>
+            </a:r>
+          </a:p>
+        </p:txBody>
+      </p:sp>
+      <p:sp>
+        <p:nvSpPr>
+          <p:cNvPr id="10" name="TextBox 9"/>
           <p:cNvSpPr txBox="1"/>
           <p:nvPr/>
         </p:nvSpPr>
         <p:spPr>
           <a:xfrm>
-            <a:off x="6507327" y="1600200"/>
-            <a:ext cx="4907127" cy="640080"/>
+            <a:off x="8046720" y="2971800"/>
+            <a:ext cx="3291840" cy="2971800"/>
           </a:xfrm>
           <a:prstGeom prst="rect">
             <a:avLst/>
@@ -5138,169 +9094,18 @@
           <a:noFill/>
         </p:spPr>
         <p:txBody>
-          <a:bodyPr wrap="square" anchor="ctr" lIns="0" rIns="0" tIns="0" bIns="0"/>
+          <a:bodyPr wrap="square" anchor="t" lIns="0" rIns="0" tIns="0" bIns="0"/>
           <a:lstStyle/>
           <a:p>
             <a:pPr algn="l"/>
             <a:r>
-              <a:rPr sz="2000" b="1" i="0">
+              <a:rPr sz="1900" b="0" i="0">
                 <a:solidFill>
                   <a:srgbClr val="FFFFFF"/>
                 </a:solidFill>
-                <a:latin typeface="Calibri"/>
-              </a:rPr>
-              <a:t>Binary search</a:t>
-            </a:r>
-          </a:p>
-        </p:txBody>
-      </p:sp>
-      <p:sp>
-        <p:nvSpPr>
-          <p:cNvPr id="12" name="Rounded Rectangle 11"/>
-          <p:cNvSpPr/>
-          <p:nvPr/>
-        </p:nvSpPr>
-        <p:spPr>
-          <a:xfrm>
-            <a:off x="6278727" y="2377440"/>
-            <a:ext cx="5364327" cy="3794760"/>
-          </a:xfrm>
-          <a:prstGeom prst="roundRect">
-            <a:avLst>
-              <a:gd name="adj" fmla="val 4000"/>
-            </a:avLst>
-          </a:prstGeom>
-          <a:solidFill>
-            <a:srgbClr val="EAF3FF"/>
-          </a:solidFill>
-          <a:ln>
-            <a:noFill/>
-          </a:ln>
-          <a:effectLst/>
-        </p:spPr>
-        <p:style>
-          <a:lnRef idx="1">
-            <a:schemeClr val="accent1"/>
-          </a:lnRef>
-          <a:fillRef idx="3">
-            <a:schemeClr val="accent1"/>
-          </a:fillRef>
-          <a:effectRef idx="2">
-            <a:schemeClr val="accent1"/>
-          </a:effectRef>
-          <a:fontRef idx="minor">
-            <a:schemeClr val="lt1"/>
-          </a:fontRef>
-        </p:style>
-        <p:txBody>
-          <a:bodyPr rtlCol="0" anchor="ctr"/>
-          <a:lstStyle/>
-          <a:p/>
-        </p:txBody>
-      </p:sp>
-      <p:sp>
-        <p:nvSpPr>
-          <p:cNvPr id="13" name="TextBox 12"/>
-          <p:cNvSpPr txBox="1"/>
-          <p:nvPr/>
-        </p:nvSpPr>
-        <p:spPr>
-          <a:xfrm>
-            <a:off x="6553047" y="2606040"/>
-            <a:ext cx="4815687" cy="3337560"/>
-          </a:xfrm>
-          <a:prstGeom prst="rect">
-            <a:avLst/>
-          </a:prstGeom>
-          <a:noFill/>
-        </p:spPr>
-        <p:txBody>
-          <a:bodyPr wrap="square" lIns="0" rIns="0" tIns="0" bIns="0">
-            <a:spAutoFit/>
-          </a:bodyPr>
-          <a:lstStyle/>
-          <a:p>
-            <a:pPr marL="274320" indent="-274320">
-              <a:spcAft>
-                <a:spcPts val="990"/>
-              </a:spcAft>
-              <a:buClr>
-                <a:srgbClr val="0645AD"/>
-              </a:buClr>
-              <a:buFont typeface="Arial"/>
-              <a:buChar char="•"/>
-            </a:pPr>
-            <a:r>
-              <a:rPr sz="2200" b="0">
-                <a:solidFill>
-                  <a:srgbClr val="202122"/>
-                </a:solidFill>
-                <a:latin typeface="Calibri"/>
-              </a:rPr>
-              <a:t>Needs sorted data</a:t>
-            </a:r>
-          </a:p>
-          <a:p>
-            <a:pPr marL="274320" indent="-274320">
-              <a:spcAft>
-                <a:spcPts val="990"/>
-              </a:spcAft>
-              <a:buClr>
-                <a:srgbClr val="0645AD"/>
-              </a:buClr>
-              <a:buFont typeface="Arial"/>
-              <a:buChar char="•"/>
-            </a:pPr>
-            <a:r>
-              <a:rPr sz="2200" b="0">
-                <a:solidFill>
-                  <a:srgbClr val="202122"/>
-                </a:solidFill>
-                <a:latin typeface="Calibri"/>
-              </a:rPr>
-              <a:t>Check the middle; discard the half that cannot contain the target</a:t>
-            </a:r>
-          </a:p>
-          <a:p>
-            <a:pPr marL="274320" indent="-274320">
-              <a:spcAft>
-                <a:spcPts val="990"/>
-              </a:spcAft>
-              <a:buClr>
-                <a:srgbClr val="0645AD"/>
-              </a:buClr>
-              <a:buFont typeface="Arial"/>
-              <a:buChar char="•"/>
-            </a:pPr>
-            <a:r>
-              <a:rPr sz="2200" b="0">
-                <a:solidFill>
-                  <a:srgbClr val="202122"/>
-                </a:solidFill>
-                <a:latin typeface="Calibri"/>
-              </a:rPr>
-              <a:t>Repeat until found or nothing is left</a:t>
-            </a:r>
-          </a:p>
-          <a:p>
-            <a:pPr marL="274320" indent="-274320">
-              <a:spcAft>
-                <a:spcPts val="990"/>
-              </a:spcAft>
-              <a:buClr>
-                <a:srgbClr val="0645AD"/>
-              </a:buClr>
-              <a:buFont typeface="Arial"/>
-              <a:buChar char="•"/>
-            </a:pPr>
-            <a:r>
-              <a:rPr sz="2200" b="0">
-                <a:solidFill>
-                  <a:srgbClr val="202122"/>
-                </a:solidFill>
-                <a:latin typeface="Calibri"/>
-              </a:rPr>
-              <a:t>Very fast on large lists</a:t>
+                <a:latin typeface="Cambria"/>
+              </a:rPr>
+              <a:t>Finding 70 in a sorted list of 1,000 numbers: linear might need 1,000 checks; binary needs about 10, because 2 to the power 10 is 1,024.</a:t>
             </a:r>
           </a:p>
         </p:txBody>
@@ -5392,7 +9197,7 @@
                 </a:solidFill>
                 <a:latin typeface="Cambria"/>
               </a:rPr>
-              <a:t>Sorting algorithms</a:t>
+              <a:t>Searching</a:t>
             </a:r>
           </a:p>
         </p:txBody>
@@ -5459,6 +9264,1470 @@
                 <a:latin typeface="Calibri"/>
               </a:rPr>
               <a:t>4</a:t>
+            </a:r>
+          </a:p>
+        </p:txBody>
+      </p:sp>
+      <p:sp>
+        <p:nvSpPr>
+          <p:cNvPr id="6" name="Rounded Rectangle 5"/>
+          <p:cNvSpPr/>
+          <p:nvPr/>
+        </p:nvSpPr>
+        <p:spPr>
+          <a:xfrm>
+            <a:off x="548640" y="1600200"/>
+            <a:ext cx="5364327" cy="640080"/>
+          </a:xfrm>
+          <a:prstGeom prst="roundRect">
+            <a:avLst>
+              <a:gd name="adj" fmla="val 15000"/>
+            </a:avLst>
+          </a:prstGeom>
+          <a:solidFill>
+            <a:srgbClr val="03306E"/>
+          </a:solidFill>
+          <a:ln>
+            <a:noFill/>
+          </a:ln>
+          <a:effectLst/>
+        </p:spPr>
+        <p:style>
+          <a:lnRef idx="1">
+            <a:schemeClr val="accent1"/>
+          </a:lnRef>
+          <a:fillRef idx="3">
+            <a:schemeClr val="accent1"/>
+          </a:fillRef>
+          <a:effectRef idx="2">
+            <a:schemeClr val="accent1"/>
+          </a:effectRef>
+          <a:fontRef idx="minor">
+            <a:schemeClr val="lt1"/>
+          </a:fontRef>
+        </p:style>
+        <p:txBody>
+          <a:bodyPr rtlCol="0" anchor="ctr"/>
+          <a:lstStyle/>
+          <a:p/>
+        </p:txBody>
+      </p:sp>
+      <p:sp>
+        <p:nvSpPr>
+          <p:cNvPr id="7" name="TextBox 6"/>
+          <p:cNvSpPr txBox="1"/>
+          <p:nvPr/>
+        </p:nvSpPr>
+        <p:spPr>
+          <a:xfrm>
+            <a:off x="777240" y="1600200"/>
+            <a:ext cx="4907127" cy="640080"/>
+          </a:xfrm>
+          <a:prstGeom prst="rect">
+            <a:avLst/>
+          </a:prstGeom>
+          <a:noFill/>
+        </p:spPr>
+        <p:txBody>
+          <a:bodyPr wrap="square" anchor="ctr" lIns="0" rIns="0" tIns="0" bIns="0"/>
+          <a:lstStyle/>
+          <a:p>
+            <a:pPr algn="l"/>
+            <a:r>
+              <a:rPr sz="2000" b="1" i="0">
+                <a:solidFill>
+                  <a:srgbClr val="FFFFFF"/>
+                </a:solidFill>
+                <a:latin typeface="Calibri"/>
+              </a:rPr>
+              <a:t>Linear search</a:t>
+            </a:r>
+          </a:p>
+        </p:txBody>
+      </p:sp>
+      <p:sp>
+        <p:nvSpPr>
+          <p:cNvPr id="8" name="Rounded Rectangle 7"/>
+          <p:cNvSpPr/>
+          <p:nvPr/>
+        </p:nvSpPr>
+        <p:spPr>
+          <a:xfrm>
+            <a:off x="548640" y="2377440"/>
+            <a:ext cx="5364327" cy="3794760"/>
+          </a:xfrm>
+          <a:prstGeom prst="roundRect">
+            <a:avLst>
+              <a:gd name="adj" fmla="val 4000"/>
+            </a:avLst>
+          </a:prstGeom>
+          <a:solidFill>
+            <a:srgbClr val="EAF3FF"/>
+          </a:solidFill>
+          <a:ln>
+            <a:noFill/>
+          </a:ln>
+          <a:effectLst/>
+        </p:spPr>
+        <p:style>
+          <a:lnRef idx="1">
+            <a:schemeClr val="accent1"/>
+          </a:lnRef>
+          <a:fillRef idx="3">
+            <a:schemeClr val="accent1"/>
+          </a:fillRef>
+          <a:effectRef idx="2">
+            <a:schemeClr val="accent1"/>
+          </a:effectRef>
+          <a:fontRef idx="minor">
+            <a:schemeClr val="lt1"/>
+          </a:fontRef>
+        </p:style>
+        <p:txBody>
+          <a:bodyPr rtlCol="0" anchor="ctr"/>
+          <a:lstStyle/>
+          <a:p/>
+        </p:txBody>
+      </p:sp>
+      <p:sp>
+        <p:nvSpPr>
+          <p:cNvPr id="9" name="TextBox 8"/>
+          <p:cNvSpPr txBox="1"/>
+          <p:nvPr/>
+        </p:nvSpPr>
+        <p:spPr>
+          <a:xfrm>
+            <a:off x="822959" y="2606040"/>
+            <a:ext cx="4815687" cy="3337560"/>
+          </a:xfrm>
+          <a:prstGeom prst="rect">
+            <a:avLst/>
+          </a:prstGeom>
+          <a:noFill/>
+        </p:spPr>
+        <p:txBody>
+          <a:bodyPr wrap="square" lIns="0" rIns="0" tIns="0" bIns="0">
+            <a:spAutoFit/>
+          </a:bodyPr>
+          <a:lstStyle/>
+          <a:p>
+            <a:pPr marL="274320" indent="-274320">
+              <a:spcAft>
+                <a:spcPts val="990"/>
+              </a:spcAft>
+              <a:buClr>
+                <a:srgbClr val="0645AD"/>
+              </a:buClr>
+              <a:buFont typeface="Arial"/>
+              <a:buChar char="•"/>
+            </a:pPr>
+            <a:r>
+              <a:rPr sz="2200" b="0">
+                <a:solidFill>
+                  <a:srgbClr val="202122"/>
+                </a:solidFill>
+                <a:latin typeface="Calibri"/>
+              </a:rPr>
+              <a:t>Check each item in turn from the start</a:t>
+            </a:r>
+          </a:p>
+          <a:p>
+            <a:pPr marL="274320" indent="-274320">
+              <a:spcAft>
+                <a:spcPts val="990"/>
+              </a:spcAft>
+              <a:buClr>
+                <a:srgbClr val="0645AD"/>
+              </a:buClr>
+              <a:buFont typeface="Arial"/>
+              <a:buChar char="•"/>
+            </a:pPr>
+            <a:r>
+              <a:rPr sz="2200" b="0">
+                <a:solidFill>
+                  <a:srgbClr val="202122"/>
+                </a:solidFill>
+                <a:latin typeface="Calibri"/>
+              </a:rPr>
+              <a:t>Works on unsorted data</a:t>
+            </a:r>
+          </a:p>
+          <a:p>
+            <a:pPr marL="274320" indent="-274320">
+              <a:spcAft>
+                <a:spcPts val="990"/>
+              </a:spcAft>
+              <a:buClr>
+                <a:srgbClr val="0645AD"/>
+              </a:buClr>
+              <a:buFont typeface="Arial"/>
+              <a:buChar char="•"/>
+            </a:pPr>
+            <a:r>
+              <a:rPr sz="2200" b="0">
+                <a:solidFill>
+                  <a:srgbClr val="202122"/>
+                </a:solidFill>
+                <a:latin typeface="Calibri"/>
+              </a:rPr>
+              <a:t>Simple to write</a:t>
+            </a:r>
+          </a:p>
+          <a:p>
+            <a:pPr marL="274320" indent="-274320">
+              <a:spcAft>
+                <a:spcPts val="990"/>
+              </a:spcAft>
+              <a:buClr>
+                <a:srgbClr val="0645AD"/>
+              </a:buClr>
+              <a:buFont typeface="Arial"/>
+              <a:buChar char="•"/>
+            </a:pPr>
+            <a:r>
+              <a:rPr sz="2200" b="1">
+                <a:solidFill>
+                  <a:srgbClr val="202122"/>
+                </a:solidFill>
+                <a:latin typeface="Calibri"/>
+              </a:rPr>
+              <a:t>Slow on large lists:</a:t>
+            </a:r>
+            <a:r>
+              <a:rPr sz="2200" b="0">
+                <a:solidFill>
+                  <a:srgbClr val="202122"/>
+                </a:solidFill>
+                <a:latin typeface="Calibri"/>
+              </a:rPr>
+              <a:t> may check every item</a:t>
+            </a:r>
+          </a:p>
+        </p:txBody>
+      </p:sp>
+      <p:sp>
+        <p:nvSpPr>
+          <p:cNvPr id="10" name="Rounded Rectangle 9"/>
+          <p:cNvSpPr/>
+          <p:nvPr/>
+        </p:nvSpPr>
+        <p:spPr>
+          <a:xfrm>
+            <a:off x="6278727" y="1600200"/>
+            <a:ext cx="5364327" cy="640080"/>
+          </a:xfrm>
+          <a:prstGeom prst="roundRect">
+            <a:avLst>
+              <a:gd name="adj" fmla="val 15000"/>
+            </a:avLst>
+          </a:prstGeom>
+          <a:solidFill>
+            <a:srgbClr val="0645AD"/>
+          </a:solidFill>
+          <a:ln>
+            <a:noFill/>
+          </a:ln>
+          <a:effectLst/>
+        </p:spPr>
+        <p:style>
+          <a:lnRef idx="1">
+            <a:schemeClr val="accent1"/>
+          </a:lnRef>
+          <a:fillRef idx="3">
+            <a:schemeClr val="accent1"/>
+          </a:fillRef>
+          <a:effectRef idx="2">
+            <a:schemeClr val="accent1"/>
+          </a:effectRef>
+          <a:fontRef idx="minor">
+            <a:schemeClr val="lt1"/>
+          </a:fontRef>
+        </p:style>
+        <p:txBody>
+          <a:bodyPr rtlCol="0" anchor="ctr"/>
+          <a:lstStyle/>
+          <a:p/>
+        </p:txBody>
+      </p:sp>
+      <p:sp>
+        <p:nvSpPr>
+          <p:cNvPr id="11" name="TextBox 10"/>
+          <p:cNvSpPr txBox="1"/>
+          <p:nvPr/>
+        </p:nvSpPr>
+        <p:spPr>
+          <a:xfrm>
+            <a:off x="6507327" y="1600200"/>
+            <a:ext cx="4907127" cy="640080"/>
+          </a:xfrm>
+          <a:prstGeom prst="rect">
+            <a:avLst/>
+          </a:prstGeom>
+          <a:noFill/>
+        </p:spPr>
+        <p:txBody>
+          <a:bodyPr wrap="square" anchor="ctr" lIns="0" rIns="0" tIns="0" bIns="0"/>
+          <a:lstStyle/>
+          <a:p>
+            <a:pPr algn="l"/>
+            <a:r>
+              <a:rPr sz="2000" b="1" i="0">
+                <a:solidFill>
+                  <a:srgbClr val="FFFFFF"/>
+                </a:solidFill>
+                <a:latin typeface="Calibri"/>
+              </a:rPr>
+              <a:t>Binary search</a:t>
+            </a:r>
+          </a:p>
+        </p:txBody>
+      </p:sp>
+      <p:sp>
+        <p:nvSpPr>
+          <p:cNvPr id="12" name="Rounded Rectangle 11"/>
+          <p:cNvSpPr/>
+          <p:nvPr/>
+        </p:nvSpPr>
+        <p:spPr>
+          <a:xfrm>
+            <a:off x="6278727" y="2377440"/>
+            <a:ext cx="5364327" cy="3794760"/>
+          </a:xfrm>
+          <a:prstGeom prst="roundRect">
+            <a:avLst>
+              <a:gd name="adj" fmla="val 4000"/>
+            </a:avLst>
+          </a:prstGeom>
+          <a:solidFill>
+            <a:srgbClr val="EAF3FF"/>
+          </a:solidFill>
+          <a:ln>
+            <a:noFill/>
+          </a:ln>
+          <a:effectLst/>
+        </p:spPr>
+        <p:style>
+          <a:lnRef idx="1">
+            <a:schemeClr val="accent1"/>
+          </a:lnRef>
+          <a:fillRef idx="3">
+            <a:schemeClr val="accent1"/>
+          </a:fillRef>
+          <a:effectRef idx="2">
+            <a:schemeClr val="accent1"/>
+          </a:effectRef>
+          <a:fontRef idx="minor">
+            <a:schemeClr val="lt1"/>
+          </a:fontRef>
+        </p:style>
+        <p:txBody>
+          <a:bodyPr rtlCol="0" anchor="ctr"/>
+          <a:lstStyle/>
+          <a:p/>
+        </p:txBody>
+      </p:sp>
+      <p:sp>
+        <p:nvSpPr>
+          <p:cNvPr id="13" name="TextBox 12"/>
+          <p:cNvSpPr txBox="1"/>
+          <p:nvPr/>
+        </p:nvSpPr>
+        <p:spPr>
+          <a:xfrm>
+            <a:off x="6553047" y="2606040"/>
+            <a:ext cx="4815687" cy="3337560"/>
+          </a:xfrm>
+          <a:prstGeom prst="rect">
+            <a:avLst/>
+          </a:prstGeom>
+          <a:noFill/>
+        </p:spPr>
+        <p:txBody>
+          <a:bodyPr wrap="square" lIns="0" rIns="0" tIns="0" bIns="0">
+            <a:spAutoFit/>
+          </a:bodyPr>
+          <a:lstStyle/>
+          <a:p>
+            <a:pPr marL="274320" indent="-274320">
+              <a:spcAft>
+                <a:spcPts val="990"/>
+              </a:spcAft>
+              <a:buClr>
+                <a:srgbClr val="0645AD"/>
+              </a:buClr>
+              <a:buFont typeface="Arial"/>
+              <a:buChar char="•"/>
+            </a:pPr>
+            <a:r>
+              <a:rPr sz="2200" b="0">
+                <a:solidFill>
+                  <a:srgbClr val="202122"/>
+                </a:solidFill>
+                <a:latin typeface="Calibri"/>
+              </a:rPr>
+              <a:t>Needs sorted data</a:t>
+            </a:r>
+          </a:p>
+          <a:p>
+            <a:pPr marL="274320" indent="-274320">
+              <a:spcAft>
+                <a:spcPts val="990"/>
+              </a:spcAft>
+              <a:buClr>
+                <a:srgbClr val="0645AD"/>
+              </a:buClr>
+              <a:buFont typeface="Arial"/>
+              <a:buChar char="•"/>
+            </a:pPr>
+            <a:r>
+              <a:rPr sz="2200" b="0">
+                <a:solidFill>
+                  <a:srgbClr val="202122"/>
+                </a:solidFill>
+                <a:latin typeface="Calibri"/>
+              </a:rPr>
+              <a:t>Check the middle; discard the half that cannot contain the target</a:t>
+            </a:r>
+          </a:p>
+          <a:p>
+            <a:pPr marL="274320" indent="-274320">
+              <a:spcAft>
+                <a:spcPts val="990"/>
+              </a:spcAft>
+              <a:buClr>
+                <a:srgbClr val="0645AD"/>
+              </a:buClr>
+              <a:buFont typeface="Arial"/>
+              <a:buChar char="•"/>
+            </a:pPr>
+            <a:r>
+              <a:rPr sz="2200" b="0">
+                <a:solidFill>
+                  <a:srgbClr val="202122"/>
+                </a:solidFill>
+                <a:latin typeface="Calibri"/>
+              </a:rPr>
+              <a:t>Repeat until found or nothing is left</a:t>
+            </a:r>
+          </a:p>
+          <a:p>
+            <a:pPr marL="274320" indent="-274320">
+              <a:spcAft>
+                <a:spcPts val="990"/>
+              </a:spcAft>
+              <a:buClr>
+                <a:srgbClr val="0645AD"/>
+              </a:buClr>
+              <a:buFont typeface="Arial"/>
+              <a:buChar char="•"/>
+            </a:pPr>
+            <a:r>
+              <a:rPr sz="2200" b="0">
+                <a:solidFill>
+                  <a:srgbClr val="202122"/>
+                </a:solidFill>
+                <a:latin typeface="Calibri"/>
+              </a:rPr>
+              <a:t>Very fast on large lists</a:t>
+            </a:r>
+          </a:p>
+        </p:txBody>
+      </p:sp>
+    </p:spTree>
+  </p:cSld>
+  <p:clrMapOvr>
+    <a:masterClrMapping/>
+  </p:clrMapOvr>
+</p:sld>
+</file>
+
+<file path=ppt/slides/slide5.xml><?xml version="1.0" encoding="utf-8"?>
+<p:sld xmlns:a="http://schemas.openxmlformats.org/drawingml/2006/main" xmlns:p="http://schemas.openxmlformats.org/presentationml/2006/main" xmlns:r="http://schemas.openxmlformats.org/officeDocument/2006/relationships">
+  <p:cSld>
+    <p:bg>
+      <p:bgPr>
+        <a:solidFill>
+          <a:srgbClr val="FFFFFF"/>
+        </a:solidFill>
+        <a:effectLst/>
+      </p:bgPr>
+    </p:bg>
+    <p:spTree>
+      <p:nvGrpSpPr>
+        <p:cNvPr id="1" name=""/>
+        <p:cNvGrpSpPr/>
+        <p:nvPr/>
+      </p:nvGrpSpPr>
+      <p:grpSpPr/>
+      <p:sp>
+        <p:nvSpPr>
+          <p:cNvPr id="2" name="TextBox 1"/>
+          <p:cNvSpPr txBox="1"/>
+          <p:nvPr/>
+        </p:nvSpPr>
+        <p:spPr>
+          <a:xfrm>
+            <a:off x="548640" y="320040"/>
+            <a:ext cx="11094415" cy="274320"/>
+          </a:xfrm>
+          <a:prstGeom prst="rect">
+            <a:avLst/>
+          </a:prstGeom>
+          <a:noFill/>
+        </p:spPr>
+        <p:txBody>
+          <a:bodyPr wrap="square" anchor="t" lIns="0" rIns="0" tIns="0" bIns="0"/>
+          <a:lstStyle/>
+          <a:p>
+            <a:pPr algn="l"/>
+            <a:r>
+              <a:rPr sz="1100" b="1" i="0">
+                <a:solidFill>
+                  <a:srgbClr val="54595D"/>
+                </a:solidFill>
+                <a:latin typeface="Calibri"/>
+              </a:rPr>
+              <a:t>CORE COMPONENT  ·  Core Paper 1</a:t>
+            </a:r>
+          </a:p>
+        </p:txBody>
+      </p:sp>
+      <p:sp>
+        <p:nvSpPr>
+          <p:cNvPr id="3" name="TextBox 2"/>
+          <p:cNvSpPr txBox="1"/>
+          <p:nvPr/>
+        </p:nvSpPr>
+        <p:spPr>
+          <a:xfrm>
+            <a:off x="548640" y="566928"/>
+            <a:ext cx="11094415" cy="822960"/>
+          </a:xfrm>
+          <a:prstGeom prst="rect">
+            <a:avLst/>
+          </a:prstGeom>
+          <a:noFill/>
+        </p:spPr>
+        <p:txBody>
+          <a:bodyPr wrap="square" anchor="ctr" lIns="0" rIns="0" tIns="0" bIns="0"/>
+          <a:lstStyle/>
+          <a:p>
+            <a:pPr algn="l"/>
+            <a:r>
+              <a:rPr sz="3200" b="1" i="0">
+                <a:solidFill>
+                  <a:srgbClr val="03306E"/>
+                </a:solidFill>
+                <a:latin typeface="Cambria"/>
+              </a:rPr>
+              <a:t>Quick check: Searching</a:t>
+            </a:r>
+          </a:p>
+        </p:txBody>
+      </p:sp>
+      <p:sp>
+        <p:nvSpPr>
+          <p:cNvPr id="4" name="TextBox 3"/>
+          <p:cNvSpPr txBox="1"/>
+          <p:nvPr/>
+        </p:nvSpPr>
+        <p:spPr>
+          <a:xfrm>
+            <a:off x="548640" y="6446520"/>
+            <a:ext cx="8229600" cy="274320"/>
+          </a:xfrm>
+          <a:prstGeom prst="rect">
+            <a:avLst/>
+          </a:prstGeom>
+          <a:noFill/>
+        </p:spPr>
+        <p:txBody>
+          <a:bodyPr wrap="square" anchor="t" lIns="0" rIns="0" tIns="0" bIns="0"/>
+          <a:lstStyle/>
+          <a:p>
+            <a:pPr algn="l"/>
+            <a:r>
+              <a:rPr sz="1000" b="0" i="0">
+                <a:solidFill>
+                  <a:srgbClr val="54595D"/>
+                </a:solidFill>
+                <a:latin typeface="Calibri"/>
+              </a:rPr>
+              <a:t>Digital Software Development T Level  ·  Searching and Sorting Algorithms</a:t>
+            </a:r>
+          </a:p>
+        </p:txBody>
+      </p:sp>
+      <p:sp>
+        <p:nvSpPr>
+          <p:cNvPr id="5" name="TextBox 4"/>
+          <p:cNvSpPr txBox="1"/>
+          <p:nvPr/>
+        </p:nvSpPr>
+        <p:spPr>
+          <a:xfrm>
+            <a:off x="10728655" y="6446520"/>
+            <a:ext cx="914400" cy="274320"/>
+          </a:xfrm>
+          <a:prstGeom prst="rect">
+            <a:avLst/>
+          </a:prstGeom>
+          <a:noFill/>
+        </p:spPr>
+        <p:txBody>
+          <a:bodyPr wrap="square" anchor="t" lIns="0" rIns="0" tIns="0" bIns="0"/>
+          <a:lstStyle/>
+          <a:p>
+            <a:pPr algn="r"/>
+            <a:r>
+              <a:rPr sz="1000" b="0" i="0">
+                <a:solidFill>
+                  <a:srgbClr val="54595D"/>
+                </a:solidFill>
+                <a:latin typeface="Calibri"/>
+              </a:rPr>
+              <a:t>5</a:t>
+            </a:r>
+          </a:p>
+        </p:txBody>
+      </p:sp>
+      <p:sp>
+        <p:nvSpPr>
+          <p:cNvPr id="6" name="Oval 5"/>
+          <p:cNvSpPr/>
+          <p:nvPr/>
+        </p:nvSpPr>
+        <p:spPr>
+          <a:xfrm>
+            <a:off x="548640" y="1691640"/>
+            <a:ext cx="502920" cy="502920"/>
+          </a:xfrm>
+          <a:prstGeom prst="ellipse">
+            <a:avLst/>
+          </a:prstGeom>
+          <a:solidFill>
+            <a:srgbClr val="F2B705"/>
+          </a:solidFill>
+          <a:ln>
+            <a:noFill/>
+          </a:ln>
+          <a:effectLst/>
+        </p:spPr>
+        <p:style>
+          <a:lnRef idx="1">
+            <a:schemeClr val="accent1"/>
+          </a:lnRef>
+          <a:fillRef idx="3">
+            <a:schemeClr val="accent1"/>
+          </a:fillRef>
+          <a:effectRef idx="2">
+            <a:schemeClr val="accent1"/>
+          </a:effectRef>
+          <a:fontRef idx="minor">
+            <a:schemeClr val="lt1"/>
+          </a:fontRef>
+        </p:style>
+        <p:txBody>
+          <a:bodyPr rtlCol="0" anchor="ctr" lIns="0" rIns="0" tIns="0" bIns="0"/>
+          <a:lstStyle/>
+          <a:p>
+            <a:pPr algn="ctr"/>
+            <a:r>
+              <a:rPr sz="1600" b="1">
+                <a:solidFill>
+                  <a:srgbClr val="202122"/>
+                </a:solidFill>
+                <a:latin typeface="Calibri"/>
+              </a:rPr>
+              <a:t>1</a:t>
+            </a:r>
+          </a:p>
+        </p:txBody>
+      </p:sp>
+      <p:sp>
+        <p:nvSpPr>
+          <p:cNvPr id="7" name="TextBox 6"/>
+          <p:cNvSpPr txBox="1"/>
+          <p:nvPr/>
+        </p:nvSpPr>
+        <p:spPr>
+          <a:xfrm>
+            <a:off x="1371600" y="1645920"/>
+            <a:ext cx="10271455" cy="1188720"/>
+          </a:xfrm>
+          <a:prstGeom prst="rect">
+            <a:avLst/>
+          </a:prstGeom>
+          <a:noFill/>
+        </p:spPr>
+        <p:txBody>
+          <a:bodyPr wrap="square" anchor="t" lIns="0" rIns="0" tIns="0" bIns="0"/>
+          <a:lstStyle/>
+          <a:p>
+            <a:pPr algn="l"/>
+            <a:r>
+              <a:rPr sz="2400" b="0" i="0">
+                <a:solidFill>
+                  <a:srgbClr val="202122"/>
+                </a:solidFill>
+                <a:latin typeface="Calibri"/>
+              </a:rPr>
+              <a:t>What must be true before a binary search?</a:t>
+            </a:r>
+          </a:p>
+        </p:txBody>
+      </p:sp>
+      <p:sp>
+        <p:nvSpPr>
+          <p:cNvPr id="8" name="Oval 7"/>
+          <p:cNvSpPr/>
+          <p:nvPr/>
+        </p:nvSpPr>
+        <p:spPr>
+          <a:xfrm>
+            <a:off x="548640" y="3108960"/>
+            <a:ext cx="502920" cy="502920"/>
+          </a:xfrm>
+          <a:prstGeom prst="ellipse">
+            <a:avLst/>
+          </a:prstGeom>
+          <a:solidFill>
+            <a:srgbClr val="F2B705"/>
+          </a:solidFill>
+          <a:ln>
+            <a:noFill/>
+          </a:ln>
+          <a:effectLst/>
+        </p:spPr>
+        <p:style>
+          <a:lnRef idx="1">
+            <a:schemeClr val="accent1"/>
+          </a:lnRef>
+          <a:fillRef idx="3">
+            <a:schemeClr val="accent1"/>
+          </a:fillRef>
+          <a:effectRef idx="2">
+            <a:schemeClr val="accent1"/>
+          </a:effectRef>
+          <a:fontRef idx="minor">
+            <a:schemeClr val="lt1"/>
+          </a:fontRef>
+        </p:style>
+        <p:txBody>
+          <a:bodyPr rtlCol="0" anchor="ctr" lIns="0" rIns="0" tIns="0" bIns="0"/>
+          <a:lstStyle/>
+          <a:p>
+            <a:pPr algn="ctr"/>
+            <a:r>
+              <a:rPr sz="1600" b="1">
+                <a:solidFill>
+                  <a:srgbClr val="202122"/>
+                </a:solidFill>
+                <a:latin typeface="Calibri"/>
+              </a:rPr>
+              <a:t>2</a:t>
+            </a:r>
+          </a:p>
+        </p:txBody>
+      </p:sp>
+      <p:sp>
+        <p:nvSpPr>
+          <p:cNvPr id="9" name="TextBox 8"/>
+          <p:cNvSpPr txBox="1"/>
+          <p:nvPr/>
+        </p:nvSpPr>
+        <p:spPr>
+          <a:xfrm>
+            <a:off x="1371600" y="3063240"/>
+            <a:ext cx="10271455" cy="1188720"/>
+          </a:xfrm>
+          <a:prstGeom prst="rect">
+            <a:avLst/>
+          </a:prstGeom>
+          <a:noFill/>
+        </p:spPr>
+        <p:txBody>
+          <a:bodyPr wrap="square" anchor="t" lIns="0" rIns="0" tIns="0" bIns="0"/>
+          <a:lstStyle/>
+          <a:p>
+            <a:pPr algn="l"/>
+            <a:r>
+              <a:rPr sz="2400" b="0" i="0">
+                <a:solidFill>
+                  <a:srgbClr val="202122"/>
+                </a:solidFill>
+                <a:latin typeface="Calibri"/>
+              </a:rPr>
+              <a:t>What is the worst case for linear search?</a:t>
+            </a:r>
+          </a:p>
+        </p:txBody>
+      </p:sp>
+      <p:sp>
+        <p:nvSpPr>
+          <p:cNvPr id="10" name="Oval 9"/>
+          <p:cNvSpPr/>
+          <p:nvPr/>
+        </p:nvSpPr>
+        <p:spPr>
+          <a:xfrm>
+            <a:off x="548640" y="4526280"/>
+            <a:ext cx="502920" cy="502920"/>
+          </a:xfrm>
+          <a:prstGeom prst="ellipse">
+            <a:avLst/>
+          </a:prstGeom>
+          <a:solidFill>
+            <a:srgbClr val="F2B705"/>
+          </a:solidFill>
+          <a:ln>
+            <a:noFill/>
+          </a:ln>
+          <a:effectLst/>
+        </p:spPr>
+        <p:style>
+          <a:lnRef idx="1">
+            <a:schemeClr val="accent1"/>
+          </a:lnRef>
+          <a:fillRef idx="3">
+            <a:schemeClr val="accent1"/>
+          </a:fillRef>
+          <a:effectRef idx="2">
+            <a:schemeClr val="accent1"/>
+          </a:effectRef>
+          <a:fontRef idx="minor">
+            <a:schemeClr val="lt1"/>
+          </a:fontRef>
+        </p:style>
+        <p:txBody>
+          <a:bodyPr rtlCol="0" anchor="ctr" lIns="0" rIns="0" tIns="0" bIns="0"/>
+          <a:lstStyle/>
+          <a:p>
+            <a:pPr algn="ctr"/>
+            <a:r>
+              <a:rPr sz="1600" b="1">
+                <a:solidFill>
+                  <a:srgbClr val="202122"/>
+                </a:solidFill>
+                <a:latin typeface="Calibri"/>
+              </a:rPr>
+              <a:t>3</a:t>
+            </a:r>
+          </a:p>
+        </p:txBody>
+      </p:sp>
+      <p:sp>
+        <p:nvSpPr>
+          <p:cNvPr id="11" name="TextBox 10"/>
+          <p:cNvSpPr txBox="1"/>
+          <p:nvPr/>
+        </p:nvSpPr>
+        <p:spPr>
+          <a:xfrm>
+            <a:off x="1371600" y="4480560"/>
+            <a:ext cx="10271455" cy="1188720"/>
+          </a:xfrm>
+          <a:prstGeom prst="rect">
+            <a:avLst/>
+          </a:prstGeom>
+          <a:noFill/>
+        </p:spPr>
+        <p:txBody>
+          <a:bodyPr wrap="square" anchor="t" lIns="0" rIns="0" tIns="0" bIns="0"/>
+          <a:lstStyle/>
+          <a:p>
+            <a:pPr algn="l"/>
+            <a:r>
+              <a:rPr sz="2400" b="0" i="0">
+                <a:solidFill>
+                  <a:srgbClr val="202122"/>
+                </a:solidFill>
+                <a:latin typeface="Calibri"/>
+              </a:rPr>
+              <a:t>How much does each binary search step remove?</a:t>
+            </a:r>
+          </a:p>
+        </p:txBody>
+      </p:sp>
+      <p:sp>
+        <p:nvSpPr>
+          <p:cNvPr id="12" name="TextBox 11"/>
+          <p:cNvSpPr txBox="1"/>
+          <p:nvPr/>
+        </p:nvSpPr>
+        <p:spPr>
+          <a:xfrm>
+            <a:off x="548640" y="5852160"/>
+            <a:ext cx="11094415" cy="365760"/>
+          </a:xfrm>
+          <a:prstGeom prst="rect">
+            <a:avLst/>
+          </a:prstGeom>
+          <a:noFill/>
+        </p:spPr>
+        <p:txBody>
+          <a:bodyPr wrap="square" anchor="t" lIns="0" rIns="0" tIns="0" bIns="0"/>
+          <a:lstStyle/>
+          <a:p>
+            <a:pPr algn="l"/>
+            <a:r>
+              <a:rPr sz="1300" b="0" i="1">
+                <a:solidFill>
+                  <a:srgbClr val="54595D"/>
+                </a:solidFill>
+                <a:latin typeface="Calibri"/>
+              </a:rPr>
+              <a:t>Answer on mini whiteboards or in your book. Answers are in the speaker notes.</a:t>
+            </a:r>
+          </a:p>
+        </p:txBody>
+      </p:sp>
+    </p:spTree>
+  </p:cSld>
+  <p:clrMapOvr>
+    <a:masterClrMapping/>
+  </p:clrMapOvr>
+</p:sld>
+</file>
+
+<file path=ppt/slides/slide6.xml><?xml version="1.0" encoding="utf-8"?>
+<p:sld xmlns:a="http://schemas.openxmlformats.org/drawingml/2006/main" xmlns:p="http://schemas.openxmlformats.org/presentationml/2006/main" xmlns:r="http://schemas.openxmlformats.org/officeDocument/2006/relationships">
+  <p:cSld>
+    <p:bg>
+      <p:bgPr>
+        <a:solidFill>
+          <a:srgbClr val="FFFFFF"/>
+        </a:solidFill>
+        <a:effectLst/>
+      </p:bgPr>
+    </p:bg>
+    <p:spTree>
+      <p:nvGrpSpPr>
+        <p:cNvPr id="1" name=""/>
+        <p:cNvGrpSpPr/>
+        <p:nvPr/>
+      </p:nvGrpSpPr>
+      <p:grpSpPr/>
+      <p:sp>
+        <p:nvSpPr>
+          <p:cNvPr id="2" name="TextBox 1"/>
+          <p:cNvSpPr txBox="1"/>
+          <p:nvPr/>
+        </p:nvSpPr>
+        <p:spPr>
+          <a:xfrm>
+            <a:off x="548640" y="320040"/>
+            <a:ext cx="11094415" cy="274320"/>
+          </a:xfrm>
+          <a:prstGeom prst="rect">
+            <a:avLst/>
+          </a:prstGeom>
+          <a:noFill/>
+        </p:spPr>
+        <p:txBody>
+          <a:bodyPr wrap="square" anchor="t" lIns="0" rIns="0" tIns="0" bIns="0"/>
+          <a:lstStyle/>
+          <a:p>
+            <a:pPr algn="l"/>
+            <a:r>
+              <a:rPr sz="1100" b="1" i="0">
+                <a:solidFill>
+                  <a:srgbClr val="54595D"/>
+                </a:solidFill>
+                <a:latin typeface="Calibri"/>
+              </a:rPr>
+              <a:t>CORE COMPONENT  ·  Core Paper 1</a:t>
+            </a:r>
+          </a:p>
+        </p:txBody>
+      </p:sp>
+      <p:sp>
+        <p:nvSpPr>
+          <p:cNvPr id="3" name="TextBox 2"/>
+          <p:cNvSpPr txBox="1"/>
+          <p:nvPr/>
+        </p:nvSpPr>
+        <p:spPr>
+          <a:xfrm>
+            <a:off x="548640" y="566928"/>
+            <a:ext cx="11094415" cy="822960"/>
+          </a:xfrm>
+          <a:prstGeom prst="rect">
+            <a:avLst/>
+          </a:prstGeom>
+          <a:noFill/>
+        </p:spPr>
+        <p:txBody>
+          <a:bodyPr wrap="square" anchor="ctr" lIns="0" rIns="0" tIns="0" bIns="0"/>
+          <a:lstStyle/>
+          <a:p>
+            <a:pPr algn="l"/>
+            <a:r>
+              <a:rPr sz="3200" b="1" i="0">
+                <a:solidFill>
+                  <a:srgbClr val="03306E"/>
+                </a:solidFill>
+                <a:latin typeface="Cambria"/>
+              </a:rPr>
+              <a:t>Sorting algorithms</a:t>
+            </a:r>
+          </a:p>
+        </p:txBody>
+      </p:sp>
+      <p:sp>
+        <p:nvSpPr>
+          <p:cNvPr id="4" name="TextBox 3"/>
+          <p:cNvSpPr txBox="1"/>
+          <p:nvPr/>
+        </p:nvSpPr>
+        <p:spPr>
+          <a:xfrm>
+            <a:off x="548640" y="6446520"/>
+            <a:ext cx="8229600" cy="274320"/>
+          </a:xfrm>
+          <a:prstGeom prst="rect">
+            <a:avLst/>
+          </a:prstGeom>
+          <a:noFill/>
+        </p:spPr>
+        <p:txBody>
+          <a:bodyPr wrap="square" anchor="t" lIns="0" rIns="0" tIns="0" bIns="0"/>
+          <a:lstStyle/>
+          <a:p>
+            <a:pPr algn="l"/>
+            <a:r>
+              <a:rPr sz="1000" b="0" i="0">
+                <a:solidFill>
+                  <a:srgbClr val="54595D"/>
+                </a:solidFill>
+                <a:latin typeface="Calibri"/>
+              </a:rPr>
+              <a:t>Digital Software Development T Level  ·  Searching and Sorting Algorithms</a:t>
+            </a:r>
+          </a:p>
+        </p:txBody>
+      </p:sp>
+      <p:sp>
+        <p:nvSpPr>
+          <p:cNvPr id="5" name="TextBox 4"/>
+          <p:cNvSpPr txBox="1"/>
+          <p:nvPr/>
+        </p:nvSpPr>
+        <p:spPr>
+          <a:xfrm>
+            <a:off x="10728655" y="6446520"/>
+            <a:ext cx="914400" cy="274320"/>
+          </a:xfrm>
+          <a:prstGeom prst="rect">
+            <a:avLst/>
+          </a:prstGeom>
+          <a:noFill/>
+        </p:spPr>
+        <p:txBody>
+          <a:bodyPr wrap="square" anchor="t" lIns="0" rIns="0" tIns="0" bIns="0"/>
+          <a:lstStyle/>
+          <a:p>
+            <a:pPr algn="r"/>
+            <a:r>
+              <a:rPr sz="1000" b="0" i="0">
+                <a:solidFill>
+                  <a:srgbClr val="54595D"/>
+                </a:solidFill>
+                <a:latin typeface="Calibri"/>
+              </a:rPr>
+              <a:t>6</a:t>
+            </a:r>
+          </a:p>
+        </p:txBody>
+      </p:sp>
+      <p:sp>
+        <p:nvSpPr>
+          <p:cNvPr id="6" name="TextBox 5"/>
+          <p:cNvSpPr txBox="1"/>
+          <p:nvPr/>
+        </p:nvSpPr>
+        <p:spPr>
+          <a:xfrm>
+            <a:off x="548640" y="1554480"/>
+            <a:ext cx="6720840" cy="4617720"/>
+          </a:xfrm>
+          <a:prstGeom prst="rect">
+            <a:avLst/>
+          </a:prstGeom>
+          <a:noFill/>
+        </p:spPr>
+        <p:txBody>
+          <a:bodyPr wrap="square" lIns="0" rIns="0" tIns="0" bIns="0">
+            <a:spAutoFit/>
+          </a:bodyPr>
+          <a:lstStyle/>
+          <a:p>
+            <a:pPr>
+              <a:spcAft>
+                <a:spcPts val="1320"/>
+              </a:spcAft>
+            </a:pPr>
+            <a:r>
+              <a:rPr sz="2200" b="0">
+                <a:solidFill>
+                  <a:srgbClr val="202122"/>
+                </a:solidFill>
+                <a:latin typeface="Calibri"/>
+              </a:rPr>
+              <a:t>Bubble sort compares neighbouring items and swaps them if they're in the wrong order, making passes until a pass makes no swaps. Simple, but slow on big lists.</a:t>
+            </a:r>
+          </a:p>
+          <a:p>
+            <a:pPr>
+              <a:spcAft>
+                <a:spcPts val="1320"/>
+              </a:spcAft>
+            </a:pPr>
+            <a:r>
+              <a:rPr sz="2200" b="0">
+                <a:solidFill>
+                  <a:srgbClr val="202122"/>
+                </a:solidFill>
+                <a:latin typeface="Calibri"/>
+              </a:rPr>
+              <a:t>Insertion sort takes each item in turn and inserts it into the correct place in the sorted part of the list. It's efficient for small or nearly sorted lists.</a:t>
+            </a:r>
+          </a:p>
+          <a:p>
+            <a:pPr>
+              <a:spcAft>
+                <a:spcPts val="1320"/>
+              </a:spcAft>
+            </a:pPr>
+            <a:r>
+              <a:rPr sz="2200" b="0">
+                <a:solidFill>
+                  <a:srgbClr val="202122"/>
+                </a:solidFill>
+                <a:latin typeface="Calibri"/>
+              </a:rPr>
+              <a:t>Merge sort splits the list into single items, then merges pairs back together in order until one sorted list remains. It's fast on large lists but needs extra memory for the merging.</a:t>
+            </a:r>
+          </a:p>
+        </p:txBody>
+      </p:sp>
+      <p:sp>
+        <p:nvSpPr>
+          <p:cNvPr id="7" name="Rounded Rectangle 6"/>
+          <p:cNvSpPr/>
+          <p:nvPr/>
+        </p:nvSpPr>
+        <p:spPr>
+          <a:xfrm>
+            <a:off x="7772400" y="1554480"/>
+            <a:ext cx="3867912" cy="4526280"/>
+          </a:xfrm>
+          <a:prstGeom prst="roundRect">
+            <a:avLst>
+              <a:gd name="adj" fmla="val 8000"/>
+            </a:avLst>
+          </a:prstGeom>
+          <a:solidFill>
+            <a:srgbClr val="03306E"/>
+          </a:solidFill>
+          <a:ln>
+            <a:noFill/>
+          </a:ln>
+          <a:effectLst/>
+        </p:spPr>
+        <p:style>
+          <a:lnRef idx="1">
+            <a:schemeClr val="accent1"/>
+          </a:lnRef>
+          <a:fillRef idx="3">
+            <a:schemeClr val="accent1"/>
+          </a:fillRef>
+          <a:effectRef idx="2">
+            <a:schemeClr val="accent1"/>
+          </a:effectRef>
+          <a:fontRef idx="minor">
+            <a:schemeClr val="lt1"/>
+          </a:fontRef>
+        </p:style>
+        <p:txBody>
+          <a:bodyPr rtlCol="0" anchor="ctr"/>
+          <a:lstStyle/>
+          <a:p/>
+        </p:txBody>
+      </p:sp>
+      <p:sp>
+        <p:nvSpPr>
+          <p:cNvPr id="8" name="Oval 7"/>
+          <p:cNvSpPr/>
+          <p:nvPr/>
+        </p:nvSpPr>
+        <p:spPr>
+          <a:xfrm>
+            <a:off x="8046720" y="1828800"/>
+            <a:ext cx="548640" cy="548640"/>
+          </a:xfrm>
+          <a:prstGeom prst="ellipse">
+            <a:avLst/>
+          </a:prstGeom>
+          <a:solidFill>
+            <a:srgbClr val="F2B705"/>
+          </a:solidFill>
+          <a:ln>
+            <a:noFill/>
+          </a:ln>
+          <a:effectLst/>
+        </p:spPr>
+        <p:style>
+          <a:lnRef idx="1">
+            <a:schemeClr val="accent1"/>
+          </a:lnRef>
+          <a:fillRef idx="3">
+            <a:schemeClr val="accent1"/>
+          </a:fillRef>
+          <a:effectRef idx="2">
+            <a:schemeClr val="accent1"/>
+          </a:effectRef>
+          <a:fontRef idx="minor">
+            <a:schemeClr val="lt1"/>
+          </a:fontRef>
+        </p:style>
+        <p:txBody>
+          <a:bodyPr rtlCol="0" anchor="ctr" lIns="0" rIns="0" tIns="0" bIns="0"/>
+          <a:lstStyle/>
+          <a:p>
+            <a:pPr algn="ctr"/>
+            <a:r>
+              <a:rPr sz="1300" b="1">
+                <a:solidFill>
+                  <a:srgbClr val="202122"/>
+                </a:solidFill>
+                <a:latin typeface="Calibri"/>
+              </a:rPr>
+              <a:t>e.g.</a:t>
+            </a:r>
+          </a:p>
+        </p:txBody>
+      </p:sp>
+      <p:sp>
+        <p:nvSpPr>
+          <p:cNvPr id="9" name="TextBox 8"/>
+          <p:cNvSpPr txBox="1"/>
+          <p:nvPr/>
+        </p:nvSpPr>
+        <p:spPr>
+          <a:xfrm>
+            <a:off x="8046720" y="2560320"/>
+            <a:ext cx="3291840" cy="365760"/>
+          </a:xfrm>
+          <a:prstGeom prst="rect">
+            <a:avLst/>
+          </a:prstGeom>
+          <a:noFill/>
+        </p:spPr>
+        <p:txBody>
+          <a:bodyPr wrap="square" anchor="t" lIns="0" rIns="0" tIns="0" bIns="0"/>
+          <a:lstStyle/>
+          <a:p>
+            <a:pPr algn="l"/>
+            <a:r>
+              <a:rPr sz="1300" b="1" i="0">
+                <a:solidFill>
+                  <a:srgbClr val="A9C8F0"/>
+                </a:solidFill>
+                <a:latin typeface="Calibri"/>
+              </a:rPr>
+              <a:t>EXAMPLE</a:t>
+            </a:r>
+          </a:p>
+        </p:txBody>
+      </p:sp>
+      <p:sp>
+        <p:nvSpPr>
+          <p:cNvPr id="10" name="TextBox 9"/>
+          <p:cNvSpPr txBox="1"/>
+          <p:nvPr/>
+        </p:nvSpPr>
+        <p:spPr>
+          <a:xfrm>
+            <a:off x="8046720" y="2971800"/>
+            <a:ext cx="3291840" cy="2971800"/>
+          </a:xfrm>
+          <a:prstGeom prst="rect">
+            <a:avLst/>
+          </a:prstGeom>
+          <a:noFill/>
+        </p:spPr>
+        <p:txBody>
+          <a:bodyPr wrap="square" anchor="t" lIns="0" rIns="0" tIns="0" bIns="0"/>
+          <a:lstStyle/>
+          <a:p>
+            <a:pPr algn="l"/>
+            <a:r>
+              <a:rPr sz="1900" b="0" i="0">
+                <a:solidFill>
+                  <a:srgbClr val="FFFFFF"/>
+                </a:solidFill>
+                <a:latin typeface="Cambria"/>
+              </a:rPr>
+              <a:t>Sorting [5, 2, 4]: bubble sort swaps 5 and 2 to give [2, 5, 4], then 5 and 4 to give [2, 4, 5]; the next pass makes no swaps, so it stops.</a:t>
+            </a:r>
+          </a:p>
+        </p:txBody>
+      </p:sp>
+    </p:spTree>
+  </p:cSld>
+  <p:clrMapOvr>
+    <a:masterClrMapping/>
+  </p:clrMapOvr>
+</p:sld>
+</file>
+
+<file path=ppt/slides/slide7.xml><?xml version="1.0" encoding="utf-8"?>
+<p:sld xmlns:a="http://schemas.openxmlformats.org/drawingml/2006/main" xmlns:p="http://schemas.openxmlformats.org/presentationml/2006/main" xmlns:r="http://schemas.openxmlformats.org/officeDocument/2006/relationships">
+  <p:cSld>
+    <p:bg>
+      <p:bgPr>
+        <a:solidFill>
+          <a:srgbClr val="FFFFFF"/>
+        </a:solidFill>
+        <a:effectLst/>
+      </p:bgPr>
+    </p:bg>
+    <p:spTree>
+      <p:nvGrpSpPr>
+        <p:cNvPr id="1" name=""/>
+        <p:cNvGrpSpPr/>
+        <p:nvPr/>
+      </p:nvGrpSpPr>
+      <p:grpSpPr/>
+      <p:sp>
+        <p:nvSpPr>
+          <p:cNvPr id="2" name="TextBox 1"/>
+          <p:cNvSpPr txBox="1"/>
+          <p:nvPr/>
+        </p:nvSpPr>
+        <p:spPr>
+          <a:xfrm>
+            <a:off x="548640" y="320040"/>
+            <a:ext cx="11094415" cy="274320"/>
+          </a:xfrm>
+          <a:prstGeom prst="rect">
+            <a:avLst/>
+          </a:prstGeom>
+          <a:noFill/>
+        </p:spPr>
+        <p:txBody>
+          <a:bodyPr wrap="square" anchor="t" lIns="0" rIns="0" tIns="0" bIns="0"/>
+          <a:lstStyle/>
+          <a:p>
+            <a:pPr algn="l"/>
+            <a:r>
+              <a:rPr sz="1100" b="1" i="0">
+                <a:solidFill>
+                  <a:srgbClr val="54595D"/>
+                </a:solidFill>
+                <a:latin typeface="Calibri"/>
+              </a:rPr>
+              <a:t>CORE COMPONENT  ·  Core Paper 1</a:t>
+            </a:r>
+          </a:p>
+        </p:txBody>
+      </p:sp>
+      <p:sp>
+        <p:nvSpPr>
+          <p:cNvPr id="3" name="TextBox 2"/>
+          <p:cNvSpPr txBox="1"/>
+          <p:nvPr/>
+        </p:nvSpPr>
+        <p:spPr>
+          <a:xfrm>
+            <a:off x="548640" y="566928"/>
+            <a:ext cx="11094415" cy="822960"/>
+          </a:xfrm>
+          <a:prstGeom prst="rect">
+            <a:avLst/>
+          </a:prstGeom>
+          <a:noFill/>
+        </p:spPr>
+        <p:txBody>
+          <a:bodyPr wrap="square" anchor="ctr" lIns="0" rIns="0" tIns="0" bIns="0"/>
+          <a:lstStyle/>
+          <a:p>
+            <a:pPr algn="l"/>
+            <a:r>
+              <a:rPr sz="3200" b="1" i="0">
+                <a:solidFill>
+                  <a:srgbClr val="03306E"/>
+                </a:solidFill>
+                <a:latin typeface="Cambria"/>
+              </a:rPr>
+              <a:t>Sorting algorithms</a:t>
+            </a:r>
+          </a:p>
+        </p:txBody>
+      </p:sp>
+      <p:sp>
+        <p:nvSpPr>
+          <p:cNvPr id="4" name="TextBox 3"/>
+          <p:cNvSpPr txBox="1"/>
+          <p:nvPr/>
+        </p:nvSpPr>
+        <p:spPr>
+          <a:xfrm>
+            <a:off x="548640" y="6446520"/>
+            <a:ext cx="8229600" cy="274320"/>
+          </a:xfrm>
+          <a:prstGeom prst="rect">
+            <a:avLst/>
+          </a:prstGeom>
+          <a:noFill/>
+        </p:spPr>
+        <p:txBody>
+          <a:bodyPr wrap="square" anchor="t" lIns="0" rIns="0" tIns="0" bIns="0"/>
+          <a:lstStyle/>
+          <a:p>
+            <a:pPr algn="l"/>
+            <a:r>
+              <a:rPr sz="1000" b="0" i="0">
+                <a:solidFill>
+                  <a:srgbClr val="54595D"/>
+                </a:solidFill>
+                <a:latin typeface="Calibri"/>
+              </a:rPr>
+              <a:t>Digital Software Development T Level  ·  Searching and Sorting Algorithms</a:t>
+            </a:r>
+          </a:p>
+        </p:txBody>
+      </p:sp>
+      <p:sp>
+        <p:nvSpPr>
+          <p:cNvPr id="5" name="TextBox 4"/>
+          <p:cNvSpPr txBox="1"/>
+          <p:nvPr/>
+        </p:nvSpPr>
+        <p:spPr>
+          <a:xfrm>
+            <a:off x="10728655" y="6446520"/>
+            <a:ext cx="914400" cy="274320"/>
+          </a:xfrm>
+          <a:prstGeom prst="rect">
+            <a:avLst/>
+          </a:prstGeom>
+          <a:noFill/>
+        </p:spPr>
+        <p:txBody>
+          <a:bodyPr wrap="square" anchor="t" lIns="0" rIns="0" tIns="0" bIns="0"/>
+          <a:lstStyle/>
+          <a:p>
+            <a:pPr algn="r"/>
+            <a:r>
+              <a:rPr sz="1000" b="0" i="0">
+                <a:solidFill>
+                  <a:srgbClr val="54595D"/>
+                </a:solidFill>
+                <a:latin typeface="Calibri"/>
+              </a:rPr>
+              <a:t>7</a:t>
             </a:r>
           </a:p>
         </p:txBody>
@@ -5770,2047 +11039,6 @@
 </p:sld>
 </file>
 
-<file path=ppt/slides/slide5.xml><?xml version="1.0" encoding="utf-8"?>
-<p:sld xmlns:a="http://schemas.openxmlformats.org/drawingml/2006/main" xmlns:p="http://schemas.openxmlformats.org/presentationml/2006/main" xmlns:r="http://schemas.openxmlformats.org/officeDocument/2006/relationships">
-  <p:cSld>
-    <p:bg>
-      <p:bgPr>
-        <a:solidFill>
-          <a:srgbClr val="FFFFFF"/>
-        </a:solidFill>
-        <a:effectLst/>
-      </p:bgPr>
-    </p:bg>
-    <p:spTree>
-      <p:nvGrpSpPr>
-        <p:cNvPr id="1" name=""/>
-        <p:cNvGrpSpPr/>
-        <p:nvPr/>
-      </p:nvGrpSpPr>
-      <p:grpSpPr/>
-      <p:sp>
-        <p:nvSpPr>
-          <p:cNvPr id="2" name="TextBox 1"/>
-          <p:cNvSpPr txBox="1"/>
-          <p:nvPr/>
-        </p:nvSpPr>
-        <p:spPr>
-          <a:xfrm>
-            <a:off x="548640" y="320040"/>
-            <a:ext cx="11094415" cy="274320"/>
-          </a:xfrm>
-          <a:prstGeom prst="rect">
-            <a:avLst/>
-          </a:prstGeom>
-          <a:noFill/>
-        </p:spPr>
-        <p:txBody>
-          <a:bodyPr wrap="square" anchor="t" lIns="0" rIns="0" tIns="0" bIns="0"/>
-          <a:lstStyle/>
-          <a:p>
-            <a:pPr algn="l"/>
-            <a:r>
-              <a:rPr sz="1100" b="1" i="0">
-                <a:solidFill>
-                  <a:srgbClr val="54595D"/>
-                </a:solidFill>
-                <a:latin typeface="Calibri"/>
-              </a:rPr>
-              <a:t>CORE COMPONENT  ·  Core Paper 1</a:t>
-            </a:r>
-          </a:p>
-        </p:txBody>
-      </p:sp>
-      <p:sp>
-        <p:nvSpPr>
-          <p:cNvPr id="3" name="TextBox 2"/>
-          <p:cNvSpPr txBox="1"/>
-          <p:nvPr/>
-        </p:nvSpPr>
-        <p:spPr>
-          <a:xfrm>
-            <a:off x="548640" y="566928"/>
-            <a:ext cx="11094415" cy="822960"/>
-          </a:xfrm>
-          <a:prstGeom prst="rect">
-            <a:avLst/>
-          </a:prstGeom>
-          <a:noFill/>
-        </p:spPr>
-        <p:txBody>
-          <a:bodyPr wrap="square" anchor="ctr" lIns="0" rIns="0" tIns="0" bIns="0"/>
-          <a:lstStyle/>
-          <a:p>
-            <a:pPr algn="l"/>
-            <a:r>
-              <a:rPr sz="3200" b="1" i="0">
-                <a:solidFill>
-                  <a:srgbClr val="03306E"/>
-                </a:solidFill>
-                <a:latin typeface="Cambria"/>
-              </a:rPr>
-              <a:t>Comparing algorithms</a:t>
-            </a:r>
-          </a:p>
-        </p:txBody>
-      </p:sp>
-      <p:sp>
-        <p:nvSpPr>
-          <p:cNvPr id="4" name="TextBox 3"/>
-          <p:cNvSpPr txBox="1"/>
-          <p:nvPr/>
-        </p:nvSpPr>
-        <p:spPr>
-          <a:xfrm>
-            <a:off x="548640" y="6446520"/>
-            <a:ext cx="8229600" cy="274320"/>
-          </a:xfrm>
-          <a:prstGeom prst="rect">
-            <a:avLst/>
-          </a:prstGeom>
-          <a:noFill/>
-        </p:spPr>
-        <p:txBody>
-          <a:bodyPr wrap="square" anchor="t" lIns="0" rIns="0" tIns="0" bIns="0"/>
-          <a:lstStyle/>
-          <a:p>
-            <a:pPr algn="l"/>
-            <a:r>
-              <a:rPr sz="1000" b="0" i="0">
-                <a:solidFill>
-                  <a:srgbClr val="54595D"/>
-                </a:solidFill>
-                <a:latin typeface="Calibri"/>
-              </a:rPr>
-              <a:t>Digital Software Development T Level  ·  Searching and Sorting Algorithms</a:t>
-            </a:r>
-          </a:p>
-        </p:txBody>
-      </p:sp>
-      <p:sp>
-        <p:nvSpPr>
-          <p:cNvPr id="5" name="TextBox 4"/>
-          <p:cNvSpPr txBox="1"/>
-          <p:nvPr/>
-        </p:nvSpPr>
-        <p:spPr>
-          <a:xfrm>
-            <a:off x="10728655" y="6446520"/>
-            <a:ext cx="914400" cy="274320"/>
-          </a:xfrm>
-          <a:prstGeom prst="rect">
-            <a:avLst/>
-          </a:prstGeom>
-          <a:noFill/>
-        </p:spPr>
-        <p:txBody>
-          <a:bodyPr wrap="square" anchor="t" lIns="0" rIns="0" tIns="0" bIns="0"/>
-          <a:lstStyle/>
-          <a:p>
-            <a:pPr algn="r"/>
-            <a:r>
-              <a:rPr sz="1000" b="0" i="0">
-                <a:solidFill>
-                  <a:srgbClr val="54595D"/>
-                </a:solidFill>
-                <a:latin typeface="Calibri"/>
-              </a:rPr>
-              <a:t>5</a:t>
-            </a:r>
-          </a:p>
-        </p:txBody>
-      </p:sp>
-      <p:sp>
-        <p:nvSpPr>
-          <p:cNvPr id="6" name="Rounded Rectangle 5"/>
-          <p:cNvSpPr/>
-          <p:nvPr/>
-        </p:nvSpPr>
-        <p:spPr>
-          <a:xfrm>
-            <a:off x="548640" y="1600200"/>
-            <a:ext cx="5410047" cy="2148840"/>
-          </a:xfrm>
-          <a:prstGeom prst="roundRect">
-            <a:avLst>
-              <a:gd name="adj" fmla="val 6000"/>
-            </a:avLst>
-          </a:prstGeom>
-          <a:solidFill>
-            <a:srgbClr val="EAF3FF"/>
-          </a:solidFill>
-          <a:ln>
-            <a:noFill/>
-          </a:ln>
-          <a:effectLst/>
-        </p:spPr>
-        <p:style>
-          <a:lnRef idx="1">
-            <a:schemeClr val="accent1"/>
-          </a:lnRef>
-          <a:fillRef idx="3">
-            <a:schemeClr val="accent1"/>
-          </a:fillRef>
-          <a:effectRef idx="2">
-            <a:schemeClr val="accent1"/>
-          </a:effectRef>
-          <a:fontRef idx="minor">
-            <a:schemeClr val="lt1"/>
-          </a:fontRef>
-        </p:style>
-        <p:txBody>
-          <a:bodyPr rtlCol="0" anchor="ctr"/>
-          <a:lstStyle/>
-          <a:p/>
-        </p:txBody>
-      </p:sp>
-      <p:sp>
-        <p:nvSpPr>
-          <p:cNvPr id="7" name="Oval 6"/>
-          <p:cNvSpPr/>
-          <p:nvPr/>
-        </p:nvSpPr>
-        <p:spPr>
-          <a:xfrm>
-            <a:off x="777240" y="1828800"/>
-            <a:ext cx="457200" cy="457200"/>
-          </a:xfrm>
-          <a:prstGeom prst="ellipse">
-            <a:avLst/>
-          </a:prstGeom>
-          <a:solidFill>
-            <a:srgbClr val="F2B705"/>
-          </a:solidFill>
-          <a:ln>
-            <a:noFill/>
-          </a:ln>
-          <a:effectLst/>
-        </p:spPr>
-        <p:style>
-          <a:lnRef idx="1">
-            <a:schemeClr val="accent1"/>
-          </a:lnRef>
-          <a:fillRef idx="3">
-            <a:schemeClr val="accent1"/>
-          </a:fillRef>
-          <a:effectRef idx="2">
-            <a:schemeClr val="accent1"/>
-          </a:effectRef>
-          <a:fontRef idx="minor">
-            <a:schemeClr val="lt1"/>
-          </a:fontRef>
-        </p:style>
-        <p:txBody>
-          <a:bodyPr rtlCol="0" anchor="ctr" lIns="0" rIns="0" tIns="0" bIns="0"/>
-          <a:lstStyle/>
-          <a:p>
-            <a:pPr algn="ctr"/>
-            <a:r>
-              <a:rPr sz="1500" b="1">
-                <a:solidFill>
-                  <a:srgbClr val="202122"/>
-                </a:solidFill>
-                <a:latin typeface="Calibri"/>
-              </a:rPr>
-              <a:t>1</a:t>
-            </a:r>
-          </a:p>
-        </p:txBody>
-      </p:sp>
-      <p:sp>
-        <p:nvSpPr>
-          <p:cNvPr id="8" name="TextBox 7"/>
-          <p:cNvSpPr txBox="1"/>
-          <p:nvPr/>
-        </p:nvSpPr>
-        <p:spPr>
-          <a:xfrm>
-            <a:off x="1371600" y="1801368"/>
-            <a:ext cx="4404207" cy="512064"/>
-          </a:xfrm>
-          <a:prstGeom prst="rect">
-            <a:avLst/>
-          </a:prstGeom>
-          <a:noFill/>
-        </p:spPr>
-        <p:txBody>
-          <a:bodyPr wrap="square" anchor="ctr" lIns="0" rIns="0" tIns="0" bIns="0"/>
-          <a:lstStyle/>
-          <a:p>
-            <a:pPr algn="l"/>
-            <a:r>
-              <a:rPr sz="1900" b="1" i="0">
-                <a:solidFill>
-                  <a:srgbClr val="03306E"/>
-                </a:solidFill>
-                <a:latin typeface="Calibri"/>
-              </a:rPr>
-              <a:t>Execution time</a:t>
-            </a:r>
-          </a:p>
-        </p:txBody>
-      </p:sp>
-      <p:sp>
-        <p:nvSpPr>
-          <p:cNvPr id="9" name="TextBox 8"/>
-          <p:cNvSpPr txBox="1"/>
-          <p:nvPr/>
-        </p:nvSpPr>
-        <p:spPr>
-          <a:xfrm>
-            <a:off x="777240" y="2468880"/>
-            <a:ext cx="4952847" cy="1143000"/>
-          </a:xfrm>
-          <a:prstGeom prst="rect">
-            <a:avLst/>
-          </a:prstGeom>
-          <a:noFill/>
-        </p:spPr>
-        <p:txBody>
-          <a:bodyPr wrap="square" anchor="t" lIns="0" rIns="0" tIns="0" bIns="0"/>
-          <a:lstStyle/>
-          <a:p>
-            <a:pPr algn="l"/>
-            <a:r>
-              <a:rPr sz="2000" b="0" i="0">
-                <a:solidFill>
-                  <a:srgbClr val="202122"/>
-                </a:solidFill>
-                <a:latin typeface="Calibri"/>
-              </a:rPr>
-              <a:t>How long it takes as the data grows.</a:t>
-            </a:r>
-          </a:p>
-        </p:txBody>
-      </p:sp>
-      <p:sp>
-        <p:nvSpPr>
-          <p:cNvPr id="10" name="Rounded Rectangle 9"/>
-          <p:cNvSpPr/>
-          <p:nvPr/>
-        </p:nvSpPr>
-        <p:spPr>
-          <a:xfrm>
-            <a:off x="6233007" y="1600200"/>
-            <a:ext cx="5410047" cy="2148840"/>
-          </a:xfrm>
-          <a:prstGeom prst="roundRect">
-            <a:avLst>
-              <a:gd name="adj" fmla="val 6000"/>
-            </a:avLst>
-          </a:prstGeom>
-          <a:solidFill>
-            <a:srgbClr val="EAF3FF"/>
-          </a:solidFill>
-          <a:ln>
-            <a:noFill/>
-          </a:ln>
-          <a:effectLst/>
-        </p:spPr>
-        <p:style>
-          <a:lnRef idx="1">
-            <a:schemeClr val="accent1"/>
-          </a:lnRef>
-          <a:fillRef idx="3">
-            <a:schemeClr val="accent1"/>
-          </a:fillRef>
-          <a:effectRef idx="2">
-            <a:schemeClr val="accent1"/>
-          </a:effectRef>
-          <a:fontRef idx="minor">
-            <a:schemeClr val="lt1"/>
-          </a:fontRef>
-        </p:style>
-        <p:txBody>
-          <a:bodyPr rtlCol="0" anchor="ctr"/>
-          <a:lstStyle/>
-          <a:p/>
-        </p:txBody>
-      </p:sp>
-      <p:sp>
-        <p:nvSpPr>
-          <p:cNvPr id="11" name="Oval 10"/>
-          <p:cNvSpPr/>
-          <p:nvPr/>
-        </p:nvSpPr>
-        <p:spPr>
-          <a:xfrm>
-            <a:off x="6461607" y="1828800"/>
-            <a:ext cx="457200" cy="457200"/>
-          </a:xfrm>
-          <a:prstGeom prst="ellipse">
-            <a:avLst/>
-          </a:prstGeom>
-          <a:solidFill>
-            <a:srgbClr val="F2B705"/>
-          </a:solidFill>
-          <a:ln>
-            <a:noFill/>
-          </a:ln>
-          <a:effectLst/>
-        </p:spPr>
-        <p:style>
-          <a:lnRef idx="1">
-            <a:schemeClr val="accent1"/>
-          </a:lnRef>
-          <a:fillRef idx="3">
-            <a:schemeClr val="accent1"/>
-          </a:fillRef>
-          <a:effectRef idx="2">
-            <a:schemeClr val="accent1"/>
-          </a:effectRef>
-          <a:fontRef idx="minor">
-            <a:schemeClr val="lt1"/>
-          </a:fontRef>
-        </p:style>
-        <p:txBody>
-          <a:bodyPr rtlCol="0" anchor="ctr" lIns="0" rIns="0" tIns="0" bIns="0"/>
-          <a:lstStyle/>
-          <a:p>
-            <a:pPr algn="ctr"/>
-            <a:r>
-              <a:rPr sz="1500" b="1">
-                <a:solidFill>
-                  <a:srgbClr val="202122"/>
-                </a:solidFill>
-                <a:latin typeface="Calibri"/>
-              </a:rPr>
-              <a:t>2</a:t>
-            </a:r>
-          </a:p>
-        </p:txBody>
-      </p:sp>
-      <p:sp>
-        <p:nvSpPr>
-          <p:cNvPr id="12" name="TextBox 11"/>
-          <p:cNvSpPr txBox="1"/>
-          <p:nvPr/>
-        </p:nvSpPr>
-        <p:spPr>
-          <a:xfrm>
-            <a:off x="7055967" y="1801368"/>
-            <a:ext cx="4404207" cy="512064"/>
-          </a:xfrm>
-          <a:prstGeom prst="rect">
-            <a:avLst/>
-          </a:prstGeom>
-          <a:noFill/>
-        </p:spPr>
-        <p:txBody>
-          <a:bodyPr wrap="square" anchor="ctr" lIns="0" rIns="0" tIns="0" bIns="0"/>
-          <a:lstStyle/>
-          <a:p>
-            <a:pPr algn="l"/>
-            <a:r>
-              <a:rPr sz="1900" b="1" i="0">
-                <a:solidFill>
-                  <a:srgbClr val="03306E"/>
-                </a:solidFill>
-                <a:latin typeface="Calibri"/>
-              </a:rPr>
-              <a:t>Memory use</a:t>
-            </a:r>
-          </a:p>
-        </p:txBody>
-      </p:sp>
-      <p:sp>
-        <p:nvSpPr>
-          <p:cNvPr id="13" name="TextBox 12"/>
-          <p:cNvSpPr txBox="1"/>
-          <p:nvPr/>
-        </p:nvSpPr>
-        <p:spPr>
-          <a:xfrm>
-            <a:off x="6461607" y="2468880"/>
-            <a:ext cx="4952847" cy="1143000"/>
-          </a:xfrm>
-          <a:prstGeom prst="rect">
-            <a:avLst/>
-          </a:prstGeom>
-          <a:noFill/>
-        </p:spPr>
-        <p:txBody>
-          <a:bodyPr wrap="square" anchor="t" lIns="0" rIns="0" tIns="0" bIns="0"/>
-          <a:lstStyle/>
-          <a:p>
-            <a:pPr algn="l"/>
-            <a:r>
-              <a:rPr sz="2000" b="0" i="0">
-                <a:solidFill>
-                  <a:srgbClr val="202122"/>
-                </a:solidFill>
-                <a:latin typeface="Calibri"/>
-              </a:rPr>
-              <a:t>Merge sort needs extra memory to merge; bubble and insertion sort in place.</a:t>
-            </a:r>
-          </a:p>
-        </p:txBody>
-      </p:sp>
-      <p:sp>
-        <p:nvSpPr>
-          <p:cNvPr id="14" name="Rounded Rectangle 13"/>
-          <p:cNvSpPr/>
-          <p:nvPr/>
-        </p:nvSpPr>
-        <p:spPr>
-          <a:xfrm>
-            <a:off x="548640" y="4023360"/>
-            <a:ext cx="5410047" cy="2148840"/>
-          </a:xfrm>
-          <a:prstGeom prst="roundRect">
-            <a:avLst>
-              <a:gd name="adj" fmla="val 6000"/>
-            </a:avLst>
-          </a:prstGeom>
-          <a:solidFill>
-            <a:srgbClr val="EAF3FF"/>
-          </a:solidFill>
-          <a:ln>
-            <a:noFill/>
-          </a:ln>
-          <a:effectLst/>
-        </p:spPr>
-        <p:style>
-          <a:lnRef idx="1">
-            <a:schemeClr val="accent1"/>
-          </a:lnRef>
-          <a:fillRef idx="3">
-            <a:schemeClr val="accent1"/>
-          </a:fillRef>
-          <a:effectRef idx="2">
-            <a:schemeClr val="accent1"/>
-          </a:effectRef>
-          <a:fontRef idx="minor">
-            <a:schemeClr val="lt1"/>
-          </a:fontRef>
-        </p:style>
-        <p:txBody>
-          <a:bodyPr rtlCol="0" anchor="ctr"/>
-          <a:lstStyle/>
-          <a:p/>
-        </p:txBody>
-      </p:sp>
-      <p:sp>
-        <p:nvSpPr>
-          <p:cNvPr id="15" name="Oval 14"/>
-          <p:cNvSpPr/>
-          <p:nvPr/>
-        </p:nvSpPr>
-        <p:spPr>
-          <a:xfrm>
-            <a:off x="777240" y="4251960"/>
-            <a:ext cx="457200" cy="457200"/>
-          </a:xfrm>
-          <a:prstGeom prst="ellipse">
-            <a:avLst/>
-          </a:prstGeom>
-          <a:solidFill>
-            <a:srgbClr val="F2B705"/>
-          </a:solidFill>
-          <a:ln>
-            <a:noFill/>
-          </a:ln>
-          <a:effectLst/>
-        </p:spPr>
-        <p:style>
-          <a:lnRef idx="1">
-            <a:schemeClr val="accent1"/>
-          </a:lnRef>
-          <a:fillRef idx="3">
-            <a:schemeClr val="accent1"/>
-          </a:fillRef>
-          <a:effectRef idx="2">
-            <a:schemeClr val="accent1"/>
-          </a:effectRef>
-          <a:fontRef idx="minor">
-            <a:schemeClr val="lt1"/>
-          </a:fontRef>
-        </p:style>
-        <p:txBody>
-          <a:bodyPr rtlCol="0" anchor="ctr" lIns="0" rIns="0" tIns="0" bIns="0"/>
-          <a:lstStyle/>
-          <a:p>
-            <a:pPr algn="ctr"/>
-            <a:r>
-              <a:rPr sz="1500" b="1">
-                <a:solidFill>
-                  <a:srgbClr val="202122"/>
-                </a:solidFill>
-                <a:latin typeface="Calibri"/>
-              </a:rPr>
-              <a:t>3</a:t>
-            </a:r>
-          </a:p>
-        </p:txBody>
-      </p:sp>
-      <p:sp>
-        <p:nvSpPr>
-          <p:cNvPr id="16" name="TextBox 15"/>
-          <p:cNvSpPr txBox="1"/>
-          <p:nvPr/>
-        </p:nvSpPr>
-        <p:spPr>
-          <a:xfrm>
-            <a:off x="1371600" y="4224528"/>
-            <a:ext cx="4404207" cy="512064"/>
-          </a:xfrm>
-          <a:prstGeom prst="rect">
-            <a:avLst/>
-          </a:prstGeom>
-          <a:noFill/>
-        </p:spPr>
-        <p:txBody>
-          <a:bodyPr wrap="square" anchor="ctr" lIns="0" rIns="0" tIns="0" bIns="0"/>
-          <a:lstStyle/>
-          <a:p>
-            <a:pPr algn="l"/>
-            <a:r>
-              <a:rPr sz="1900" b="1" i="0">
-                <a:solidFill>
-                  <a:srgbClr val="03306E"/>
-                </a:solidFill>
-                <a:latin typeface="Calibri"/>
-              </a:rPr>
-              <a:t>Comparisons</a:t>
-            </a:r>
-          </a:p>
-        </p:txBody>
-      </p:sp>
-      <p:sp>
-        <p:nvSpPr>
-          <p:cNvPr id="17" name="TextBox 16"/>
-          <p:cNvSpPr txBox="1"/>
-          <p:nvPr/>
-        </p:nvSpPr>
-        <p:spPr>
-          <a:xfrm>
-            <a:off x="777240" y="4892040"/>
-            <a:ext cx="4952847" cy="1143000"/>
-          </a:xfrm>
-          <a:prstGeom prst="rect">
-            <a:avLst/>
-          </a:prstGeom>
-          <a:noFill/>
-        </p:spPr>
-        <p:txBody>
-          <a:bodyPr wrap="square" anchor="t" lIns="0" rIns="0" tIns="0" bIns="0"/>
-          <a:lstStyle/>
-          <a:p>
-            <a:pPr algn="l"/>
-            <a:r>
-              <a:rPr sz="2000" b="0" i="0">
-                <a:solidFill>
-                  <a:srgbClr val="202122"/>
-                </a:solidFill>
-                <a:latin typeface="Calibri"/>
-              </a:rPr>
-              <a:t>Count how many times items are compared.</a:t>
-            </a:r>
-          </a:p>
-        </p:txBody>
-      </p:sp>
-      <p:sp>
-        <p:nvSpPr>
-          <p:cNvPr id="18" name="Rounded Rectangle 17"/>
-          <p:cNvSpPr/>
-          <p:nvPr/>
-        </p:nvSpPr>
-        <p:spPr>
-          <a:xfrm>
-            <a:off x="6233007" y="4023360"/>
-            <a:ext cx="5410047" cy="2148840"/>
-          </a:xfrm>
-          <a:prstGeom prst="roundRect">
-            <a:avLst>
-              <a:gd name="adj" fmla="val 6000"/>
-            </a:avLst>
-          </a:prstGeom>
-          <a:solidFill>
-            <a:srgbClr val="EAF3FF"/>
-          </a:solidFill>
-          <a:ln>
-            <a:noFill/>
-          </a:ln>
-          <a:effectLst/>
-        </p:spPr>
-        <p:style>
-          <a:lnRef idx="1">
-            <a:schemeClr val="accent1"/>
-          </a:lnRef>
-          <a:fillRef idx="3">
-            <a:schemeClr val="accent1"/>
-          </a:fillRef>
-          <a:effectRef idx="2">
-            <a:schemeClr val="accent1"/>
-          </a:effectRef>
-          <a:fontRef idx="minor">
-            <a:schemeClr val="lt1"/>
-          </a:fontRef>
-        </p:style>
-        <p:txBody>
-          <a:bodyPr rtlCol="0" anchor="ctr"/>
-          <a:lstStyle/>
-          <a:p/>
-        </p:txBody>
-      </p:sp>
-      <p:sp>
-        <p:nvSpPr>
-          <p:cNvPr id="19" name="Oval 18"/>
-          <p:cNvSpPr/>
-          <p:nvPr/>
-        </p:nvSpPr>
-        <p:spPr>
-          <a:xfrm>
-            <a:off x="6461607" y="4251960"/>
-            <a:ext cx="457200" cy="457200"/>
-          </a:xfrm>
-          <a:prstGeom prst="ellipse">
-            <a:avLst/>
-          </a:prstGeom>
-          <a:solidFill>
-            <a:srgbClr val="F2B705"/>
-          </a:solidFill>
-          <a:ln>
-            <a:noFill/>
-          </a:ln>
-          <a:effectLst/>
-        </p:spPr>
-        <p:style>
-          <a:lnRef idx="1">
-            <a:schemeClr val="accent1"/>
-          </a:lnRef>
-          <a:fillRef idx="3">
-            <a:schemeClr val="accent1"/>
-          </a:fillRef>
-          <a:effectRef idx="2">
-            <a:schemeClr val="accent1"/>
-          </a:effectRef>
-          <a:fontRef idx="minor">
-            <a:schemeClr val="lt1"/>
-          </a:fontRef>
-        </p:style>
-        <p:txBody>
-          <a:bodyPr rtlCol="0" anchor="ctr" lIns="0" rIns="0" tIns="0" bIns="0"/>
-          <a:lstStyle/>
-          <a:p>
-            <a:pPr algn="ctr"/>
-            <a:r>
-              <a:rPr sz="1500" b="1">
-                <a:solidFill>
-                  <a:srgbClr val="202122"/>
-                </a:solidFill>
-                <a:latin typeface="Calibri"/>
-              </a:rPr>
-              <a:t>4</a:t>
-            </a:r>
-          </a:p>
-        </p:txBody>
-      </p:sp>
-      <p:sp>
-        <p:nvSpPr>
-          <p:cNvPr id="20" name="TextBox 19"/>
-          <p:cNvSpPr txBox="1"/>
-          <p:nvPr/>
-        </p:nvSpPr>
-        <p:spPr>
-          <a:xfrm>
-            <a:off x="7055967" y="4224528"/>
-            <a:ext cx="4404207" cy="512064"/>
-          </a:xfrm>
-          <a:prstGeom prst="rect">
-            <a:avLst/>
-          </a:prstGeom>
-          <a:noFill/>
-        </p:spPr>
-        <p:txBody>
-          <a:bodyPr wrap="square" anchor="ctr" lIns="0" rIns="0" tIns="0" bIns="0"/>
-          <a:lstStyle/>
-          <a:p>
-            <a:pPr algn="l"/>
-            <a:r>
-              <a:rPr sz="1900" b="1" i="0">
-                <a:solidFill>
-                  <a:srgbClr val="03306E"/>
-                </a:solidFill>
-                <a:latin typeface="Calibri"/>
-              </a:rPr>
-              <a:t>Best, worst, average</a:t>
-            </a:r>
-          </a:p>
-        </p:txBody>
-      </p:sp>
-      <p:sp>
-        <p:nvSpPr>
-          <p:cNvPr id="21" name="TextBox 20"/>
-          <p:cNvSpPr txBox="1"/>
-          <p:nvPr/>
-        </p:nvSpPr>
-        <p:spPr>
-          <a:xfrm>
-            <a:off x="6461607" y="4892040"/>
-            <a:ext cx="4952847" cy="1143000"/>
-          </a:xfrm>
-          <a:prstGeom prst="rect">
-            <a:avLst/>
-          </a:prstGeom>
-          <a:noFill/>
-        </p:spPr>
-        <p:txBody>
-          <a:bodyPr wrap="square" anchor="t" lIns="0" rIns="0" tIns="0" bIns="0"/>
-          <a:lstStyle/>
-          <a:p>
-            <a:pPr algn="l"/>
-            <a:r>
-              <a:rPr sz="2000" b="0" i="0">
-                <a:solidFill>
-                  <a:srgbClr val="202122"/>
-                </a:solidFill>
-                <a:latin typeface="Calibri"/>
-              </a:rPr>
-              <a:t>Bubble sort on sorted data can finish in one pass; reversed data is its worst case.</a:t>
-            </a:r>
-          </a:p>
-        </p:txBody>
-      </p:sp>
-    </p:spTree>
-  </p:cSld>
-  <p:clrMapOvr>
-    <a:masterClrMapping/>
-  </p:clrMapOvr>
-</p:sld>
-</file>
-
-<file path=ppt/slides/slide6.xml><?xml version="1.0" encoding="utf-8"?>
-<p:sld xmlns:a="http://schemas.openxmlformats.org/drawingml/2006/main" xmlns:p="http://schemas.openxmlformats.org/presentationml/2006/main" xmlns:r="http://schemas.openxmlformats.org/officeDocument/2006/relationships">
-  <p:cSld>
-    <p:bg>
-      <p:bgPr>
-        <a:solidFill>
-          <a:srgbClr val="FFFFFF"/>
-        </a:solidFill>
-        <a:effectLst/>
-      </p:bgPr>
-    </p:bg>
-    <p:spTree>
-      <p:nvGrpSpPr>
-        <p:cNvPr id="1" name=""/>
-        <p:cNvGrpSpPr/>
-        <p:nvPr/>
-      </p:nvGrpSpPr>
-      <p:grpSpPr/>
-      <p:sp>
-        <p:nvSpPr>
-          <p:cNvPr id="2" name="TextBox 1"/>
-          <p:cNvSpPr txBox="1"/>
-          <p:nvPr/>
-        </p:nvSpPr>
-        <p:spPr>
-          <a:xfrm>
-            <a:off x="548640" y="320040"/>
-            <a:ext cx="11094415" cy="274320"/>
-          </a:xfrm>
-          <a:prstGeom prst="rect">
-            <a:avLst/>
-          </a:prstGeom>
-          <a:noFill/>
-        </p:spPr>
-        <p:txBody>
-          <a:bodyPr wrap="square" anchor="t" lIns="0" rIns="0" tIns="0" bIns="0"/>
-          <a:lstStyle/>
-          <a:p>
-            <a:pPr algn="l"/>
-            <a:r>
-              <a:rPr sz="1100" b="1" i="0">
-                <a:solidFill>
-                  <a:srgbClr val="54595D"/>
-                </a:solidFill>
-                <a:latin typeface="Calibri"/>
-              </a:rPr>
-              <a:t>CORE COMPONENT  ·  Core Paper 1</a:t>
-            </a:r>
-          </a:p>
-        </p:txBody>
-      </p:sp>
-      <p:sp>
-        <p:nvSpPr>
-          <p:cNvPr id="3" name="TextBox 2"/>
-          <p:cNvSpPr txBox="1"/>
-          <p:nvPr/>
-        </p:nvSpPr>
-        <p:spPr>
-          <a:xfrm>
-            <a:off x="548640" y="566928"/>
-            <a:ext cx="11094415" cy="822960"/>
-          </a:xfrm>
-          <a:prstGeom prst="rect">
-            <a:avLst/>
-          </a:prstGeom>
-          <a:noFill/>
-        </p:spPr>
-        <p:txBody>
-          <a:bodyPr wrap="square" anchor="ctr" lIns="0" rIns="0" tIns="0" bIns="0"/>
-          <a:lstStyle/>
-          <a:p>
-            <a:pPr algn="l"/>
-            <a:r>
-              <a:rPr sz="3200" b="1" i="0">
-                <a:solidFill>
-                  <a:srgbClr val="03306E"/>
-                </a:solidFill>
-                <a:latin typeface="Cambria"/>
-              </a:rPr>
-              <a:t>Check your understanding</a:t>
-            </a:r>
-          </a:p>
-        </p:txBody>
-      </p:sp>
-      <p:sp>
-        <p:nvSpPr>
-          <p:cNvPr id="4" name="TextBox 3"/>
-          <p:cNvSpPr txBox="1"/>
-          <p:nvPr/>
-        </p:nvSpPr>
-        <p:spPr>
-          <a:xfrm>
-            <a:off x="548640" y="6446520"/>
-            <a:ext cx="8229600" cy="274320"/>
-          </a:xfrm>
-          <a:prstGeom prst="rect">
-            <a:avLst/>
-          </a:prstGeom>
-          <a:noFill/>
-        </p:spPr>
-        <p:txBody>
-          <a:bodyPr wrap="square" anchor="t" lIns="0" rIns="0" tIns="0" bIns="0"/>
-          <a:lstStyle/>
-          <a:p>
-            <a:pPr algn="l"/>
-            <a:r>
-              <a:rPr sz="1000" b="0" i="0">
-                <a:solidFill>
-                  <a:srgbClr val="54595D"/>
-                </a:solidFill>
-                <a:latin typeface="Calibri"/>
-              </a:rPr>
-              <a:t>Digital Software Development T Level  ·  Searching and Sorting Algorithms</a:t>
-            </a:r>
-          </a:p>
-        </p:txBody>
-      </p:sp>
-      <p:sp>
-        <p:nvSpPr>
-          <p:cNvPr id="5" name="TextBox 4"/>
-          <p:cNvSpPr txBox="1"/>
-          <p:nvPr/>
-        </p:nvSpPr>
-        <p:spPr>
-          <a:xfrm>
-            <a:off x="10728655" y="6446520"/>
-            <a:ext cx="914400" cy="274320"/>
-          </a:xfrm>
-          <a:prstGeom prst="rect">
-            <a:avLst/>
-          </a:prstGeom>
-          <a:noFill/>
-        </p:spPr>
-        <p:txBody>
-          <a:bodyPr wrap="square" anchor="t" lIns="0" rIns="0" tIns="0" bIns="0"/>
-          <a:lstStyle/>
-          <a:p>
-            <a:pPr algn="r"/>
-            <a:r>
-              <a:rPr sz="1000" b="0" i="0">
-                <a:solidFill>
-                  <a:srgbClr val="54595D"/>
-                </a:solidFill>
-                <a:latin typeface="Calibri"/>
-              </a:rPr>
-              <a:t>6</a:t>
-            </a:r>
-          </a:p>
-        </p:txBody>
-      </p:sp>
-      <p:sp>
-        <p:nvSpPr>
-          <p:cNvPr id="6" name="Oval 5"/>
-          <p:cNvSpPr/>
-          <p:nvPr/>
-        </p:nvSpPr>
-        <p:spPr>
-          <a:xfrm>
-            <a:off x="548640" y="1618488"/>
-            <a:ext cx="411480" cy="411480"/>
-          </a:xfrm>
-          <a:prstGeom prst="ellipse">
-            <a:avLst/>
-          </a:prstGeom>
-          <a:solidFill>
-            <a:srgbClr val="F2B705"/>
-          </a:solidFill>
-          <a:ln>
-            <a:noFill/>
-          </a:ln>
-          <a:effectLst/>
-        </p:spPr>
-        <p:style>
-          <a:lnRef idx="1">
-            <a:schemeClr val="accent1"/>
-          </a:lnRef>
-          <a:fillRef idx="3">
-            <a:schemeClr val="accent1"/>
-          </a:fillRef>
-          <a:effectRef idx="2">
-            <a:schemeClr val="accent1"/>
-          </a:effectRef>
-          <a:fontRef idx="minor">
-            <a:schemeClr val="lt1"/>
-          </a:fontRef>
-        </p:style>
-        <p:txBody>
-          <a:bodyPr rtlCol="0" anchor="ctr" lIns="0" rIns="0" tIns="0" bIns="0"/>
-          <a:lstStyle/>
-          <a:p>
-            <a:pPr algn="ctr"/>
-            <a:r>
-              <a:rPr sz="1400" b="1">
-                <a:solidFill>
-                  <a:srgbClr val="202122"/>
-                </a:solidFill>
-                <a:latin typeface="Calibri"/>
-              </a:rPr>
-              <a:t>1</a:t>
-            </a:r>
-          </a:p>
-        </p:txBody>
-      </p:sp>
-      <p:sp>
-        <p:nvSpPr>
-          <p:cNvPr id="7" name="TextBox 6"/>
-          <p:cNvSpPr txBox="1"/>
-          <p:nvPr/>
-        </p:nvSpPr>
-        <p:spPr>
-          <a:xfrm>
-            <a:off x="1234440" y="1600200"/>
-            <a:ext cx="10408615" cy="791870"/>
-          </a:xfrm>
-          <a:prstGeom prst="rect">
-            <a:avLst/>
-          </a:prstGeom>
-          <a:noFill/>
-        </p:spPr>
-        <p:txBody>
-          <a:bodyPr wrap="square" anchor="t" lIns="0" rIns="0" tIns="0" bIns="0"/>
-          <a:lstStyle/>
-          <a:p>
-            <a:pPr algn="l"/>
-            <a:r>
-              <a:rPr sz="2200" b="0" i="0">
-                <a:solidFill>
-                  <a:srgbClr val="202122"/>
-                </a:solidFill>
-                <a:latin typeface="Calibri"/>
-              </a:rPr>
-              <a:t>What must be true before a binary search?</a:t>
-            </a:r>
-          </a:p>
-        </p:txBody>
-      </p:sp>
-      <p:sp>
-        <p:nvSpPr>
-          <p:cNvPr id="8" name="Oval 7"/>
-          <p:cNvSpPr/>
-          <p:nvPr/>
-        </p:nvSpPr>
-        <p:spPr>
-          <a:xfrm>
-            <a:off x="548640" y="2574950"/>
-            <a:ext cx="411480" cy="411480"/>
-          </a:xfrm>
-          <a:prstGeom prst="ellipse">
-            <a:avLst/>
-          </a:prstGeom>
-          <a:solidFill>
-            <a:srgbClr val="F2B705"/>
-          </a:solidFill>
-          <a:ln>
-            <a:noFill/>
-          </a:ln>
-          <a:effectLst/>
-        </p:spPr>
-        <p:style>
-          <a:lnRef idx="1">
-            <a:schemeClr val="accent1"/>
-          </a:lnRef>
-          <a:fillRef idx="3">
-            <a:schemeClr val="accent1"/>
-          </a:fillRef>
-          <a:effectRef idx="2">
-            <a:schemeClr val="accent1"/>
-          </a:effectRef>
-          <a:fontRef idx="minor">
-            <a:schemeClr val="lt1"/>
-          </a:fontRef>
-        </p:style>
-        <p:txBody>
-          <a:bodyPr rtlCol="0" anchor="ctr" lIns="0" rIns="0" tIns="0" bIns="0"/>
-          <a:lstStyle/>
-          <a:p>
-            <a:pPr algn="ctr"/>
-            <a:r>
-              <a:rPr sz="1400" b="1">
-                <a:solidFill>
-                  <a:srgbClr val="202122"/>
-                </a:solidFill>
-                <a:latin typeface="Calibri"/>
-              </a:rPr>
-              <a:t>2</a:t>
-            </a:r>
-          </a:p>
-        </p:txBody>
-      </p:sp>
-      <p:sp>
-        <p:nvSpPr>
-          <p:cNvPr id="9" name="TextBox 8"/>
-          <p:cNvSpPr txBox="1"/>
-          <p:nvPr/>
-        </p:nvSpPr>
-        <p:spPr>
-          <a:xfrm>
-            <a:off x="1234440" y="2556662"/>
-            <a:ext cx="10408615" cy="791870"/>
-          </a:xfrm>
-          <a:prstGeom prst="rect">
-            <a:avLst/>
-          </a:prstGeom>
-          <a:noFill/>
-        </p:spPr>
-        <p:txBody>
-          <a:bodyPr wrap="square" anchor="t" lIns="0" rIns="0" tIns="0" bIns="0"/>
-          <a:lstStyle/>
-          <a:p>
-            <a:pPr algn="l"/>
-            <a:r>
-              <a:rPr sz="2200" b="0" i="0">
-                <a:solidFill>
-                  <a:srgbClr val="202122"/>
-                </a:solidFill>
-                <a:latin typeface="Calibri"/>
-              </a:rPr>
-              <a:t>How many items might a linear search check in a list of 1,000?</a:t>
-            </a:r>
-          </a:p>
-        </p:txBody>
-      </p:sp>
-      <p:sp>
-        <p:nvSpPr>
-          <p:cNvPr id="10" name="Oval 9"/>
-          <p:cNvSpPr/>
-          <p:nvPr/>
-        </p:nvSpPr>
-        <p:spPr>
-          <a:xfrm>
-            <a:off x="548640" y="3531412"/>
-            <a:ext cx="411480" cy="411480"/>
-          </a:xfrm>
-          <a:prstGeom prst="ellipse">
-            <a:avLst/>
-          </a:prstGeom>
-          <a:solidFill>
-            <a:srgbClr val="F2B705"/>
-          </a:solidFill>
-          <a:ln>
-            <a:noFill/>
-          </a:ln>
-          <a:effectLst/>
-        </p:spPr>
-        <p:style>
-          <a:lnRef idx="1">
-            <a:schemeClr val="accent1"/>
-          </a:lnRef>
-          <a:fillRef idx="3">
-            <a:schemeClr val="accent1"/>
-          </a:fillRef>
-          <a:effectRef idx="2">
-            <a:schemeClr val="accent1"/>
-          </a:effectRef>
-          <a:fontRef idx="minor">
-            <a:schemeClr val="lt1"/>
-          </a:fontRef>
-        </p:style>
-        <p:txBody>
-          <a:bodyPr rtlCol="0" anchor="ctr" lIns="0" rIns="0" tIns="0" bIns="0"/>
-          <a:lstStyle/>
-          <a:p>
-            <a:pPr algn="ctr"/>
-            <a:r>
-              <a:rPr sz="1400" b="1">
-                <a:solidFill>
-                  <a:srgbClr val="202122"/>
-                </a:solidFill>
-                <a:latin typeface="Calibri"/>
-              </a:rPr>
-              <a:t>3</a:t>
-            </a:r>
-          </a:p>
-        </p:txBody>
-      </p:sp>
-      <p:sp>
-        <p:nvSpPr>
-          <p:cNvPr id="11" name="TextBox 10"/>
-          <p:cNvSpPr txBox="1"/>
-          <p:nvPr/>
-        </p:nvSpPr>
-        <p:spPr>
-          <a:xfrm>
-            <a:off x="1234440" y="3513124"/>
-            <a:ext cx="10408615" cy="791870"/>
-          </a:xfrm>
-          <a:prstGeom prst="rect">
-            <a:avLst/>
-          </a:prstGeom>
-          <a:noFill/>
-        </p:spPr>
-        <p:txBody>
-          <a:bodyPr wrap="square" anchor="t" lIns="0" rIns="0" tIns="0" bIns="0"/>
-          <a:lstStyle/>
-          <a:p>
-            <a:pPr algn="l"/>
-            <a:r>
-              <a:rPr sz="2200" b="0" i="0">
-                <a:solidFill>
-                  <a:srgbClr val="202122"/>
-                </a:solidFill>
-                <a:latin typeface="Calibri"/>
-              </a:rPr>
-              <a:t>Which sort splits a list and merges it back together?</a:t>
-            </a:r>
-          </a:p>
-        </p:txBody>
-      </p:sp>
-      <p:sp>
-        <p:nvSpPr>
-          <p:cNvPr id="12" name="Oval 11"/>
-          <p:cNvSpPr/>
-          <p:nvPr/>
-        </p:nvSpPr>
-        <p:spPr>
-          <a:xfrm>
-            <a:off x="548640" y="4487875"/>
-            <a:ext cx="411480" cy="411480"/>
-          </a:xfrm>
-          <a:prstGeom prst="ellipse">
-            <a:avLst/>
-          </a:prstGeom>
-          <a:solidFill>
-            <a:srgbClr val="F2B705"/>
-          </a:solidFill>
-          <a:ln>
-            <a:noFill/>
-          </a:ln>
-          <a:effectLst/>
-        </p:spPr>
-        <p:style>
-          <a:lnRef idx="1">
-            <a:schemeClr val="accent1"/>
-          </a:lnRef>
-          <a:fillRef idx="3">
-            <a:schemeClr val="accent1"/>
-          </a:fillRef>
-          <a:effectRef idx="2">
-            <a:schemeClr val="accent1"/>
-          </a:effectRef>
-          <a:fontRef idx="minor">
-            <a:schemeClr val="lt1"/>
-          </a:fontRef>
-        </p:style>
-        <p:txBody>
-          <a:bodyPr rtlCol="0" anchor="ctr" lIns="0" rIns="0" tIns="0" bIns="0"/>
-          <a:lstStyle/>
-          <a:p>
-            <a:pPr algn="ctr"/>
-            <a:r>
-              <a:rPr sz="1400" b="1">
-                <a:solidFill>
-                  <a:srgbClr val="202122"/>
-                </a:solidFill>
-                <a:latin typeface="Calibri"/>
-              </a:rPr>
-              <a:t>4</a:t>
-            </a:r>
-          </a:p>
-        </p:txBody>
-      </p:sp>
-      <p:sp>
-        <p:nvSpPr>
-          <p:cNvPr id="13" name="TextBox 12"/>
-          <p:cNvSpPr txBox="1"/>
-          <p:nvPr/>
-        </p:nvSpPr>
-        <p:spPr>
-          <a:xfrm>
-            <a:off x="1234440" y="4469587"/>
-            <a:ext cx="10408615" cy="791870"/>
-          </a:xfrm>
-          <a:prstGeom prst="rect">
-            <a:avLst/>
-          </a:prstGeom>
-          <a:noFill/>
-        </p:spPr>
-        <p:txBody>
-          <a:bodyPr wrap="square" anchor="t" lIns="0" rIns="0" tIns="0" bIns="0"/>
-          <a:lstStyle/>
-          <a:p>
-            <a:pPr algn="l"/>
-            <a:r>
-              <a:rPr sz="2200" b="0" i="0">
-                <a:solidFill>
-                  <a:srgbClr val="202122"/>
-                </a:solidFill>
-                <a:latin typeface="Calibri"/>
-              </a:rPr>
-              <a:t>Which sort is efficient on nearly sorted data?</a:t>
-            </a:r>
-          </a:p>
-        </p:txBody>
-      </p:sp>
-      <p:sp>
-        <p:nvSpPr>
-          <p:cNvPr id="14" name="Oval 13"/>
-          <p:cNvSpPr/>
-          <p:nvPr/>
-        </p:nvSpPr>
-        <p:spPr>
-          <a:xfrm>
-            <a:off x="548640" y="5444337"/>
-            <a:ext cx="411480" cy="411480"/>
-          </a:xfrm>
-          <a:prstGeom prst="ellipse">
-            <a:avLst/>
-          </a:prstGeom>
-          <a:solidFill>
-            <a:srgbClr val="F2B705"/>
-          </a:solidFill>
-          <a:ln>
-            <a:noFill/>
-          </a:ln>
-          <a:effectLst/>
-        </p:spPr>
-        <p:style>
-          <a:lnRef idx="1">
-            <a:schemeClr val="accent1"/>
-          </a:lnRef>
-          <a:fillRef idx="3">
-            <a:schemeClr val="accent1"/>
-          </a:fillRef>
-          <a:effectRef idx="2">
-            <a:schemeClr val="accent1"/>
-          </a:effectRef>
-          <a:fontRef idx="minor">
-            <a:schemeClr val="lt1"/>
-          </a:fontRef>
-        </p:style>
-        <p:txBody>
-          <a:bodyPr rtlCol="0" anchor="ctr" lIns="0" rIns="0" tIns="0" bIns="0"/>
-          <a:lstStyle/>
-          <a:p>
-            <a:pPr algn="ctr"/>
-            <a:r>
-              <a:rPr sz="1400" b="1">
-                <a:solidFill>
-                  <a:srgbClr val="202122"/>
-                </a:solidFill>
-                <a:latin typeface="Calibri"/>
-              </a:rPr>
-              <a:t>5</a:t>
-            </a:r>
-          </a:p>
-        </p:txBody>
-      </p:sp>
-      <p:sp>
-        <p:nvSpPr>
-          <p:cNvPr id="15" name="TextBox 14"/>
-          <p:cNvSpPr txBox="1"/>
-          <p:nvPr/>
-        </p:nvSpPr>
-        <p:spPr>
-          <a:xfrm>
-            <a:off x="1234440" y="5426049"/>
-            <a:ext cx="10408615" cy="791870"/>
-          </a:xfrm>
-          <a:prstGeom prst="rect">
-            <a:avLst/>
-          </a:prstGeom>
-          <a:noFill/>
-        </p:spPr>
-        <p:txBody>
-          <a:bodyPr wrap="square" anchor="t" lIns="0" rIns="0" tIns="0" bIns="0"/>
-          <a:lstStyle/>
-          <a:p>
-            <a:pPr algn="l"/>
-            <a:r>
-              <a:rPr sz="2200" b="0" i="0">
-                <a:solidFill>
-                  <a:srgbClr val="202122"/>
-                </a:solidFill>
-                <a:latin typeface="Calibri"/>
-              </a:rPr>
-              <a:t>Give one drawback of merge sort.</a:t>
-            </a:r>
-          </a:p>
-        </p:txBody>
-      </p:sp>
-    </p:spTree>
-  </p:cSld>
-  <p:clrMapOvr>
-    <a:masterClrMapping/>
-  </p:clrMapOvr>
-</p:sld>
-</file>
-
-<file path=ppt/slides/slide7.xml><?xml version="1.0" encoding="utf-8"?>
-<p:sld xmlns:a="http://schemas.openxmlformats.org/drawingml/2006/main" xmlns:p="http://schemas.openxmlformats.org/presentationml/2006/main" xmlns:r="http://schemas.openxmlformats.org/officeDocument/2006/relationships">
-  <p:cSld>
-    <p:bg>
-      <p:bgPr>
-        <a:solidFill>
-          <a:srgbClr val="FFFFFF"/>
-        </a:solidFill>
-        <a:effectLst/>
-      </p:bgPr>
-    </p:bg>
-    <p:spTree>
-      <p:nvGrpSpPr>
-        <p:cNvPr id="1" name=""/>
-        <p:cNvGrpSpPr/>
-        <p:nvPr/>
-      </p:nvGrpSpPr>
-      <p:grpSpPr/>
-      <p:sp>
-        <p:nvSpPr>
-          <p:cNvPr id="2" name="TextBox 1"/>
-          <p:cNvSpPr txBox="1"/>
-          <p:nvPr/>
-        </p:nvSpPr>
-        <p:spPr>
-          <a:xfrm>
-            <a:off x="548640" y="320040"/>
-            <a:ext cx="11094415" cy="274320"/>
-          </a:xfrm>
-          <a:prstGeom prst="rect">
-            <a:avLst/>
-          </a:prstGeom>
-          <a:noFill/>
-        </p:spPr>
-        <p:txBody>
-          <a:bodyPr wrap="square" anchor="t" lIns="0" rIns="0" tIns="0" bIns="0"/>
-          <a:lstStyle/>
-          <a:p>
-            <a:pPr algn="l"/>
-            <a:r>
-              <a:rPr sz="1100" b="1" i="0">
-                <a:solidFill>
-                  <a:srgbClr val="54595D"/>
-                </a:solidFill>
-                <a:latin typeface="Calibri"/>
-              </a:rPr>
-              <a:t>CORE COMPONENT  ·  Core Paper 1</a:t>
-            </a:r>
-          </a:p>
-        </p:txBody>
-      </p:sp>
-      <p:sp>
-        <p:nvSpPr>
-          <p:cNvPr id="3" name="TextBox 2"/>
-          <p:cNvSpPr txBox="1"/>
-          <p:nvPr/>
-        </p:nvSpPr>
-        <p:spPr>
-          <a:xfrm>
-            <a:off x="548640" y="566928"/>
-            <a:ext cx="11094415" cy="822960"/>
-          </a:xfrm>
-          <a:prstGeom prst="rect">
-            <a:avLst/>
-          </a:prstGeom>
-          <a:noFill/>
-        </p:spPr>
-        <p:txBody>
-          <a:bodyPr wrap="square" anchor="ctr" lIns="0" rIns="0" tIns="0" bIns="0"/>
-          <a:lstStyle/>
-          <a:p>
-            <a:pPr algn="l"/>
-            <a:r>
-              <a:rPr sz="3200" b="1" i="0">
-                <a:solidFill>
-                  <a:srgbClr val="03306E"/>
-                </a:solidFill>
-                <a:latin typeface="Cambria"/>
-              </a:rPr>
-              <a:t>Answers</a:t>
-            </a:r>
-          </a:p>
-        </p:txBody>
-      </p:sp>
-      <p:sp>
-        <p:nvSpPr>
-          <p:cNvPr id="4" name="TextBox 3"/>
-          <p:cNvSpPr txBox="1"/>
-          <p:nvPr/>
-        </p:nvSpPr>
-        <p:spPr>
-          <a:xfrm>
-            <a:off x="548640" y="6446520"/>
-            <a:ext cx="8229600" cy="274320"/>
-          </a:xfrm>
-          <a:prstGeom prst="rect">
-            <a:avLst/>
-          </a:prstGeom>
-          <a:noFill/>
-        </p:spPr>
-        <p:txBody>
-          <a:bodyPr wrap="square" anchor="t" lIns="0" rIns="0" tIns="0" bIns="0"/>
-          <a:lstStyle/>
-          <a:p>
-            <a:pPr algn="l"/>
-            <a:r>
-              <a:rPr sz="1000" b="0" i="0">
-                <a:solidFill>
-                  <a:srgbClr val="54595D"/>
-                </a:solidFill>
-                <a:latin typeface="Calibri"/>
-              </a:rPr>
-              <a:t>Digital Software Development T Level  ·  Searching and Sorting Algorithms</a:t>
-            </a:r>
-          </a:p>
-        </p:txBody>
-      </p:sp>
-      <p:sp>
-        <p:nvSpPr>
-          <p:cNvPr id="5" name="TextBox 4"/>
-          <p:cNvSpPr txBox="1"/>
-          <p:nvPr/>
-        </p:nvSpPr>
-        <p:spPr>
-          <a:xfrm>
-            <a:off x="10728655" y="6446520"/>
-            <a:ext cx="914400" cy="274320"/>
-          </a:xfrm>
-          <a:prstGeom prst="rect">
-            <a:avLst/>
-          </a:prstGeom>
-          <a:noFill/>
-        </p:spPr>
-        <p:txBody>
-          <a:bodyPr wrap="square" anchor="t" lIns="0" rIns="0" tIns="0" bIns="0"/>
-          <a:lstStyle/>
-          <a:p>
-            <a:pPr algn="r"/>
-            <a:r>
-              <a:rPr sz="1000" b="0" i="0">
-                <a:solidFill>
-                  <a:srgbClr val="54595D"/>
-                </a:solidFill>
-                <a:latin typeface="Calibri"/>
-              </a:rPr>
-              <a:t>7</a:t>
-            </a:r>
-          </a:p>
-        </p:txBody>
-      </p:sp>
-      <p:sp>
-        <p:nvSpPr>
-          <p:cNvPr id="6" name="Oval 5"/>
-          <p:cNvSpPr/>
-          <p:nvPr/>
-        </p:nvSpPr>
-        <p:spPr>
-          <a:xfrm>
-            <a:off x="548640" y="1618488"/>
-            <a:ext cx="411480" cy="411480"/>
-          </a:xfrm>
-          <a:prstGeom prst="ellipse">
-            <a:avLst/>
-          </a:prstGeom>
-          <a:solidFill>
-            <a:srgbClr val="F2B705"/>
-          </a:solidFill>
-          <a:ln>
-            <a:noFill/>
-          </a:ln>
-          <a:effectLst/>
-        </p:spPr>
-        <p:style>
-          <a:lnRef idx="1">
-            <a:schemeClr val="accent1"/>
-          </a:lnRef>
-          <a:fillRef idx="3">
-            <a:schemeClr val="accent1"/>
-          </a:fillRef>
-          <a:effectRef idx="2">
-            <a:schemeClr val="accent1"/>
-          </a:effectRef>
-          <a:fontRef idx="minor">
-            <a:schemeClr val="lt1"/>
-          </a:fontRef>
-        </p:style>
-        <p:txBody>
-          <a:bodyPr rtlCol="0" anchor="ctr" lIns="0" rIns="0" tIns="0" bIns="0"/>
-          <a:lstStyle/>
-          <a:p>
-            <a:pPr algn="ctr"/>
-            <a:r>
-              <a:rPr sz="1400" b="1">
-                <a:solidFill>
-                  <a:srgbClr val="202122"/>
-                </a:solidFill>
-                <a:latin typeface="Calibri"/>
-              </a:rPr>
-              <a:t>1</a:t>
-            </a:r>
-          </a:p>
-        </p:txBody>
-      </p:sp>
-      <p:sp>
-        <p:nvSpPr>
-          <p:cNvPr id="7" name="TextBox 6"/>
-          <p:cNvSpPr txBox="1"/>
-          <p:nvPr/>
-        </p:nvSpPr>
-        <p:spPr>
-          <a:xfrm>
-            <a:off x="1234440" y="1600200"/>
-            <a:ext cx="10408615" cy="791870"/>
-          </a:xfrm>
-          <a:prstGeom prst="rect">
-            <a:avLst/>
-          </a:prstGeom>
-          <a:noFill/>
-        </p:spPr>
-        <p:txBody>
-          <a:bodyPr wrap="square" anchor="t" lIns="0" rIns="0" tIns="0" bIns="0"/>
-          <a:lstStyle/>
-          <a:p>
-            <a:pPr algn="l"/>
-            <a:r>
-              <a:rPr sz="1800" b="0" i="0">
-                <a:solidFill>
-                  <a:srgbClr val="54595D"/>
-                </a:solidFill>
-                <a:latin typeface="Calibri"/>
-              </a:rPr>
-              <a:t>What must be true before a binary search?</a:t>
-            </a:r>
-          </a:p>
-          <a:p>
-            <a:r>
-              <a:rPr sz="1800" b="1">
-                <a:solidFill>
-                  <a:srgbClr val="03306E"/>
-                </a:solidFill>
-                <a:latin typeface="Calibri"/>
-              </a:rPr>
-              <a:t>The data must be sorted.</a:t>
-            </a:r>
-          </a:p>
-        </p:txBody>
-      </p:sp>
-      <p:sp>
-        <p:nvSpPr>
-          <p:cNvPr id="8" name="Oval 7"/>
-          <p:cNvSpPr/>
-          <p:nvPr/>
-        </p:nvSpPr>
-        <p:spPr>
-          <a:xfrm>
-            <a:off x="548640" y="2574950"/>
-            <a:ext cx="411480" cy="411480"/>
-          </a:xfrm>
-          <a:prstGeom prst="ellipse">
-            <a:avLst/>
-          </a:prstGeom>
-          <a:solidFill>
-            <a:srgbClr val="F2B705"/>
-          </a:solidFill>
-          <a:ln>
-            <a:noFill/>
-          </a:ln>
-          <a:effectLst/>
-        </p:spPr>
-        <p:style>
-          <a:lnRef idx="1">
-            <a:schemeClr val="accent1"/>
-          </a:lnRef>
-          <a:fillRef idx="3">
-            <a:schemeClr val="accent1"/>
-          </a:fillRef>
-          <a:effectRef idx="2">
-            <a:schemeClr val="accent1"/>
-          </a:effectRef>
-          <a:fontRef idx="minor">
-            <a:schemeClr val="lt1"/>
-          </a:fontRef>
-        </p:style>
-        <p:txBody>
-          <a:bodyPr rtlCol="0" anchor="ctr" lIns="0" rIns="0" tIns="0" bIns="0"/>
-          <a:lstStyle/>
-          <a:p>
-            <a:pPr algn="ctr"/>
-            <a:r>
-              <a:rPr sz="1400" b="1">
-                <a:solidFill>
-                  <a:srgbClr val="202122"/>
-                </a:solidFill>
-                <a:latin typeface="Calibri"/>
-              </a:rPr>
-              <a:t>2</a:t>
-            </a:r>
-          </a:p>
-        </p:txBody>
-      </p:sp>
-      <p:sp>
-        <p:nvSpPr>
-          <p:cNvPr id="9" name="TextBox 8"/>
-          <p:cNvSpPr txBox="1"/>
-          <p:nvPr/>
-        </p:nvSpPr>
-        <p:spPr>
-          <a:xfrm>
-            <a:off x="1234440" y="2556662"/>
-            <a:ext cx="10408615" cy="791870"/>
-          </a:xfrm>
-          <a:prstGeom prst="rect">
-            <a:avLst/>
-          </a:prstGeom>
-          <a:noFill/>
-        </p:spPr>
-        <p:txBody>
-          <a:bodyPr wrap="square" anchor="t" lIns="0" rIns="0" tIns="0" bIns="0"/>
-          <a:lstStyle/>
-          <a:p>
-            <a:pPr algn="l"/>
-            <a:r>
-              <a:rPr sz="1800" b="0" i="0">
-                <a:solidFill>
-                  <a:srgbClr val="54595D"/>
-                </a:solidFill>
-                <a:latin typeface="Calibri"/>
-              </a:rPr>
-              <a:t>How many items might a linear search check in a list of 1,000?</a:t>
-            </a:r>
-          </a:p>
-          <a:p>
-            <a:r>
-              <a:rPr sz="1800" b="1">
-                <a:solidFill>
-                  <a:srgbClr val="03306E"/>
-                </a:solidFill>
-                <a:latin typeface="Calibri"/>
-              </a:rPr>
-              <a:t>Up to 1,000 (every item).</a:t>
-            </a:r>
-          </a:p>
-        </p:txBody>
-      </p:sp>
-      <p:sp>
-        <p:nvSpPr>
-          <p:cNvPr id="10" name="Oval 9"/>
-          <p:cNvSpPr/>
-          <p:nvPr/>
-        </p:nvSpPr>
-        <p:spPr>
-          <a:xfrm>
-            <a:off x="548640" y="3531412"/>
-            <a:ext cx="411480" cy="411480"/>
-          </a:xfrm>
-          <a:prstGeom prst="ellipse">
-            <a:avLst/>
-          </a:prstGeom>
-          <a:solidFill>
-            <a:srgbClr val="F2B705"/>
-          </a:solidFill>
-          <a:ln>
-            <a:noFill/>
-          </a:ln>
-          <a:effectLst/>
-        </p:spPr>
-        <p:style>
-          <a:lnRef idx="1">
-            <a:schemeClr val="accent1"/>
-          </a:lnRef>
-          <a:fillRef idx="3">
-            <a:schemeClr val="accent1"/>
-          </a:fillRef>
-          <a:effectRef idx="2">
-            <a:schemeClr val="accent1"/>
-          </a:effectRef>
-          <a:fontRef idx="minor">
-            <a:schemeClr val="lt1"/>
-          </a:fontRef>
-        </p:style>
-        <p:txBody>
-          <a:bodyPr rtlCol="0" anchor="ctr" lIns="0" rIns="0" tIns="0" bIns="0"/>
-          <a:lstStyle/>
-          <a:p>
-            <a:pPr algn="ctr"/>
-            <a:r>
-              <a:rPr sz="1400" b="1">
-                <a:solidFill>
-                  <a:srgbClr val="202122"/>
-                </a:solidFill>
-                <a:latin typeface="Calibri"/>
-              </a:rPr>
-              <a:t>3</a:t>
-            </a:r>
-          </a:p>
-        </p:txBody>
-      </p:sp>
-      <p:sp>
-        <p:nvSpPr>
-          <p:cNvPr id="11" name="TextBox 10"/>
-          <p:cNvSpPr txBox="1"/>
-          <p:nvPr/>
-        </p:nvSpPr>
-        <p:spPr>
-          <a:xfrm>
-            <a:off x="1234440" y="3513124"/>
-            <a:ext cx="10408615" cy="791870"/>
-          </a:xfrm>
-          <a:prstGeom prst="rect">
-            <a:avLst/>
-          </a:prstGeom>
-          <a:noFill/>
-        </p:spPr>
-        <p:txBody>
-          <a:bodyPr wrap="square" anchor="t" lIns="0" rIns="0" tIns="0" bIns="0"/>
-          <a:lstStyle/>
-          <a:p>
-            <a:pPr algn="l"/>
-            <a:r>
-              <a:rPr sz="1800" b="0" i="0">
-                <a:solidFill>
-                  <a:srgbClr val="54595D"/>
-                </a:solidFill>
-                <a:latin typeface="Calibri"/>
-              </a:rPr>
-              <a:t>Which sort splits a list and merges it back together?</a:t>
-            </a:r>
-          </a:p>
-          <a:p>
-            <a:r>
-              <a:rPr sz="1800" b="1">
-                <a:solidFill>
-                  <a:srgbClr val="03306E"/>
-                </a:solidFill>
-                <a:latin typeface="Calibri"/>
-              </a:rPr>
-              <a:t>Merge sort.</a:t>
-            </a:r>
-          </a:p>
-        </p:txBody>
-      </p:sp>
-      <p:sp>
-        <p:nvSpPr>
-          <p:cNvPr id="12" name="Oval 11"/>
-          <p:cNvSpPr/>
-          <p:nvPr/>
-        </p:nvSpPr>
-        <p:spPr>
-          <a:xfrm>
-            <a:off x="548640" y="4487875"/>
-            <a:ext cx="411480" cy="411480"/>
-          </a:xfrm>
-          <a:prstGeom prst="ellipse">
-            <a:avLst/>
-          </a:prstGeom>
-          <a:solidFill>
-            <a:srgbClr val="F2B705"/>
-          </a:solidFill>
-          <a:ln>
-            <a:noFill/>
-          </a:ln>
-          <a:effectLst/>
-        </p:spPr>
-        <p:style>
-          <a:lnRef idx="1">
-            <a:schemeClr val="accent1"/>
-          </a:lnRef>
-          <a:fillRef idx="3">
-            <a:schemeClr val="accent1"/>
-          </a:fillRef>
-          <a:effectRef idx="2">
-            <a:schemeClr val="accent1"/>
-          </a:effectRef>
-          <a:fontRef idx="minor">
-            <a:schemeClr val="lt1"/>
-          </a:fontRef>
-        </p:style>
-        <p:txBody>
-          <a:bodyPr rtlCol="0" anchor="ctr" lIns="0" rIns="0" tIns="0" bIns="0"/>
-          <a:lstStyle/>
-          <a:p>
-            <a:pPr algn="ctr"/>
-            <a:r>
-              <a:rPr sz="1400" b="1">
-                <a:solidFill>
-                  <a:srgbClr val="202122"/>
-                </a:solidFill>
-                <a:latin typeface="Calibri"/>
-              </a:rPr>
-              <a:t>4</a:t>
-            </a:r>
-          </a:p>
-        </p:txBody>
-      </p:sp>
-      <p:sp>
-        <p:nvSpPr>
-          <p:cNvPr id="13" name="TextBox 12"/>
-          <p:cNvSpPr txBox="1"/>
-          <p:nvPr/>
-        </p:nvSpPr>
-        <p:spPr>
-          <a:xfrm>
-            <a:off x="1234440" y="4469587"/>
-            <a:ext cx="10408615" cy="791870"/>
-          </a:xfrm>
-          <a:prstGeom prst="rect">
-            <a:avLst/>
-          </a:prstGeom>
-          <a:noFill/>
-        </p:spPr>
-        <p:txBody>
-          <a:bodyPr wrap="square" anchor="t" lIns="0" rIns="0" tIns="0" bIns="0"/>
-          <a:lstStyle/>
-          <a:p>
-            <a:pPr algn="l"/>
-            <a:r>
-              <a:rPr sz="1800" b="0" i="0">
-                <a:solidFill>
-                  <a:srgbClr val="54595D"/>
-                </a:solidFill>
-                <a:latin typeface="Calibri"/>
-              </a:rPr>
-              <a:t>Which sort is efficient on nearly sorted data?</a:t>
-            </a:r>
-          </a:p>
-          <a:p>
-            <a:r>
-              <a:rPr sz="1800" b="1">
-                <a:solidFill>
-                  <a:srgbClr val="03306E"/>
-                </a:solidFill>
-                <a:latin typeface="Calibri"/>
-              </a:rPr>
-              <a:t>Insertion sort.</a:t>
-            </a:r>
-          </a:p>
-        </p:txBody>
-      </p:sp>
-      <p:sp>
-        <p:nvSpPr>
-          <p:cNvPr id="14" name="Oval 13"/>
-          <p:cNvSpPr/>
-          <p:nvPr/>
-        </p:nvSpPr>
-        <p:spPr>
-          <a:xfrm>
-            <a:off x="548640" y="5444337"/>
-            <a:ext cx="411480" cy="411480"/>
-          </a:xfrm>
-          <a:prstGeom prst="ellipse">
-            <a:avLst/>
-          </a:prstGeom>
-          <a:solidFill>
-            <a:srgbClr val="F2B705"/>
-          </a:solidFill>
-          <a:ln>
-            <a:noFill/>
-          </a:ln>
-          <a:effectLst/>
-        </p:spPr>
-        <p:style>
-          <a:lnRef idx="1">
-            <a:schemeClr val="accent1"/>
-          </a:lnRef>
-          <a:fillRef idx="3">
-            <a:schemeClr val="accent1"/>
-          </a:fillRef>
-          <a:effectRef idx="2">
-            <a:schemeClr val="accent1"/>
-          </a:effectRef>
-          <a:fontRef idx="minor">
-            <a:schemeClr val="lt1"/>
-          </a:fontRef>
-        </p:style>
-        <p:txBody>
-          <a:bodyPr rtlCol="0" anchor="ctr" lIns="0" rIns="0" tIns="0" bIns="0"/>
-          <a:lstStyle/>
-          <a:p>
-            <a:pPr algn="ctr"/>
-            <a:r>
-              <a:rPr sz="1400" b="1">
-                <a:solidFill>
-                  <a:srgbClr val="202122"/>
-                </a:solidFill>
-                <a:latin typeface="Calibri"/>
-              </a:rPr>
-              <a:t>5</a:t>
-            </a:r>
-          </a:p>
-        </p:txBody>
-      </p:sp>
-      <p:sp>
-        <p:nvSpPr>
-          <p:cNvPr id="15" name="TextBox 14"/>
-          <p:cNvSpPr txBox="1"/>
-          <p:nvPr/>
-        </p:nvSpPr>
-        <p:spPr>
-          <a:xfrm>
-            <a:off x="1234440" y="5426049"/>
-            <a:ext cx="10408615" cy="791870"/>
-          </a:xfrm>
-          <a:prstGeom prst="rect">
-            <a:avLst/>
-          </a:prstGeom>
-          <a:noFill/>
-        </p:spPr>
-        <p:txBody>
-          <a:bodyPr wrap="square" anchor="t" lIns="0" rIns="0" tIns="0" bIns="0"/>
-          <a:lstStyle/>
-          <a:p>
-            <a:pPr algn="l"/>
-            <a:r>
-              <a:rPr sz="1800" b="0" i="0">
-                <a:solidFill>
-                  <a:srgbClr val="54595D"/>
-                </a:solidFill>
-                <a:latin typeface="Calibri"/>
-              </a:rPr>
-              <a:t>Give one drawback of merge sort.</a:t>
-            </a:r>
-          </a:p>
-          <a:p>
-            <a:r>
-              <a:rPr sz="1800" b="1">
-                <a:solidFill>
-                  <a:srgbClr val="03306E"/>
-                </a:solidFill>
-                <a:latin typeface="Calibri"/>
-              </a:rPr>
-              <a:t>It uses extra memory.</a:t>
-            </a:r>
-          </a:p>
-        </p:txBody>
-      </p:sp>
-    </p:spTree>
-  </p:cSld>
-  <p:clrMapOvr>
-    <a:masterClrMapping/>
-  </p:clrMapOvr>
-</p:sld>
-</file>
-
 <file path=ppt/slides/slide8.xml><?xml version="1.0" encoding="utf-8"?>
 <p:sld xmlns:a="http://schemas.openxmlformats.org/drawingml/2006/main" xmlns:p="http://schemas.openxmlformats.org/presentationml/2006/main" xmlns:r="http://schemas.openxmlformats.org/officeDocument/2006/relationships">
   <p:cSld>
@@ -7890,7 +11118,7 @@
                 </a:solidFill>
                 <a:latin typeface="Cambria"/>
               </a:rPr>
-              <a:t>Activity: Human sorting race</a:t>
+              <a:t>Quick check: Sorting algorithms</a:t>
             </a:r>
           </a:p>
         </p:txBody>
@@ -7963,19 +11191,17 @@
       </p:sp>
       <p:sp>
         <p:nvSpPr>
-          <p:cNvPr id="6" name="Rounded Rectangle 5"/>
+          <p:cNvPr id="6" name="Oval 5"/>
           <p:cNvSpPr/>
           <p:nvPr/>
         </p:nvSpPr>
         <p:spPr>
           <a:xfrm>
-            <a:off x="548640" y="1508760"/>
-            <a:ext cx="2011680" cy="457200"/>
-          </a:xfrm>
-          <a:prstGeom prst="roundRect">
-            <a:avLst>
-              <a:gd name="adj" fmla="val 50000"/>
-            </a:avLst>
+            <a:off x="548640" y="1691640"/>
+            <a:ext cx="502920" cy="502920"/>
+          </a:xfrm>
+          <a:prstGeom prst="ellipse">
+            <a:avLst/>
           </a:prstGeom>
           <a:solidFill>
             <a:srgbClr val="F2B705"/>
@@ -8000,9 +11226,20 @@
           </a:fontRef>
         </p:style>
         <p:txBody>
-          <a:bodyPr rtlCol="0" anchor="ctr"/>
-          <a:lstStyle/>
-          <a:p/>
+          <a:bodyPr rtlCol="0" anchor="ctr" lIns="0" rIns="0" tIns="0" bIns="0"/>
+          <a:lstStyle/>
+          <a:p>
+            <a:pPr algn="ctr"/>
+            <a:r>
+              <a:rPr sz="1600" b="1">
+                <a:solidFill>
+                  <a:srgbClr val="202122"/>
+                </a:solidFill>
+                <a:latin typeface="Calibri"/>
+              </a:rPr>
+              <a:t>1</a:t>
+            </a:r>
+          </a:p>
         </p:txBody>
       </p:sp>
       <p:sp>
@@ -8013,8 +11250,8 @@
         </p:nvSpPr>
         <p:spPr>
           <a:xfrm>
-            <a:off x="548640" y="1508760"/>
-            <a:ext cx="2011680" cy="457200"/>
+            <a:off x="1371600" y="1645920"/>
+            <a:ext cx="10271455" cy="1188720"/>
           </a:xfrm>
           <a:prstGeom prst="rect">
             <a:avLst/>
@@ -8022,71 +11259,38 @@
           <a:noFill/>
         </p:spPr>
         <p:txBody>
-          <a:bodyPr wrap="square" anchor="ctr" lIns="0" rIns="0" tIns="0" bIns="0"/>
-          <a:lstStyle/>
-          <a:p>
-            <a:pPr algn="ctr"/>
-            <a:r>
-              <a:rPr sz="1400" b="1" i="0">
+          <a:bodyPr wrap="square" anchor="t" lIns="0" rIns="0" tIns="0" bIns="0"/>
+          <a:lstStyle/>
+          <a:p>
+            <a:pPr algn="l"/>
+            <a:r>
+              <a:rPr sz="2400" b="0" i="0">
                 <a:solidFill>
                   <a:srgbClr val="202122"/>
                 </a:solidFill>
                 <a:latin typeface="Calibri"/>
               </a:rPr>
-              <a:t>25 minutes</a:t>
-            </a:r>
-          </a:p>
-        </p:txBody>
-      </p:sp>
-      <p:sp>
-        <p:nvSpPr>
-          <p:cNvPr id="8" name="TextBox 7"/>
-          <p:cNvSpPr txBox="1"/>
-          <p:nvPr/>
-        </p:nvSpPr>
-        <p:spPr>
-          <a:xfrm>
-            <a:off x="2743200" y="1508760"/>
-            <a:ext cx="4754880" cy="457200"/>
-          </a:xfrm>
-          <a:prstGeom prst="rect">
-            <a:avLst/>
-          </a:prstGeom>
-          <a:noFill/>
-        </p:spPr>
-        <p:txBody>
-          <a:bodyPr wrap="square" anchor="ctr" lIns="0" rIns="0" tIns="0" bIns="0"/>
-          <a:lstStyle/>
-          <a:p>
-            <a:pPr algn="l"/>
-            <a:r>
-              <a:rPr sz="1400" b="0" i="1">
-                <a:solidFill>
-                  <a:srgbClr val="54595D"/>
-                </a:solidFill>
-                <a:latin typeface="Calibri"/>
-              </a:rPr>
-              <a:t>Groups of eight</a:t>
-            </a:r>
-          </a:p>
-        </p:txBody>
-      </p:sp>
-      <p:sp>
-        <p:nvSpPr>
-          <p:cNvPr id="9" name="Oval 8"/>
+              <a:t>How does bubble sort know it has finished?</a:t>
+            </a:r>
+          </a:p>
+        </p:txBody>
+      </p:sp>
+      <p:sp>
+        <p:nvSpPr>
+          <p:cNvPr id="8" name="Oval 7"/>
           <p:cNvSpPr/>
           <p:nvPr/>
         </p:nvSpPr>
         <p:spPr>
           <a:xfrm>
-            <a:off x="548640" y="2482596"/>
-            <a:ext cx="384048" cy="384048"/>
+            <a:off x="548640" y="3108960"/>
+            <a:ext cx="502920" cy="502920"/>
           </a:xfrm>
           <a:prstGeom prst="ellipse">
             <a:avLst/>
           </a:prstGeom>
           <a:solidFill>
-            <a:srgbClr val="0645AD"/>
+            <a:srgbClr val="F2B705"/>
           </a:solidFill>
           <a:ln>
             <a:noFill/>
@@ -8113,27 +11317,27 @@
           <a:p>
             <a:pPr algn="ctr"/>
             <a:r>
-              <a:rPr sz="1300" b="1">
-                <a:solidFill>
-                  <a:srgbClr val="FFFFFF"/>
-                </a:solidFill>
-                <a:latin typeface="Calibri"/>
-              </a:rPr>
-              <a:t>1</a:t>
-            </a:r>
-          </a:p>
-        </p:txBody>
-      </p:sp>
-      <p:sp>
-        <p:nvSpPr>
-          <p:cNvPr id="10" name="TextBox 9"/>
+              <a:rPr sz="1600" b="1">
+                <a:solidFill>
+                  <a:srgbClr val="202122"/>
+                </a:solidFill>
+                <a:latin typeface="Calibri"/>
+              </a:rPr>
+              <a:t>2</a:t>
+            </a:r>
+          </a:p>
+        </p:txBody>
+      </p:sp>
+      <p:sp>
+        <p:nvSpPr>
+          <p:cNvPr id="9" name="TextBox 8"/>
           <p:cNvSpPr txBox="1"/>
           <p:nvPr/>
         </p:nvSpPr>
         <p:spPr>
           <a:xfrm>
-            <a:off x="1143000" y="2240280"/>
-            <a:ext cx="5943600" cy="868680"/>
+            <a:off x="1371600" y="3063240"/>
+            <a:ext cx="10271455" cy="1188720"/>
           </a:xfrm>
           <a:prstGeom prst="rect">
             <a:avLst/>
@@ -8141,38 +11345,38 @@
           <a:noFill/>
         </p:spPr>
         <p:txBody>
-          <a:bodyPr wrap="square" anchor="ctr" lIns="0" rIns="0" tIns="0" bIns="0"/>
+          <a:bodyPr wrap="square" anchor="t" lIns="0" rIns="0" tIns="0" bIns="0"/>
           <a:lstStyle/>
           <a:p>
             <a:pPr algn="l"/>
             <a:r>
-              <a:rPr sz="1700" b="0" i="0">
+              <a:rPr sz="2400" b="0" i="0">
                 <a:solidFill>
                   <a:srgbClr val="202122"/>
                 </a:solidFill>
                 <a:latin typeface="Calibri"/>
               </a:rPr>
-              <a:t>Each person holds a number card.</a:t>
-            </a:r>
-          </a:p>
-        </p:txBody>
-      </p:sp>
-      <p:sp>
-        <p:nvSpPr>
-          <p:cNvPr id="11" name="Oval 10"/>
+              <a:t>Which sort suits nearly sorted data?</a:t>
+            </a:r>
+          </a:p>
+        </p:txBody>
+      </p:sp>
+      <p:sp>
+        <p:nvSpPr>
+          <p:cNvPr id="10" name="Oval 9"/>
           <p:cNvSpPr/>
           <p:nvPr/>
         </p:nvSpPr>
         <p:spPr>
           <a:xfrm>
-            <a:off x="548640" y="3461004"/>
-            <a:ext cx="384048" cy="384048"/>
+            <a:off x="548640" y="4526280"/>
+            <a:ext cx="502920" cy="502920"/>
           </a:xfrm>
           <a:prstGeom prst="ellipse">
             <a:avLst/>
           </a:prstGeom>
           <a:solidFill>
-            <a:srgbClr val="0645AD"/>
+            <a:srgbClr val="F2B705"/>
           </a:solidFill>
           <a:ln>
             <a:noFill/>
@@ -8199,13 +11403,46 @@
           <a:p>
             <a:pPr algn="ctr"/>
             <a:r>
-              <a:rPr sz="1300" b="1">
-                <a:solidFill>
-                  <a:srgbClr val="FFFFFF"/>
-                </a:solidFill>
-                <a:latin typeface="Calibri"/>
-              </a:rPr>
-              <a:t>2</a:t>
+              <a:rPr sz="1600" b="1">
+                <a:solidFill>
+                  <a:srgbClr val="202122"/>
+                </a:solidFill>
+                <a:latin typeface="Calibri"/>
+              </a:rPr>
+              <a:t>3</a:t>
+            </a:r>
+          </a:p>
+        </p:txBody>
+      </p:sp>
+      <p:sp>
+        <p:nvSpPr>
+          <p:cNvPr id="11" name="TextBox 10"/>
+          <p:cNvSpPr txBox="1"/>
+          <p:nvPr/>
+        </p:nvSpPr>
+        <p:spPr>
+          <a:xfrm>
+            <a:off x="1371600" y="4480560"/>
+            <a:ext cx="10271455" cy="1188720"/>
+          </a:xfrm>
+          <a:prstGeom prst="rect">
+            <a:avLst/>
+          </a:prstGeom>
+          <a:noFill/>
+        </p:spPr>
+        <p:txBody>
+          <a:bodyPr wrap="square" anchor="t" lIns="0" rIns="0" tIns="0" bIns="0"/>
+          <a:lstStyle/>
+          <a:p>
+            <a:pPr algn="l"/>
+            <a:r>
+              <a:rPr sz="2400" b="0" i="0">
+                <a:solidFill>
+                  <a:srgbClr val="202122"/>
+                </a:solidFill>
+                <a:latin typeface="Calibri"/>
+              </a:rPr>
+              <a:t>What is merge sort's drawback?</a:t>
             </a:r>
           </a:p>
         </p:txBody>
@@ -8218,8 +11455,8 @@
         </p:nvSpPr>
         <p:spPr>
           <a:xfrm>
-            <a:off x="1143000" y="3218688"/>
-            <a:ext cx="5943600" cy="868680"/>
+            <a:off x="548640" y="5852160"/>
+            <a:ext cx="11094415" cy="365760"/>
           </a:xfrm>
           <a:prstGeom prst="rect">
             <a:avLst/>
@@ -8227,353 +11464,18 @@
           <a:noFill/>
         </p:spPr>
         <p:txBody>
-          <a:bodyPr wrap="square" anchor="ctr" lIns="0" rIns="0" tIns="0" bIns="0"/>
+          <a:bodyPr wrap="square" anchor="t" lIns="0" rIns="0" tIns="0" bIns="0"/>
           <a:lstStyle/>
           <a:p>
             <a:pPr algn="l"/>
             <a:r>
-              <a:rPr sz="1700" b="0" i="0">
-                <a:solidFill>
-                  <a:srgbClr val="202122"/>
-                </a:solidFill>
-                <a:latin typeface="Calibri"/>
-              </a:rPr>
-              <a:t>Sort yourselves using bubble sort, counting comparisons.</a:t>
-            </a:r>
-          </a:p>
-        </p:txBody>
-      </p:sp>
-      <p:sp>
-        <p:nvSpPr>
-          <p:cNvPr id="13" name="Oval 12"/>
-          <p:cNvSpPr/>
-          <p:nvPr/>
-        </p:nvSpPr>
-        <p:spPr>
-          <a:xfrm>
-            <a:off x="548640" y="4439412"/>
-            <a:ext cx="384048" cy="384048"/>
-          </a:xfrm>
-          <a:prstGeom prst="ellipse">
-            <a:avLst/>
-          </a:prstGeom>
-          <a:solidFill>
-            <a:srgbClr val="0645AD"/>
-          </a:solidFill>
-          <a:ln>
-            <a:noFill/>
-          </a:ln>
-          <a:effectLst/>
-        </p:spPr>
-        <p:style>
-          <a:lnRef idx="1">
-            <a:schemeClr val="accent1"/>
-          </a:lnRef>
-          <a:fillRef idx="3">
-            <a:schemeClr val="accent1"/>
-          </a:fillRef>
-          <a:effectRef idx="2">
-            <a:schemeClr val="accent1"/>
-          </a:effectRef>
-          <a:fontRef idx="minor">
-            <a:schemeClr val="lt1"/>
-          </a:fontRef>
-        </p:style>
-        <p:txBody>
-          <a:bodyPr rtlCol="0" anchor="ctr" lIns="0" rIns="0" tIns="0" bIns="0"/>
-          <a:lstStyle/>
-          <a:p>
-            <a:pPr algn="ctr"/>
-            <a:r>
-              <a:rPr sz="1300" b="1">
-                <a:solidFill>
-                  <a:srgbClr val="FFFFFF"/>
-                </a:solidFill>
-                <a:latin typeface="Calibri"/>
-              </a:rPr>
-              <a:t>3</a:t>
-            </a:r>
-          </a:p>
-        </p:txBody>
-      </p:sp>
-      <p:sp>
-        <p:nvSpPr>
-          <p:cNvPr id="14" name="TextBox 13"/>
-          <p:cNvSpPr txBox="1"/>
-          <p:nvPr/>
-        </p:nvSpPr>
-        <p:spPr>
-          <a:xfrm>
-            <a:off x="1143000" y="4197096"/>
-            <a:ext cx="5943600" cy="868680"/>
-          </a:xfrm>
-          <a:prstGeom prst="rect">
-            <a:avLst/>
-          </a:prstGeom>
-          <a:noFill/>
-        </p:spPr>
-        <p:txBody>
-          <a:bodyPr wrap="square" anchor="ctr" lIns="0" rIns="0" tIns="0" bIns="0"/>
-          <a:lstStyle/>
-          <a:p>
-            <a:pPr algn="l"/>
-            <a:r>
-              <a:rPr sz="1700" b="0" i="0">
-                <a:solidFill>
-                  <a:srgbClr val="202122"/>
-                </a:solidFill>
-                <a:latin typeface="Calibri"/>
-              </a:rPr>
-              <a:t>Shuffle and repeat with insertion sort, then merge sort.</a:t>
-            </a:r>
-          </a:p>
-        </p:txBody>
-      </p:sp>
-      <p:sp>
-        <p:nvSpPr>
-          <p:cNvPr id="15" name="Oval 14"/>
-          <p:cNvSpPr/>
-          <p:nvPr/>
-        </p:nvSpPr>
-        <p:spPr>
-          <a:xfrm>
-            <a:off x="548640" y="5417820"/>
-            <a:ext cx="384048" cy="384048"/>
-          </a:xfrm>
-          <a:prstGeom prst="ellipse">
-            <a:avLst/>
-          </a:prstGeom>
-          <a:solidFill>
-            <a:srgbClr val="0645AD"/>
-          </a:solidFill>
-          <a:ln>
-            <a:noFill/>
-          </a:ln>
-          <a:effectLst/>
-        </p:spPr>
-        <p:style>
-          <a:lnRef idx="1">
-            <a:schemeClr val="accent1"/>
-          </a:lnRef>
-          <a:fillRef idx="3">
-            <a:schemeClr val="accent1"/>
-          </a:fillRef>
-          <a:effectRef idx="2">
-            <a:schemeClr val="accent1"/>
-          </a:effectRef>
-          <a:fontRef idx="minor">
-            <a:schemeClr val="lt1"/>
-          </a:fontRef>
-        </p:style>
-        <p:txBody>
-          <a:bodyPr rtlCol="0" anchor="ctr" lIns="0" rIns="0" tIns="0" bIns="0"/>
-          <a:lstStyle/>
-          <a:p>
-            <a:pPr algn="ctr"/>
-            <a:r>
-              <a:rPr sz="1300" b="1">
-                <a:solidFill>
-                  <a:srgbClr val="FFFFFF"/>
-                </a:solidFill>
-                <a:latin typeface="Calibri"/>
-              </a:rPr>
-              <a:t>4</a:t>
-            </a:r>
-          </a:p>
-        </p:txBody>
-      </p:sp>
-      <p:sp>
-        <p:nvSpPr>
-          <p:cNvPr id="16" name="TextBox 15"/>
-          <p:cNvSpPr txBox="1"/>
-          <p:nvPr/>
-        </p:nvSpPr>
-        <p:spPr>
-          <a:xfrm>
-            <a:off x="1143000" y="5175504"/>
-            <a:ext cx="5943600" cy="868680"/>
-          </a:xfrm>
-          <a:prstGeom prst="rect">
-            <a:avLst/>
-          </a:prstGeom>
-          <a:noFill/>
-        </p:spPr>
-        <p:txBody>
-          <a:bodyPr wrap="square" anchor="ctr" lIns="0" rIns="0" tIns="0" bIns="0"/>
-          <a:lstStyle/>
-          <a:p>
-            <a:pPr algn="l"/>
-            <a:r>
-              <a:rPr sz="1700" b="0" i="0">
-                <a:solidFill>
-                  <a:srgbClr val="202122"/>
-                </a:solidFill>
-                <a:latin typeface="Calibri"/>
-              </a:rPr>
-              <a:t>Compare the counts and write a rule for when to use each.</a:t>
-            </a:r>
-          </a:p>
-        </p:txBody>
-      </p:sp>
-      <p:sp>
-        <p:nvSpPr>
-          <p:cNvPr id="17" name="Rounded Rectangle 16"/>
-          <p:cNvSpPr/>
-          <p:nvPr/>
-        </p:nvSpPr>
-        <p:spPr>
-          <a:xfrm>
-            <a:off x="7772400" y="1508760"/>
-            <a:ext cx="3867912" cy="4572000"/>
-          </a:xfrm>
-          <a:prstGeom prst="roundRect">
-            <a:avLst>
-              <a:gd name="adj" fmla="val 8000"/>
-            </a:avLst>
-          </a:prstGeom>
-          <a:solidFill>
-            <a:srgbClr val="EAF3FF"/>
-          </a:solidFill>
-          <a:ln>
-            <a:noFill/>
-          </a:ln>
-          <a:effectLst/>
-        </p:spPr>
-        <p:style>
-          <a:lnRef idx="1">
-            <a:schemeClr val="accent1"/>
-          </a:lnRef>
-          <a:fillRef idx="3">
-            <a:schemeClr val="accent1"/>
-          </a:fillRef>
-          <a:effectRef idx="2">
-            <a:schemeClr val="accent1"/>
-          </a:effectRef>
-          <a:fontRef idx="minor">
-            <a:schemeClr val="lt1"/>
-          </a:fontRef>
-        </p:style>
-        <p:txBody>
-          <a:bodyPr rtlCol="0" anchor="ctr"/>
-          <a:lstStyle/>
-          <a:p/>
-        </p:txBody>
-      </p:sp>
-      <p:sp>
-        <p:nvSpPr>
-          <p:cNvPr id="18" name="TextBox 17"/>
-          <p:cNvSpPr txBox="1"/>
-          <p:nvPr/>
-        </p:nvSpPr>
-        <p:spPr>
-          <a:xfrm>
-            <a:off x="8046720" y="1737360"/>
-            <a:ext cx="3291840" cy="365760"/>
-          </a:xfrm>
-          <a:prstGeom prst="rect">
-            <a:avLst/>
-          </a:prstGeom>
-          <a:noFill/>
-        </p:spPr>
-        <p:txBody>
-          <a:bodyPr wrap="square" anchor="t" lIns="0" rIns="0" tIns="0" bIns="0"/>
-          <a:lstStyle/>
-          <a:p>
-            <a:pPr algn="l"/>
-            <a:r>
-              <a:rPr sz="1300" b="1" i="0">
-                <a:solidFill>
-                  <a:srgbClr val="0645AD"/>
-                </a:solidFill>
-                <a:latin typeface="Calibri"/>
-              </a:rPr>
-              <a:t>SUCCESS CRITERIA</a:t>
-            </a:r>
-          </a:p>
-        </p:txBody>
-      </p:sp>
-      <p:sp>
-        <p:nvSpPr>
-          <p:cNvPr id="19" name="TextBox 18"/>
-          <p:cNvSpPr txBox="1"/>
-          <p:nvPr/>
-        </p:nvSpPr>
-        <p:spPr>
-          <a:xfrm>
-            <a:off x="8046720" y="2240280"/>
-            <a:ext cx="3337560" cy="3657600"/>
-          </a:xfrm>
-          <a:prstGeom prst="rect">
-            <a:avLst/>
-          </a:prstGeom>
-          <a:noFill/>
-        </p:spPr>
-        <p:txBody>
-          <a:bodyPr wrap="square" lIns="0" rIns="0" tIns="0" bIns="0">
-            <a:spAutoFit/>
-          </a:bodyPr>
-          <a:lstStyle/>
-          <a:p>
-            <a:pPr marL="274320" indent="-274320">
-              <a:spcAft>
-                <a:spcPts val="810"/>
-              </a:spcAft>
-              <a:buClr>
-                <a:srgbClr val="0645AD"/>
-              </a:buClr>
-              <a:buFont typeface="Arial"/>
-              <a:buChar char="•"/>
-            </a:pPr>
-            <a:r>
-              <a:rPr sz="1800" b="0">
-                <a:solidFill>
-                  <a:srgbClr val="202122"/>
-                </a:solidFill>
-                <a:latin typeface="Calibri"/>
-              </a:rPr>
-              <a:t>Each algorithm followed correctly</a:t>
-            </a:r>
-          </a:p>
-          <a:p>
-            <a:pPr marL="274320" indent="-274320">
-              <a:spcAft>
-                <a:spcPts val="810"/>
-              </a:spcAft>
-              <a:buClr>
-                <a:srgbClr val="0645AD"/>
-              </a:buClr>
-              <a:buFont typeface="Arial"/>
-              <a:buChar char="•"/>
-            </a:pPr>
-            <a:r>
-              <a:rPr sz="1800" b="0">
-                <a:solidFill>
-                  <a:srgbClr val="202122"/>
-                </a:solidFill>
-                <a:latin typeface="Calibri"/>
-              </a:rPr>
-              <a:t>Comparisons counted</a:t>
-            </a:r>
-          </a:p>
-          <a:p>
-            <a:pPr marL="274320" indent="-274320">
-              <a:spcAft>
-                <a:spcPts val="810"/>
-              </a:spcAft>
-              <a:buClr>
-                <a:srgbClr val="0645AD"/>
-              </a:buClr>
-              <a:buFont typeface="Arial"/>
-              <a:buChar char="•"/>
-            </a:pPr>
-            <a:r>
-              <a:rPr sz="1800" b="0">
-                <a:solidFill>
-                  <a:srgbClr val="202122"/>
-                </a:solidFill>
-                <a:latin typeface="Calibri"/>
-              </a:rPr>
-              <a:t>Rule is justified with evidence</a:t>
+              <a:rPr sz="1300" b="0" i="1">
+                <a:solidFill>
+                  <a:srgbClr val="54595D"/>
+                </a:solidFill>
+                <a:latin typeface="Calibri"/>
+              </a:rPr>
+              <a:t>Answer on mini whiteboards or in your book. Answers are in the speaker notes.</a:t>
             </a:r>
           </a:p>
         </p:txBody>
@@ -8592,7 +11494,7 @@
     <p:bg>
       <p:bgPr>
         <a:solidFill>
-          <a:srgbClr val="03306E"/>
+          <a:srgbClr val="FFFFFF"/>
         </a:solidFill>
         <a:effectLst/>
       </p:bgPr>
@@ -8628,7 +11530,7 @@
             <a:r>
               <a:rPr sz="1100" b="1" i="0">
                 <a:solidFill>
-                  <a:srgbClr val="A9C8F0"/>
+                  <a:srgbClr val="54595D"/>
                 </a:solidFill>
                 <a:latin typeface="Calibri"/>
               </a:rPr>
@@ -8661,25 +11563,222 @@
             <a:r>
               <a:rPr sz="3200" b="1" i="0">
                 <a:solidFill>
-                  <a:srgbClr val="FFFFFF"/>
+                  <a:srgbClr val="03306E"/>
                 </a:solidFill>
                 <a:latin typeface="Cambria"/>
               </a:rPr>
-              <a:t>Exit ticket</a:t>
-            </a:r>
-          </a:p>
-        </p:txBody>
-      </p:sp>
-      <p:sp>
-        <p:nvSpPr>
-          <p:cNvPr id="4" name="Oval 3"/>
+              <a:t>Comparing algorithms</a:t>
+            </a:r>
+          </a:p>
+        </p:txBody>
+      </p:sp>
+      <p:sp>
+        <p:nvSpPr>
+          <p:cNvPr id="4" name="TextBox 3"/>
+          <p:cNvSpPr txBox="1"/>
+          <p:nvPr/>
+        </p:nvSpPr>
+        <p:spPr>
+          <a:xfrm>
+            <a:off x="548640" y="6446520"/>
+            <a:ext cx="8229600" cy="274320"/>
+          </a:xfrm>
+          <a:prstGeom prst="rect">
+            <a:avLst/>
+          </a:prstGeom>
+          <a:noFill/>
+        </p:spPr>
+        <p:txBody>
+          <a:bodyPr wrap="square" anchor="t" lIns="0" rIns="0" tIns="0" bIns="0"/>
+          <a:lstStyle/>
+          <a:p>
+            <a:pPr algn="l"/>
+            <a:r>
+              <a:rPr sz="1000" b="0" i="0">
+                <a:solidFill>
+                  <a:srgbClr val="54595D"/>
+                </a:solidFill>
+                <a:latin typeface="Calibri"/>
+              </a:rPr>
+              <a:t>Digital Software Development T Level  ·  Searching and Sorting Algorithms</a:t>
+            </a:r>
+          </a:p>
+        </p:txBody>
+      </p:sp>
+      <p:sp>
+        <p:nvSpPr>
+          <p:cNvPr id="5" name="TextBox 4"/>
+          <p:cNvSpPr txBox="1"/>
+          <p:nvPr/>
+        </p:nvSpPr>
+        <p:spPr>
+          <a:xfrm>
+            <a:off x="10728655" y="6446520"/>
+            <a:ext cx="914400" cy="274320"/>
+          </a:xfrm>
+          <a:prstGeom prst="rect">
+            <a:avLst/>
+          </a:prstGeom>
+          <a:noFill/>
+        </p:spPr>
+        <p:txBody>
+          <a:bodyPr wrap="square" anchor="t" lIns="0" rIns="0" tIns="0" bIns="0"/>
+          <a:lstStyle/>
+          <a:p>
+            <a:pPr algn="r"/>
+            <a:r>
+              <a:rPr sz="1000" b="0" i="0">
+                <a:solidFill>
+                  <a:srgbClr val="54595D"/>
+                </a:solidFill>
+                <a:latin typeface="Calibri"/>
+              </a:rPr>
+              <a:t>9</a:t>
+            </a:r>
+          </a:p>
+        </p:txBody>
+      </p:sp>
+      <p:sp>
+        <p:nvSpPr>
+          <p:cNvPr id="6" name="TextBox 5"/>
+          <p:cNvSpPr txBox="1"/>
+          <p:nvPr/>
+        </p:nvSpPr>
+        <p:spPr>
+          <a:xfrm>
+            <a:off x="548640" y="1554480"/>
+            <a:ext cx="6720840" cy="4617720"/>
+          </a:xfrm>
+          <a:prstGeom prst="rect">
+            <a:avLst/>
+          </a:prstGeom>
+          <a:noFill/>
+        </p:spPr>
+        <p:txBody>
+          <a:bodyPr wrap="square" lIns="0" rIns="0" tIns="0" bIns="0">
+            <a:spAutoFit/>
+          </a:bodyPr>
+          <a:lstStyle/>
+          <a:p>
+            <a:pPr>
+              <a:spcAft>
+                <a:spcPts val="1260"/>
+              </a:spcAft>
+            </a:pPr>
+            <a:r>
+              <a:rPr sz="2100" b="0">
+                <a:solidFill>
+                  <a:srgbClr val="202122"/>
+                </a:solidFill>
+                <a:latin typeface="Calibri"/>
+              </a:rPr>
+              <a:t>Algorithms that do the same job can perform very differently.</a:t>
+            </a:r>
+          </a:p>
+          <a:p>
+            <a:pPr>
+              <a:spcAft>
+                <a:spcPts val="1260"/>
+              </a:spcAft>
+            </a:pPr>
+            <a:r>
+              <a:rPr sz="2100" b="0">
+                <a:solidFill>
+                  <a:srgbClr val="202122"/>
+                </a:solidFill>
+                <a:latin typeface="Calibri"/>
+              </a:rPr>
+              <a:t>Compare them by execution time (how long they take as the data grows), memory use (merge sort needs extra space; bubble and insertion sort work in place) and the number of comparisons they make.</a:t>
+            </a:r>
+          </a:p>
+          <a:p>
+            <a:pPr>
+              <a:spcAft>
+                <a:spcPts val="1260"/>
+              </a:spcAft>
+            </a:pPr>
+            <a:r>
+              <a:rPr sz="2100" b="0">
+                <a:solidFill>
+                  <a:srgbClr val="202122"/>
+                </a:solidFill>
+                <a:latin typeface="Calibri"/>
+              </a:rPr>
+              <a:t>Think about best, worst and average cases. Bubble sort on an already sorted list finishes in one pass (best case) but on a reversed list needs the maximum number of passes (worst case).</a:t>
+            </a:r>
+          </a:p>
+          <a:p>
+            <a:pPr>
+              <a:spcAft>
+                <a:spcPts val="1260"/>
+              </a:spcAft>
+            </a:pPr>
+            <a:r>
+              <a:rPr sz="2100" b="0">
+                <a:solidFill>
+                  <a:srgbClr val="202122"/>
+                </a:solidFill>
+                <a:latin typeface="Calibri"/>
+              </a:rPr>
+              <a:t>Choose the algorithm that suits the data size and situation.</a:t>
+            </a:r>
+          </a:p>
+        </p:txBody>
+      </p:sp>
+      <p:sp>
+        <p:nvSpPr>
+          <p:cNvPr id="7" name="Rounded Rectangle 6"/>
           <p:cNvSpPr/>
           <p:nvPr/>
         </p:nvSpPr>
         <p:spPr>
           <a:xfrm>
-            <a:off x="548640" y="1737360"/>
-            <a:ext cx="502920" cy="502920"/>
+            <a:off x="7772400" y="1554480"/>
+            <a:ext cx="3867912" cy="4526280"/>
+          </a:xfrm>
+          <a:prstGeom prst="roundRect">
+            <a:avLst>
+              <a:gd name="adj" fmla="val 8000"/>
+            </a:avLst>
+          </a:prstGeom>
+          <a:solidFill>
+            <a:srgbClr val="03306E"/>
+          </a:solidFill>
+          <a:ln>
+            <a:noFill/>
+          </a:ln>
+          <a:effectLst/>
+        </p:spPr>
+        <p:style>
+          <a:lnRef idx="1">
+            <a:schemeClr val="accent1"/>
+          </a:lnRef>
+          <a:fillRef idx="3">
+            <a:schemeClr val="accent1"/>
+          </a:fillRef>
+          <a:effectRef idx="2">
+            <a:schemeClr val="accent1"/>
+          </a:effectRef>
+          <a:fontRef idx="minor">
+            <a:schemeClr val="lt1"/>
+          </a:fontRef>
+        </p:style>
+        <p:txBody>
+          <a:bodyPr rtlCol="0" anchor="ctr"/>
+          <a:lstStyle/>
+          <a:p/>
+        </p:txBody>
+      </p:sp>
+      <p:sp>
+        <p:nvSpPr>
+          <p:cNvPr id="8" name="Oval 7"/>
+          <p:cNvSpPr/>
+          <p:nvPr/>
+        </p:nvSpPr>
+        <p:spPr>
+          <a:xfrm>
+            <a:off x="8046720" y="1828800"/>
+            <a:ext cx="548640" cy="548640"/>
           </a:xfrm>
           <a:prstGeom prst="ellipse">
             <a:avLst/>
@@ -8712,185 +11811,13 @@
           <a:p>
             <a:pPr algn="ctr"/>
             <a:r>
-              <a:rPr sz="1700" b="1">
+              <a:rPr sz="1300" b="1">
                 <a:solidFill>
                   <a:srgbClr val="202122"/>
                 </a:solidFill>
                 <a:latin typeface="Calibri"/>
               </a:rPr>
-              <a:t>1</a:t>
-            </a:r>
-          </a:p>
-        </p:txBody>
-      </p:sp>
-      <p:sp>
-        <p:nvSpPr>
-          <p:cNvPr id="5" name="TextBox 4"/>
-          <p:cNvSpPr txBox="1"/>
-          <p:nvPr/>
-        </p:nvSpPr>
-        <p:spPr>
-          <a:xfrm>
-            <a:off x="1325880" y="1645920"/>
-            <a:ext cx="6583680" cy="822960"/>
-          </a:xfrm>
-          <a:prstGeom prst="rect">
-            <a:avLst/>
-          </a:prstGeom>
-          <a:noFill/>
-        </p:spPr>
-        <p:txBody>
-          <a:bodyPr wrap="square" anchor="ctr" lIns="0" rIns="0" tIns="0" bIns="0"/>
-          <a:lstStyle/>
-          <a:p>
-            <a:pPr algn="l"/>
-            <a:r>
-              <a:rPr sz="2000" b="0" i="0">
-                <a:solidFill>
-                  <a:srgbClr val="FFFFFF"/>
-                </a:solidFill>
-                <a:latin typeface="Calibri"/>
-              </a:rPr>
-              <a:t>Why can't binary search work on unsorted data?</a:t>
-            </a:r>
-          </a:p>
-        </p:txBody>
-      </p:sp>
-      <p:sp>
-        <p:nvSpPr>
-          <p:cNvPr id="6" name="Oval 5"/>
-          <p:cNvSpPr/>
-          <p:nvPr/>
-        </p:nvSpPr>
-        <p:spPr>
-          <a:xfrm>
-            <a:off x="548640" y="2697480"/>
-            <a:ext cx="502920" cy="502920"/>
-          </a:xfrm>
-          <a:prstGeom prst="ellipse">
-            <a:avLst/>
-          </a:prstGeom>
-          <a:solidFill>
-            <a:srgbClr val="F2B705"/>
-          </a:solidFill>
-          <a:ln>
-            <a:noFill/>
-          </a:ln>
-          <a:effectLst/>
-        </p:spPr>
-        <p:style>
-          <a:lnRef idx="1">
-            <a:schemeClr val="accent1"/>
-          </a:lnRef>
-          <a:fillRef idx="3">
-            <a:schemeClr val="accent1"/>
-          </a:fillRef>
-          <a:effectRef idx="2">
-            <a:schemeClr val="accent1"/>
-          </a:effectRef>
-          <a:fontRef idx="minor">
-            <a:schemeClr val="lt1"/>
-          </a:fontRef>
-        </p:style>
-        <p:txBody>
-          <a:bodyPr rtlCol="0" anchor="ctr" lIns="0" rIns="0" tIns="0" bIns="0"/>
-          <a:lstStyle/>
-          <a:p>
-            <a:pPr algn="ctr"/>
-            <a:r>
-              <a:rPr sz="1700" b="1">
-                <a:solidFill>
-                  <a:srgbClr val="202122"/>
-                </a:solidFill>
-                <a:latin typeface="Calibri"/>
-              </a:rPr>
-              <a:t>2</a:t>
-            </a:r>
-          </a:p>
-        </p:txBody>
-      </p:sp>
-      <p:sp>
-        <p:nvSpPr>
-          <p:cNvPr id="7" name="TextBox 6"/>
-          <p:cNvSpPr txBox="1"/>
-          <p:nvPr/>
-        </p:nvSpPr>
-        <p:spPr>
-          <a:xfrm>
-            <a:off x="1325880" y="2606040"/>
-            <a:ext cx="6583680" cy="822960"/>
-          </a:xfrm>
-          <a:prstGeom prst="rect">
-            <a:avLst/>
-          </a:prstGeom>
-          <a:noFill/>
-        </p:spPr>
-        <p:txBody>
-          <a:bodyPr wrap="square" anchor="ctr" lIns="0" rIns="0" tIns="0" bIns="0"/>
-          <a:lstStyle/>
-          <a:p>
-            <a:pPr algn="l"/>
-            <a:r>
-              <a:rPr sz="2000" b="0" i="0">
-                <a:solidFill>
-                  <a:srgbClr val="FFFFFF"/>
-                </a:solidFill>
-                <a:latin typeface="Calibri"/>
-              </a:rPr>
-              <a:t>What is the worst case for bubble sort?</a:t>
-            </a:r>
-          </a:p>
-        </p:txBody>
-      </p:sp>
-      <p:sp>
-        <p:nvSpPr>
-          <p:cNvPr id="8" name="Oval 7"/>
-          <p:cNvSpPr/>
-          <p:nvPr/>
-        </p:nvSpPr>
-        <p:spPr>
-          <a:xfrm>
-            <a:off x="548640" y="3657600"/>
-            <a:ext cx="502920" cy="502920"/>
-          </a:xfrm>
-          <a:prstGeom prst="ellipse">
-            <a:avLst/>
-          </a:prstGeom>
-          <a:solidFill>
-            <a:srgbClr val="F2B705"/>
-          </a:solidFill>
-          <a:ln>
-            <a:noFill/>
-          </a:ln>
-          <a:effectLst/>
-        </p:spPr>
-        <p:style>
-          <a:lnRef idx="1">
-            <a:schemeClr val="accent1"/>
-          </a:lnRef>
-          <a:fillRef idx="3">
-            <a:schemeClr val="accent1"/>
-          </a:fillRef>
-          <a:effectRef idx="2">
-            <a:schemeClr val="accent1"/>
-          </a:effectRef>
-          <a:fontRef idx="minor">
-            <a:schemeClr val="lt1"/>
-          </a:fontRef>
-        </p:style>
-        <p:txBody>
-          <a:bodyPr rtlCol="0" anchor="ctr" lIns="0" rIns="0" tIns="0" bIns="0"/>
-          <a:lstStyle/>
-          <a:p>
-            <a:pPr algn="ctr"/>
-            <a:r>
-              <a:rPr sz="1700" b="1">
-                <a:solidFill>
-                  <a:srgbClr val="202122"/>
-                </a:solidFill>
-                <a:latin typeface="Calibri"/>
-              </a:rPr>
-              <a:t>3</a:t>
+              <a:t>e.g.</a:t>
             </a:r>
           </a:p>
         </p:txBody>
@@ -8903,8 +11830,8 @@
         </p:nvSpPr>
         <p:spPr>
           <a:xfrm>
-            <a:off x="1325880" y="3566160"/>
-            <a:ext cx="6583680" cy="822960"/>
+            <a:off x="8046720" y="2560320"/>
+            <a:ext cx="3291840" cy="365760"/>
           </a:xfrm>
           <a:prstGeom prst="rect">
             <a:avLst/>
@@ -8912,194 +11839,51 @@
           <a:noFill/>
         </p:spPr>
         <p:txBody>
-          <a:bodyPr wrap="square" anchor="ctr" lIns="0" rIns="0" tIns="0" bIns="0"/>
+          <a:bodyPr wrap="square" anchor="t" lIns="0" rIns="0" tIns="0" bIns="0"/>
           <a:lstStyle/>
           <a:p>
             <a:pPr algn="l"/>
             <a:r>
-              <a:rPr sz="2000" b="0" i="0">
+              <a:rPr sz="1300" b="1" i="0">
+                <a:solidFill>
+                  <a:srgbClr val="A9C8F0"/>
+                </a:solidFill>
+                <a:latin typeface="Calibri"/>
+              </a:rPr>
+              <a:t>EXAMPLE</a:t>
+            </a:r>
+          </a:p>
+        </p:txBody>
+      </p:sp>
+      <p:sp>
+        <p:nvSpPr>
+          <p:cNvPr id="10" name="TextBox 9"/>
+          <p:cNvSpPr txBox="1"/>
+          <p:nvPr/>
+        </p:nvSpPr>
+        <p:spPr>
+          <a:xfrm>
+            <a:off x="8046720" y="2971800"/>
+            <a:ext cx="3291840" cy="2971800"/>
+          </a:xfrm>
+          <a:prstGeom prst="rect">
+            <a:avLst/>
+          </a:prstGeom>
+          <a:noFill/>
+        </p:spPr>
+        <p:txBody>
+          <a:bodyPr wrap="square" anchor="t" lIns="0" rIns="0" tIns="0" bIns="0"/>
+          <a:lstStyle/>
+          <a:p>
+            <a:pPr algn="l"/>
+            <a:r>
+              <a:rPr sz="1900" b="0" i="0">
                 <a:solidFill>
                   <a:srgbClr val="FFFFFF"/>
                 </a:solidFill>
-                <a:latin typeface="Calibri"/>
-              </a:rPr>
-              <a:t>Which algorithm would you use to sort 1 million records, and why?</a:t>
-            </a:r>
-          </a:p>
-        </p:txBody>
-      </p:sp>
-      <p:sp>
-        <p:nvSpPr>
-          <p:cNvPr id="10" name="Rounded Rectangle 9"/>
-          <p:cNvSpPr/>
-          <p:nvPr/>
-        </p:nvSpPr>
-        <p:spPr>
-          <a:xfrm>
-            <a:off x="8229600" y="1645920"/>
-            <a:ext cx="3410712" cy="2926080"/>
-          </a:xfrm>
-          <a:prstGeom prst="roundRect">
-            <a:avLst>
-              <a:gd name="adj" fmla="val 8000"/>
-            </a:avLst>
-          </a:prstGeom>
-          <a:solidFill>
-            <a:srgbClr val="0645AD"/>
-          </a:solidFill>
-          <a:ln>
-            <a:noFill/>
-          </a:ln>
-          <a:effectLst/>
-        </p:spPr>
-        <p:style>
-          <a:lnRef idx="1">
-            <a:schemeClr val="accent1"/>
-          </a:lnRef>
-          <a:fillRef idx="3">
-            <a:schemeClr val="accent1"/>
-          </a:fillRef>
-          <a:effectRef idx="2">
-            <a:schemeClr val="accent1"/>
-          </a:effectRef>
-          <a:fontRef idx="minor">
-            <a:schemeClr val="lt1"/>
-          </a:fontRef>
-        </p:style>
-        <p:txBody>
-          <a:bodyPr rtlCol="0" anchor="ctr"/>
-          <a:lstStyle/>
-          <a:p/>
-        </p:txBody>
-      </p:sp>
-      <p:sp>
-        <p:nvSpPr>
-          <p:cNvPr id="11" name="TextBox 10"/>
-          <p:cNvSpPr txBox="1"/>
-          <p:nvPr/>
-        </p:nvSpPr>
-        <p:spPr>
-          <a:xfrm>
-            <a:off x="8503920" y="1874519"/>
-            <a:ext cx="2926080" cy="365760"/>
-          </a:xfrm>
-          <a:prstGeom prst="rect">
-            <a:avLst/>
-          </a:prstGeom>
-          <a:noFill/>
-        </p:spPr>
-        <p:txBody>
-          <a:bodyPr wrap="square" anchor="t" lIns="0" rIns="0" tIns="0" bIns="0"/>
-          <a:lstStyle/>
-          <a:p>
-            <a:pPr algn="l"/>
-            <a:r>
-              <a:rPr sz="1300" b="1" i="0">
-                <a:solidFill>
-                  <a:srgbClr val="A9C8F0"/>
-                </a:solidFill>
-                <a:latin typeface="Calibri"/>
-              </a:rPr>
-              <a:t>REVISE THIS TOPIC</a:t>
-            </a:r>
-          </a:p>
-        </p:txBody>
-      </p:sp>
-      <p:sp>
-        <p:nvSpPr>
-          <p:cNvPr id="12" name="TextBox 11"/>
-          <p:cNvSpPr txBox="1"/>
-          <p:nvPr/>
-        </p:nvSpPr>
-        <p:spPr>
-          <a:xfrm>
-            <a:off x="8503920" y="2286000"/>
-            <a:ext cx="2926080" cy="548640"/>
-          </a:xfrm>
-          <a:prstGeom prst="rect">
-            <a:avLst/>
-          </a:prstGeom>
-          <a:noFill/>
-        </p:spPr>
-        <p:txBody>
-          <a:bodyPr wrap="square" anchor="t" lIns="0" rIns="0" tIns="0" bIns="0"/>
-          <a:lstStyle/>
-          <a:p>
-            <a:pPr algn="l"/>
-            <a:r>
-              <a:rPr sz="1400" b="0" i="0">
-                <a:solidFill>
-                  <a:srgbClr val="FFFFFF"/>
-                </a:solidFill>
-                <a:latin typeface="Calibri"/>
-              </a:rPr>
-              <a:t>Revision notes for this lesson are on the study wiki:</a:t>
-            </a:r>
-          </a:p>
-        </p:txBody>
-      </p:sp>
-      <p:sp>
-        <p:nvSpPr>
-          <p:cNvPr id="13" name="TextBox 12"/>
-          <p:cNvSpPr txBox="1"/>
-          <p:nvPr/>
-        </p:nvSpPr>
-        <p:spPr>
-          <a:xfrm>
-            <a:off x="8503920" y="2926080"/>
-            <a:ext cx="2926080" cy="1463040"/>
-          </a:xfrm>
-          <a:prstGeom prst="rect">
-            <a:avLst/>
-          </a:prstGeom>
-          <a:noFill/>
-        </p:spPr>
-        <p:txBody>
-          <a:bodyPr wrap="square" anchor="t" lIns="0" rIns="0" tIns="0" bIns="0"/>
-          <a:lstStyle/>
-          <a:p>
-            <a:pPr algn="l"/>
-            <a:r>
-              <a:rPr sz="2000" b="1" i="0">
-                <a:solidFill>
-                  <a:srgbClr val="FFFFFF"/>
-                </a:solidFill>
                 <a:latin typeface="Cambria"/>
               </a:rPr>
-              <a:t>Core Paper 1: Problem Solving, Programming, Emerging Issues and Legislation</a:t>
-            </a:r>
-          </a:p>
-        </p:txBody>
-      </p:sp>
-      <p:sp>
-        <p:nvSpPr>
-          <p:cNvPr id="14" name="TextBox 13"/>
-          <p:cNvSpPr txBox="1"/>
-          <p:nvPr/>
-        </p:nvSpPr>
-        <p:spPr>
-          <a:xfrm>
-            <a:off x="548640" y="5669280"/>
-            <a:ext cx="11094415" cy="548640"/>
-          </a:xfrm>
-          <a:prstGeom prst="rect">
-            <a:avLst/>
-          </a:prstGeom>
-          <a:noFill/>
-        </p:spPr>
-        <p:txBody>
-          <a:bodyPr wrap="square" anchor="t" lIns="0" rIns="0" tIns="0" bIns="0"/>
-          <a:lstStyle/>
-          <a:p>
-            <a:pPr algn="l"/>
-            <a:r>
-              <a:rPr sz="1200" b="0" i="0">
-                <a:solidFill>
-                  <a:srgbClr val="A9C8F0"/>
-                </a:solidFill>
-                <a:latin typeface="Calibri"/>
-              </a:rPr>
-              <a:t>https://lana6478.github.io/T-level-Digital-Software-Development/#/01-core-component/01-core-paper-1.md</a:t>
+              <a:t>Sorting a class list of 30 names: insertion sort is fine. Sorting 5 million transactions overnight: merge sort.</a:t>
             </a:r>
           </a:p>
         </p:txBody>
